--- a/upload/Презентация_для_ГД_final.pptx
+++ b/upload/Презентация_для_ГД_final.pptx
@@ -5,15 +5,17 @@
     <p:sldMasterId id="2147483650" r:id="rId1"/>
   </p:sldMasterIdLst>
   <p:notesMasterIdLst>
-    <p:notesMasterId r:id="rId8"/>
+    <p:notesMasterId r:id="rId10"/>
   </p:notesMasterIdLst>
   <p:sldIdLst>
     <p:sldId id="256" r:id="rId2"/>
-    <p:sldId id="259" r:id="rId3"/>
-    <p:sldId id="261" r:id="rId4"/>
+    <p:sldId id="261" r:id="rId3"/>
+    <p:sldId id="259" r:id="rId4"/>
     <p:sldId id="257" r:id="rId5"/>
-    <p:sldId id="258" r:id="rId6"/>
-    <p:sldId id="260" r:id="rId7"/>
+    <p:sldId id="262" r:id="rId6"/>
+    <p:sldId id="258" r:id="rId7"/>
+    <p:sldId id="260" r:id="rId8"/>
+    <p:sldId id="263" r:id="rId9"/>
   </p:sldIdLst>
   <p:sldSz cx="9144000" cy="5143500" type="screen16x9"/>
   <p:notesSz cx="5143500" cy="9144000"/>
@@ -194,7 +196,7 @@
           <a:p>
             <a:fld id="{D5FBEEA3-D4FA-4FB4-A72C-31DD37E08AF9}" type="datetimeFigureOut">
               <a:rPr lang="ru-RU" smtClean="0"/>
-              <a:t>02.10.2026</a:t>
+              <a:t>05.10.2026</a:t>
             </a:fld>
             <a:endParaRPr lang="ru-RU"/>
           </a:p>
@@ -732,7 +734,7 @@
           <a:p>
             <a:fld id="{C005345F-A3DA-4B28-9AA6-0DFD2257C5D4}" type="datetimeFigureOut">
               <a:rPr lang="ru-RU" smtClean="0"/>
-              <a:t>02.10.2026</a:t>
+              <a:t>05.10.2026</a:t>
             </a:fld>
             <a:endParaRPr lang="ru-RU"/>
           </a:p>
@@ -903,7 +905,7 @@
           <a:p>
             <a:fld id="{C005345F-A3DA-4B28-9AA6-0DFD2257C5D4}" type="datetimeFigureOut">
               <a:rPr lang="ru-RU" smtClean="0"/>
-              <a:t>02.10.2026</a:t>
+              <a:t>05.10.2026</a:t>
             </a:fld>
             <a:endParaRPr lang="ru-RU"/>
           </a:p>
@@ -1084,7 +1086,7 @@
           <a:p>
             <a:fld id="{C005345F-A3DA-4B28-9AA6-0DFD2257C5D4}" type="datetimeFigureOut">
               <a:rPr lang="ru-RU" smtClean="0"/>
-              <a:t>02.10.2026</a:t>
+              <a:t>05.10.2026</a:t>
             </a:fld>
             <a:endParaRPr lang="ru-RU"/>
           </a:p>
@@ -1285,7 +1287,7 @@
           <a:p>
             <a:fld id="{C005345F-A3DA-4B28-9AA6-0DFD2257C5D4}" type="datetimeFigureOut">
               <a:rPr lang="ru-RU" smtClean="0"/>
-              <a:t>02.10.2026</a:t>
+              <a:t>05.10.2026</a:t>
             </a:fld>
             <a:endParaRPr lang="ru-RU"/>
           </a:p>
@@ -1532,7 +1534,7 @@
           <a:p>
             <a:fld id="{C005345F-A3DA-4B28-9AA6-0DFD2257C5D4}" type="datetimeFigureOut">
               <a:rPr lang="ru-RU" smtClean="0"/>
-              <a:t>02.10.2026</a:t>
+              <a:t>05.10.2026</a:t>
             </a:fld>
             <a:endParaRPr lang="ru-RU"/>
           </a:p>
@@ -1821,7 +1823,7 @@
           <a:p>
             <a:fld id="{C005345F-A3DA-4B28-9AA6-0DFD2257C5D4}" type="datetimeFigureOut">
               <a:rPr lang="ru-RU" smtClean="0"/>
-              <a:t>02.10.2026</a:t>
+              <a:t>05.10.2026</a:t>
             </a:fld>
             <a:endParaRPr lang="ru-RU"/>
           </a:p>
@@ -2244,7 +2246,7 @@
           <a:p>
             <a:fld id="{C005345F-A3DA-4B28-9AA6-0DFD2257C5D4}" type="datetimeFigureOut">
               <a:rPr lang="ru-RU" smtClean="0"/>
-              <a:t>02.10.2026</a:t>
+              <a:t>05.10.2026</a:t>
             </a:fld>
             <a:endParaRPr lang="ru-RU"/>
           </a:p>
@@ -2363,7 +2365,7 @@
           <a:p>
             <a:fld id="{C005345F-A3DA-4B28-9AA6-0DFD2257C5D4}" type="datetimeFigureOut">
               <a:rPr lang="ru-RU" smtClean="0"/>
-              <a:t>02.10.2026</a:t>
+              <a:t>05.10.2026</a:t>
             </a:fld>
             <a:endParaRPr lang="ru-RU"/>
           </a:p>
@@ -2459,7 +2461,7 @@
           <a:p>
             <a:fld id="{C005345F-A3DA-4B28-9AA6-0DFD2257C5D4}" type="datetimeFigureOut">
               <a:rPr lang="ru-RU" smtClean="0"/>
-              <a:t>02.10.2026</a:t>
+              <a:t>05.10.2026</a:t>
             </a:fld>
             <a:endParaRPr lang="ru-RU"/>
           </a:p>
@@ -2737,7 +2739,7 @@
           <a:p>
             <a:fld id="{C005345F-A3DA-4B28-9AA6-0DFD2257C5D4}" type="datetimeFigureOut">
               <a:rPr lang="ru-RU" smtClean="0"/>
-              <a:t>02.10.2026</a:t>
+              <a:t>05.10.2026</a:t>
             </a:fld>
             <a:endParaRPr lang="ru-RU"/>
           </a:p>
@@ -2991,7 +2993,7 @@
           <a:p>
             <a:fld id="{C005345F-A3DA-4B28-9AA6-0DFD2257C5D4}" type="datetimeFigureOut">
               <a:rPr lang="ru-RU" smtClean="0"/>
-              <a:t>02.10.2026</a:t>
+              <a:t>05.10.2026</a:t>
             </a:fld>
             <a:endParaRPr lang="ru-RU"/>
           </a:p>
@@ -3205,7 +3207,7 @@
           <a:p>
             <a:fld id="{C005345F-A3DA-4B28-9AA6-0DFD2257C5D4}" type="datetimeFigureOut">
               <a:rPr lang="ru-RU" smtClean="0"/>
-              <a:t>02.10.2026</a:t>
+              <a:t>05.10.2026</a:t>
             </a:fld>
             <a:endParaRPr lang="ru-RU"/>
           </a:p>
@@ -7232,140 +7234,18 @@
       </p:grpSpPr>
       <p:sp>
         <p:nvSpPr>
-          <p:cNvPr id="2" name="Text 1"/>
+          <p:cNvPr id="2" name="Text 32"/>
           <p:cNvSpPr/>
           <p:nvPr/>
         </p:nvSpPr>
         <p:spPr>
           <a:xfrm>
-            <a:off x="228602" y="283370"/>
-            <a:ext cx="157163" cy="157163"/>
-          </a:xfrm>
-          <a:prstGeom prst="rect">
-            <a:avLst/>
-          </a:prstGeom>
-          <a:noFill/>
-          <a:ln/>
-        </p:spPr>
-        <p:txBody>
-          <a:bodyPr wrap="none" lIns="0" tIns="0" rIns="0" bIns="0" rtlCol="0" anchor="ctr"/>
-          <a:lstStyle/>
-          <a:p>
-            <a:pPr marL="0" indent="0" algn="ctr">
-              <a:buNone/>
-            </a:pPr>
-            <a:endParaRPr lang="en-US" sz="1547" dirty="0"/>
-          </a:p>
-        </p:txBody>
-      </p:sp>
-      <p:sp>
-        <p:nvSpPr>
-          <p:cNvPr id="3" name="Text 2"/>
-          <p:cNvSpPr/>
-          <p:nvPr/>
-        </p:nvSpPr>
-        <p:spPr>
-          <a:xfrm>
-            <a:off x="305885" y="272942"/>
-            <a:ext cx="770453" cy="231458"/>
-          </a:xfrm>
-          <a:prstGeom prst="rect">
-            <a:avLst/>
-          </a:prstGeom>
-          <a:noFill/>
-          <a:ln/>
-        </p:spPr>
-        <p:txBody>
-          <a:bodyPr wrap="none" lIns="0" tIns="0" rIns="0" bIns="0" rtlCol="0" anchor="t"/>
-          <a:lstStyle/>
-          <a:p>
-            <a:pPr marL="0" indent="0" algn="l">
-              <a:lnSpc>
-                <a:spcPts val="1688"/>
-              </a:lnSpc>
-              <a:buNone/>
-            </a:pPr>
-            <a:r>
-              <a:rPr lang="en-US" sz="1600" b="1" kern="0" spc="113" dirty="0">
-                <a:solidFill>
-                  <a:schemeClr val="tx1">
-                    <a:lumMod val="50000"/>
-                    <a:lumOff val="50000"/>
-                  </a:schemeClr>
-                </a:solidFill>
-                <a:latin typeface="Carlito" pitchFamily="34" charset="0"/>
-                <a:ea typeface="Carlito" pitchFamily="34" charset="-122"/>
-                <a:cs typeface="Carlito" pitchFamily="34" charset="-120"/>
-              </a:rPr>
-              <a:t>TITAN</a:t>
-            </a:r>
-            <a:endParaRPr lang="en-US" sz="1600" dirty="0">
-              <a:solidFill>
-                <a:schemeClr val="tx1">
-                  <a:lumMod val="50000"/>
-                  <a:lumOff val="50000"/>
-                </a:schemeClr>
-              </a:solidFill>
-            </a:endParaRPr>
-          </a:p>
-        </p:txBody>
-      </p:sp>
-      <p:sp>
-        <p:nvSpPr>
-          <p:cNvPr id="4" name="Text 5"/>
-          <p:cNvSpPr/>
-          <p:nvPr/>
-        </p:nvSpPr>
-        <p:spPr>
-          <a:xfrm>
-            <a:off x="1118897" y="284939"/>
-            <a:ext cx="1380514" cy="178594"/>
-          </a:xfrm>
-          <a:prstGeom prst="rect">
-            <a:avLst/>
-          </a:prstGeom>
-          <a:noFill/>
-          <a:ln/>
-        </p:spPr>
-        <p:txBody>
-          <a:bodyPr wrap="none" lIns="0" tIns="0" rIns="0" bIns="0" rtlCol="0" anchor="t"/>
-          <a:lstStyle/>
-          <a:p>
-            <a:pPr marL="0" indent="0" algn="l">
-              <a:lnSpc>
-                <a:spcPts val="1406"/>
-              </a:lnSpc>
-              <a:buNone/>
-            </a:pPr>
-            <a:r>
-              <a:rPr lang="en-US" sz="1200" b="1" kern="0" spc="56" dirty="0">
-                <a:solidFill>
-                  <a:srgbClr val="2F3A48"/>
-                </a:solidFill>
-                <a:latin typeface="Carlito" pitchFamily="34" charset="0"/>
-                <a:ea typeface="Carlito" pitchFamily="34" charset="-122"/>
-                <a:cs typeface="Carlito" pitchFamily="34" charset="-120"/>
-              </a:rPr>
-              <a:t>ЧТО СДЕЛАНО</a:t>
-            </a:r>
-            <a:endParaRPr lang="en-US" sz="1200" dirty="0"/>
-          </a:p>
-        </p:txBody>
-      </p:sp>
-      <p:sp>
-        <p:nvSpPr>
-          <p:cNvPr id="5" name="Text 6"/>
-          <p:cNvSpPr/>
-          <p:nvPr/>
-        </p:nvSpPr>
-        <p:spPr>
-          <a:xfrm>
-            <a:off x="7633311" y="245936"/>
-            <a:ext cx="1139029" cy="232029"/>
+            <a:off x="181210" y="609600"/>
+            <a:ext cx="3438289" cy="3352709"/>
           </a:xfrm>
           <a:prstGeom prst="roundRect">
             <a:avLst>
-              <a:gd name="adj" fmla="val 24631"/>
+              <a:gd name="adj" fmla="val 3364"/>
             </a:avLst>
           </a:prstGeom>
           <a:solidFill>
@@ -7385,147 +7265,25 @@
             <a:pPr marL="0" indent="0">
               <a:buNone/>
             </a:pPr>
-            <a:endParaRPr lang="en-US" dirty="0"/>
-          </a:p>
-        </p:txBody>
-      </p:sp>
-      <p:sp>
-        <p:nvSpPr>
-          <p:cNvPr id="6" name="Text 8"/>
+            <a:endParaRPr lang="en-US" sz="2000" dirty="0"/>
+          </a:p>
+        </p:txBody>
+      </p:sp>
+      <p:sp>
+        <p:nvSpPr>
+          <p:cNvPr id="3" name="Shape 33"/>
           <p:cNvSpPr/>
           <p:nvPr/>
         </p:nvSpPr>
         <p:spPr>
           <a:xfrm>
-            <a:off x="7851542" y="314272"/>
-            <a:ext cx="702208" cy="107156"/>
-          </a:xfrm>
-          <a:prstGeom prst="rect">
-            <a:avLst/>
-          </a:prstGeom>
-          <a:noFill/>
-          <a:ln/>
-        </p:spPr>
-        <p:txBody>
-          <a:bodyPr wrap="none" lIns="0" tIns="0" rIns="0" bIns="0" rtlCol="0" anchor="t"/>
-          <a:lstStyle/>
-          <a:p>
-            <a:pPr marL="0" indent="0" algn="l">
-              <a:lnSpc>
-                <a:spcPts val="844"/>
-              </a:lnSpc>
-              <a:buNone/>
-            </a:pPr>
-            <a:r>
-              <a:rPr lang="en-US" sz="600" b="1" kern="0" spc="28" dirty="0">
-                <a:latin typeface="Carlito" pitchFamily="34" charset="0"/>
-                <a:ea typeface="Carlito" pitchFamily="34" charset="-122"/>
-                <a:cs typeface="Carlito" pitchFamily="34" charset="-120"/>
-              </a:rPr>
-              <a:t>ЭТАП 1 · АКТИВЕН</a:t>
-            </a:r>
-            <a:endParaRPr lang="en-US" sz="600" b="1" dirty="0"/>
-          </a:p>
-        </p:txBody>
-      </p:sp>
-      <p:sp>
-        <p:nvSpPr>
-          <p:cNvPr id="21" name="Text 7"/>
-          <p:cNvSpPr/>
-          <p:nvPr/>
-        </p:nvSpPr>
-        <p:spPr>
-          <a:xfrm>
-            <a:off x="7743141" y="333375"/>
-            <a:ext cx="57150" cy="57150"/>
-          </a:xfrm>
-          <a:prstGeom prst="roundRect">
-            <a:avLst>
-              <a:gd name="adj" fmla="val 166650000"/>
-            </a:avLst>
-          </a:prstGeom>
-          <a:solidFill>
-            <a:srgbClr val="2ECC71">
-              <a:alpha val="79000"/>
-            </a:srgbClr>
-          </a:solidFill>
-          <a:ln/>
-        </p:spPr>
-        <p:txBody>
-          <a:bodyPr wrap="square" rtlCol="0" anchor="ctr"/>
-          <a:lstStyle/>
-          <a:p>
-            <a:pPr marL="0" indent="0">
-              <a:buNone/>
-            </a:pPr>
-            <a:endParaRPr lang="en-US" dirty="0"/>
-          </a:p>
-        </p:txBody>
-      </p:sp>
-      <p:sp>
-        <p:nvSpPr>
-          <p:cNvPr id="22" name="Rectangle 2"/>
-          <p:cNvSpPr/>
-          <p:nvPr/>
-        </p:nvSpPr>
-        <p:spPr>
-          <a:xfrm>
-            <a:off x="1021010" y="230807"/>
-            <a:ext cx="28000" cy="250000"/>
-          </a:xfrm>
-          <a:prstGeom prst="rect">
-            <a:avLst/>
-          </a:prstGeom>
-          <a:solidFill>
-            <a:schemeClr val="tx1"/>
-          </a:solidFill>
-          <a:ln>
-            <a:noFill/>
-          </a:ln>
-          <a:effectLst/>
-        </p:spPr>
-        <p:style>
-          <a:lnRef idx="1">
-            <a:schemeClr val="accent1"/>
-          </a:lnRef>
-          <a:fillRef idx="3">
-            <a:schemeClr val="accent1"/>
-          </a:fillRef>
-          <a:effectRef idx="2">
-            <a:schemeClr val="accent1"/>
-          </a:effectRef>
-          <a:fontRef idx="minor">
-            <a:schemeClr val="lt1"/>
-          </a:fontRef>
-        </p:style>
-        <p:txBody>
-          <a:bodyPr rtlCol="0" anchor="ctr"/>
-          <a:lstStyle/>
-          <a:p>
-            <a:pPr algn="ctr"/>
-            <a:endParaRPr/>
-          </a:p>
-        </p:txBody>
-      </p:sp>
-      <p:sp>
-        <p:nvSpPr>
-          <p:cNvPr id="23" name="Text 11"/>
-          <p:cNvSpPr/>
-          <p:nvPr/>
-        </p:nvSpPr>
-        <p:spPr>
-          <a:xfrm>
-            <a:off x="296465" y="757921"/>
-            <a:ext cx="2831269" cy="1721858"/>
-          </a:xfrm>
-          <a:prstGeom prst="roundRect">
-            <a:avLst>
-              <a:gd name="adj" fmla="val 3364"/>
-            </a:avLst>
-          </a:prstGeom>
-          <a:solidFill>
-            <a:srgbClr val="FFFFFF"/>
-          </a:solidFill>
+            <a:off x="270508" y="1660171"/>
+            <a:ext cx="3221404" cy="0"/>
+          </a:xfrm>
+          <a:prstGeom prst="line">
+            <a:avLst/>
+          </a:prstGeom>
+          <a:noFill/>
           <a:ln w="7144">
             <a:solidFill>
               <a:srgbClr val="D9D2C2"/>
@@ -7533,6 +7291,28 @@
             <a:prstDash val="solid"/>
           </a:ln>
         </p:spPr>
+      </p:sp>
+      <p:sp>
+        <p:nvSpPr>
+          <p:cNvPr id="4" name="Text 34"/>
+          <p:cNvSpPr/>
+          <p:nvPr/>
+        </p:nvSpPr>
+        <p:spPr>
+          <a:xfrm>
+            <a:off x="270507" y="1068214"/>
+            <a:ext cx="51771" cy="129765"/>
+          </a:xfrm>
+          <a:prstGeom prst="roundRect">
+            <a:avLst>
+              <a:gd name="adj" fmla="val 88890"/>
+            </a:avLst>
+          </a:prstGeom>
+          <a:solidFill>
+            <a:srgbClr val="B5614A"/>
+          </a:solidFill>
+          <a:ln/>
+        </p:spPr>
         <p:txBody>
           <a:bodyPr wrap="square" rtlCol="0" anchor="ctr"/>
           <a:lstStyle/>
@@ -7540,20 +7320,955 @@
             <a:pPr marL="0" indent="0">
               <a:buNone/>
             </a:pPr>
-            <a:endParaRPr lang="en-US" dirty="0"/>
-          </a:p>
-        </p:txBody>
-      </p:sp>
-      <p:sp>
-        <p:nvSpPr>
-          <p:cNvPr id="24" name="Shape 12"/>
+            <a:endParaRPr lang="en-US" sz="2000" dirty="0"/>
+          </a:p>
+        </p:txBody>
+      </p:sp>
+      <p:sp>
+        <p:nvSpPr>
+          <p:cNvPr id="5" name="Text 35"/>
           <p:cNvSpPr/>
           <p:nvPr/>
         </p:nvSpPr>
         <p:spPr>
           <a:xfrm>
-            <a:off x="385762" y="1047243"/>
-            <a:ext cx="2652675" cy="0"/>
+            <a:off x="349085" y="1079609"/>
+            <a:ext cx="156157" cy="145987"/>
+          </a:xfrm>
+          <a:prstGeom prst="rect">
+            <a:avLst/>
+          </a:prstGeom>
+          <a:noFill/>
+          <a:ln/>
+        </p:spPr>
+        <p:txBody>
+          <a:bodyPr wrap="none" lIns="0" tIns="0" rIns="0" bIns="0" rtlCol="0" anchor="ctr"/>
+          <a:lstStyle/>
+          <a:p>
+            <a:pPr marL="0" indent="0" algn="ctr">
+              <a:buNone/>
+            </a:pPr>
+            <a:r>
+              <a:rPr lang="en-US" sz="1400" dirty="0">
+                <a:solidFill>
+                  <a:srgbClr val="B5614A"/>
+                </a:solidFill>
+                <a:latin typeface="Segoe UI Symbol" pitchFamily="34" charset="0"/>
+                <a:ea typeface="Segoe UI Symbol" pitchFamily="34" charset="-122"/>
+                <a:cs typeface="Segoe UI Symbol" pitchFamily="34" charset="-120"/>
+              </a:rPr>
+              <a:t>🛒</a:t>
+            </a:r>
+            <a:endParaRPr lang="en-US" sz="1400" dirty="0"/>
+          </a:p>
+        </p:txBody>
+      </p:sp>
+      <p:sp>
+        <p:nvSpPr>
+          <p:cNvPr id="6" name="Text 36"/>
+          <p:cNvSpPr/>
+          <p:nvPr/>
+        </p:nvSpPr>
+        <p:spPr>
+          <a:xfrm>
+            <a:off x="534823" y="1072803"/>
+            <a:ext cx="2900418" cy="158152"/>
+          </a:xfrm>
+          <a:prstGeom prst="rect">
+            <a:avLst/>
+          </a:prstGeom>
+          <a:noFill/>
+          <a:ln/>
+        </p:spPr>
+        <p:txBody>
+          <a:bodyPr wrap="none" lIns="0" tIns="0" rIns="0" bIns="0" rtlCol="0" anchor="t"/>
+          <a:lstStyle/>
+          <a:p>
+            <a:pPr marL="0" indent="0" algn="l">
+              <a:lnSpc>
+                <a:spcPts val="1097"/>
+              </a:lnSpc>
+              <a:buNone/>
+            </a:pPr>
+            <a:r>
+              <a:rPr lang="en-US" sz="1050" b="1" kern="0" spc="84" dirty="0">
+                <a:latin typeface="Carlito" pitchFamily="34" charset="0"/>
+                <a:ea typeface="Carlito" pitchFamily="34" charset="-122"/>
+                <a:cs typeface="Carlito" pitchFamily="34" charset="-120"/>
+              </a:rPr>
+              <a:t>СЕТЕВОЙ </a:t>
+            </a:r>
+            <a:r>
+              <a:rPr lang="en-US" sz="1050" b="1" kern="0" spc="84" dirty="0" smtClean="0">
+                <a:latin typeface="Carlito" pitchFamily="34" charset="0"/>
+                <a:ea typeface="Carlito" pitchFamily="34" charset="-122"/>
+                <a:cs typeface="Carlito" pitchFamily="34" charset="-120"/>
+              </a:rPr>
+              <a:t>КАНАЛ</a:t>
+            </a:r>
+            <a:r>
+              <a:rPr lang="ru-RU" sz="1050" b="1" kern="0" spc="84" dirty="0" smtClean="0">
+                <a:latin typeface="Carlito" pitchFamily="34" charset="0"/>
+                <a:ea typeface="Carlito" pitchFamily="34" charset="-122"/>
+                <a:cs typeface="Carlito" pitchFamily="34" charset="-120"/>
+              </a:rPr>
+              <a:t> – </a:t>
+            </a:r>
+            <a:r>
+              <a:rPr lang="ru-RU" sz="1050" b="1" kern="0" spc="84" dirty="0" err="1" smtClean="0">
+                <a:latin typeface="Carlito" pitchFamily="34" charset="0"/>
+                <a:ea typeface="Carlito" pitchFamily="34" charset="-122"/>
+                <a:cs typeface="Carlito" pitchFamily="34" charset="-120"/>
+              </a:rPr>
+              <a:t>Лемана</a:t>
+            </a:r>
+            <a:r>
+              <a:rPr lang="ru-RU" sz="1050" b="1" kern="0" spc="84" dirty="0" smtClean="0">
+                <a:latin typeface="Carlito" pitchFamily="34" charset="0"/>
+                <a:ea typeface="Carlito" pitchFamily="34" charset="-122"/>
+                <a:cs typeface="Carlito" pitchFamily="34" charset="-120"/>
+              </a:rPr>
+              <a:t> Про</a:t>
+            </a:r>
+            <a:endParaRPr lang="en-US" sz="1050" dirty="0"/>
+          </a:p>
+        </p:txBody>
+      </p:sp>
+      <p:sp>
+        <p:nvSpPr>
+          <p:cNvPr id="7" name="Text 37"/>
+          <p:cNvSpPr/>
+          <p:nvPr/>
+        </p:nvSpPr>
+        <p:spPr>
+          <a:xfrm>
+            <a:off x="270505" y="1751383"/>
+            <a:ext cx="111044" cy="103812"/>
+          </a:xfrm>
+          <a:prstGeom prst="rect">
+            <a:avLst/>
+          </a:prstGeom>
+          <a:noFill/>
+          <a:ln/>
+        </p:spPr>
+        <p:txBody>
+          <a:bodyPr wrap="none" lIns="0" tIns="0" rIns="0" bIns="0" rtlCol="0" anchor="ctr"/>
+          <a:lstStyle/>
+          <a:p>
+            <a:pPr marL="0" indent="0" algn="ctr">
+              <a:buNone/>
+            </a:pPr>
+            <a:r>
+              <a:rPr lang="en-US" sz="900" dirty="0">
+                <a:latin typeface="Segoe UI Symbol" pitchFamily="34" charset="0"/>
+                <a:ea typeface="Segoe UI Symbol" pitchFamily="34" charset="-122"/>
+                <a:cs typeface="Segoe UI Symbol" pitchFamily="34" charset="-120"/>
+              </a:rPr>
+              <a:t>🏪</a:t>
+            </a:r>
+            <a:endParaRPr lang="en-US" sz="900" dirty="0"/>
+          </a:p>
+        </p:txBody>
+      </p:sp>
+      <p:sp>
+        <p:nvSpPr>
+          <p:cNvPr id="8" name="Text 38"/>
+          <p:cNvSpPr/>
+          <p:nvPr/>
+        </p:nvSpPr>
+        <p:spPr>
+          <a:xfrm>
+            <a:off x="399091" y="1728084"/>
+            <a:ext cx="3065249" cy="179430"/>
+          </a:xfrm>
+          <a:prstGeom prst="rect">
+            <a:avLst/>
+          </a:prstGeom>
+          <a:noFill/>
+          <a:ln/>
+        </p:spPr>
+        <p:txBody>
+          <a:bodyPr wrap="none" lIns="0" tIns="0" rIns="0" bIns="0" rtlCol="0" anchor="t"/>
+          <a:lstStyle/>
+          <a:p>
+            <a:pPr marL="0" indent="0" algn="l">
+              <a:lnSpc>
+                <a:spcPts val="835"/>
+              </a:lnSpc>
+              <a:buNone/>
+            </a:pPr>
+            <a:r>
+              <a:rPr lang="en-US" sz="900" dirty="0">
+                <a:latin typeface="Carlito" pitchFamily="34" charset="0"/>
+                <a:ea typeface="Carlito" pitchFamily="34" charset="-122"/>
+                <a:cs typeface="Carlito" pitchFamily="34" charset="-120"/>
+              </a:rPr>
+              <a:t>Лемана Про: </a:t>
+            </a:r>
+            <a:r>
+              <a:rPr lang="en-US" sz="900" b="1" dirty="0">
+                <a:latin typeface="Courier New" pitchFamily="34" charset="0"/>
+                <a:ea typeface="Courier New" pitchFamily="34" charset="-122"/>
+                <a:cs typeface="Courier New" pitchFamily="34" charset="-120"/>
+              </a:rPr>
+              <a:t>11 ТТ</a:t>
+            </a:r>
+            <a:r>
+              <a:rPr lang="en-US" sz="900" dirty="0">
+                <a:latin typeface="Carlito" pitchFamily="34" charset="0"/>
+                <a:ea typeface="Carlito" pitchFamily="34" charset="-122"/>
+                <a:cs typeface="Carlito" pitchFamily="34" charset="-120"/>
+              </a:rPr>
+              <a:t> в ЮФО</a:t>
+            </a:r>
+            <a:endParaRPr lang="en-US" sz="900" dirty="0"/>
+          </a:p>
+        </p:txBody>
+      </p:sp>
+      <p:sp>
+        <p:nvSpPr>
+          <p:cNvPr id="9" name="Text 39"/>
+          <p:cNvSpPr/>
+          <p:nvPr/>
+        </p:nvSpPr>
+        <p:spPr>
+          <a:xfrm>
+            <a:off x="270505" y="1921717"/>
+            <a:ext cx="111044" cy="103812"/>
+          </a:xfrm>
+          <a:prstGeom prst="rect">
+            <a:avLst/>
+          </a:prstGeom>
+          <a:noFill/>
+          <a:ln/>
+        </p:spPr>
+        <p:txBody>
+          <a:bodyPr wrap="none" lIns="0" tIns="0" rIns="0" bIns="0" rtlCol="0" anchor="ctr"/>
+          <a:lstStyle/>
+          <a:p>
+            <a:pPr marL="0" indent="0" algn="ctr">
+              <a:buNone/>
+            </a:pPr>
+            <a:r>
+              <a:rPr lang="en-US" sz="900" dirty="0">
+                <a:latin typeface="Segoe UI Symbol" pitchFamily="34" charset="0"/>
+                <a:ea typeface="Segoe UI Symbol" pitchFamily="34" charset="-122"/>
+                <a:cs typeface="Segoe UI Symbol" pitchFamily="34" charset="-120"/>
+              </a:rPr>
+              <a:t>▭</a:t>
+            </a:r>
+            <a:endParaRPr lang="en-US" sz="900" dirty="0"/>
+          </a:p>
+        </p:txBody>
+      </p:sp>
+      <p:sp>
+        <p:nvSpPr>
+          <p:cNvPr id="10" name="Text 40"/>
+          <p:cNvSpPr/>
+          <p:nvPr/>
+        </p:nvSpPr>
+        <p:spPr>
+          <a:xfrm>
+            <a:off x="399092" y="1910751"/>
+            <a:ext cx="1215824" cy="135900"/>
+          </a:xfrm>
+          <a:prstGeom prst="rect">
+            <a:avLst/>
+          </a:prstGeom>
+          <a:noFill/>
+          <a:ln/>
+        </p:spPr>
+        <p:txBody>
+          <a:bodyPr wrap="none" lIns="0" tIns="0" rIns="0" bIns="0" rtlCol="0" anchor="t"/>
+          <a:lstStyle/>
+          <a:p>
+            <a:pPr marL="0" indent="0" algn="l">
+              <a:lnSpc>
+                <a:spcPts val="835"/>
+              </a:lnSpc>
+              <a:buNone/>
+            </a:pPr>
+            <a:r>
+              <a:rPr lang="en-US" sz="700" dirty="0">
+                <a:latin typeface="Carlito" pitchFamily="34" charset="0"/>
+                <a:ea typeface="Carlito" pitchFamily="34" charset="-122"/>
+                <a:cs typeface="Carlito" pitchFamily="34" charset="-120"/>
+              </a:rPr>
+              <a:t>РК на экранах Ростова:</a:t>
+            </a:r>
+            <a:endParaRPr lang="en-US" sz="700" dirty="0"/>
+          </a:p>
+        </p:txBody>
+      </p:sp>
+      <p:sp>
+        <p:nvSpPr>
+          <p:cNvPr id="11" name="Text 41"/>
+          <p:cNvSpPr/>
+          <p:nvPr/>
+        </p:nvSpPr>
+        <p:spPr>
+          <a:xfrm>
+            <a:off x="1331129" y="1909401"/>
+            <a:ext cx="661930" cy="147225"/>
+          </a:xfrm>
+          <a:prstGeom prst="rect">
+            <a:avLst/>
+          </a:prstGeom>
+          <a:noFill/>
+          <a:ln/>
+        </p:spPr>
+        <p:txBody>
+          <a:bodyPr wrap="none" lIns="0" tIns="0" rIns="0" bIns="0" rtlCol="0" anchor="t"/>
+          <a:lstStyle/>
+          <a:p>
+            <a:pPr marL="0" indent="0" algn="l">
+              <a:lnSpc>
+                <a:spcPts val="835"/>
+              </a:lnSpc>
+              <a:buNone/>
+            </a:pPr>
+            <a:r>
+              <a:rPr lang="en-US" sz="900" b="1" dirty="0">
+                <a:latin typeface="Courier New" pitchFamily="34" charset="0"/>
+                <a:ea typeface="Courier New" pitchFamily="34" charset="-122"/>
+                <a:cs typeface="Courier New" pitchFamily="34" charset="-120"/>
+              </a:rPr>
+              <a:t>6 экранов</a:t>
+            </a:r>
+            <a:endParaRPr lang="en-US" sz="900" dirty="0"/>
+          </a:p>
+        </p:txBody>
+      </p:sp>
+      <p:sp>
+        <p:nvSpPr>
+          <p:cNvPr id="12" name="Text 42"/>
+          <p:cNvSpPr/>
+          <p:nvPr/>
+        </p:nvSpPr>
+        <p:spPr>
+          <a:xfrm>
+            <a:off x="270505" y="2092050"/>
+            <a:ext cx="111044" cy="103812"/>
+          </a:xfrm>
+          <a:prstGeom prst="rect">
+            <a:avLst/>
+          </a:prstGeom>
+          <a:noFill/>
+          <a:ln/>
+        </p:spPr>
+        <p:txBody>
+          <a:bodyPr wrap="none" lIns="0" tIns="0" rIns="0" bIns="0" rtlCol="0" anchor="ctr"/>
+          <a:lstStyle/>
+          <a:p>
+            <a:pPr marL="0" indent="0" algn="ctr">
+              <a:buNone/>
+            </a:pPr>
+            <a:r>
+              <a:rPr lang="en-US" sz="900" dirty="0">
+                <a:latin typeface="Segoe UI Symbol" pitchFamily="34" charset="0"/>
+                <a:ea typeface="Segoe UI Symbol" pitchFamily="34" charset="-122"/>
+                <a:cs typeface="Segoe UI Symbol" pitchFamily="34" charset="-120"/>
+              </a:rPr>
+              <a:t>☞</a:t>
+            </a:r>
+            <a:endParaRPr lang="en-US" sz="900" dirty="0"/>
+          </a:p>
+        </p:txBody>
+      </p:sp>
+      <p:sp>
+        <p:nvSpPr>
+          <p:cNvPr id="13" name="Text 43"/>
+          <p:cNvSpPr/>
+          <p:nvPr/>
+        </p:nvSpPr>
+        <p:spPr>
+          <a:xfrm>
+            <a:off x="399091" y="2068752"/>
+            <a:ext cx="3065249" cy="179430"/>
+          </a:xfrm>
+          <a:prstGeom prst="rect">
+            <a:avLst/>
+          </a:prstGeom>
+          <a:noFill/>
+          <a:ln/>
+        </p:spPr>
+        <p:txBody>
+          <a:bodyPr wrap="none" lIns="0" tIns="0" rIns="0" bIns="0" rtlCol="0" anchor="t"/>
+          <a:lstStyle/>
+          <a:p>
+            <a:pPr marL="0" indent="0" algn="l">
+              <a:lnSpc>
+                <a:spcPts val="835"/>
+              </a:lnSpc>
+              <a:buNone/>
+            </a:pPr>
+            <a:r>
+              <a:rPr lang="en-US" sz="900" dirty="0">
+                <a:latin typeface="Carlito" pitchFamily="34" charset="0"/>
+                <a:ea typeface="Carlito" pitchFamily="34" charset="-122"/>
+                <a:cs typeface="Carlito" pitchFamily="34" charset="-120"/>
+              </a:rPr>
+              <a:t>Таргет ВКонтакте по </a:t>
+            </a:r>
+            <a:r>
+              <a:rPr lang="en-US" sz="900" b="1" dirty="0">
+                <a:latin typeface="Courier New" pitchFamily="34" charset="0"/>
+                <a:ea typeface="Courier New" pitchFamily="34" charset="-122"/>
+                <a:cs typeface="Courier New" pitchFamily="34" charset="-120"/>
+              </a:rPr>
+              <a:t>11 ТТ</a:t>
+            </a:r>
+            <a:endParaRPr lang="en-US" sz="900" dirty="0"/>
+          </a:p>
+        </p:txBody>
+      </p:sp>
+      <p:sp>
+        <p:nvSpPr>
+          <p:cNvPr id="14" name="Text 44"/>
+          <p:cNvSpPr/>
+          <p:nvPr/>
+        </p:nvSpPr>
+        <p:spPr>
+          <a:xfrm>
+            <a:off x="270505" y="2262384"/>
+            <a:ext cx="111044" cy="103812"/>
+          </a:xfrm>
+          <a:prstGeom prst="rect">
+            <a:avLst/>
+          </a:prstGeom>
+          <a:noFill/>
+          <a:ln/>
+        </p:spPr>
+        <p:txBody>
+          <a:bodyPr wrap="none" lIns="0" tIns="0" rIns="0" bIns="0" rtlCol="0" anchor="ctr"/>
+          <a:lstStyle/>
+          <a:p>
+            <a:pPr marL="0" indent="0" algn="ctr">
+              <a:buNone/>
+            </a:pPr>
+            <a:r>
+              <a:rPr lang="en-US" sz="900" dirty="0">
+                <a:latin typeface="Segoe UI Symbol" pitchFamily="34" charset="0"/>
+                <a:ea typeface="Segoe UI Symbol" pitchFamily="34" charset="-122"/>
+                <a:cs typeface="Segoe UI Symbol" pitchFamily="34" charset="-120"/>
+              </a:rPr>
+              <a:t>✦</a:t>
+            </a:r>
+            <a:endParaRPr lang="en-US" sz="900" dirty="0"/>
+          </a:p>
+        </p:txBody>
+      </p:sp>
+      <p:sp>
+        <p:nvSpPr>
+          <p:cNvPr id="15" name="Text 45"/>
+          <p:cNvSpPr/>
+          <p:nvPr/>
+        </p:nvSpPr>
+        <p:spPr>
+          <a:xfrm>
+            <a:off x="399091" y="2240435"/>
+            <a:ext cx="3065249" cy="168105"/>
+          </a:xfrm>
+          <a:prstGeom prst="rect">
+            <a:avLst/>
+          </a:prstGeom>
+          <a:noFill/>
+          <a:ln/>
+        </p:spPr>
+        <p:txBody>
+          <a:bodyPr wrap="square" lIns="0" tIns="0" rIns="0" bIns="0" rtlCol="0" anchor="t"/>
+          <a:lstStyle/>
+          <a:p>
+            <a:pPr marL="0" indent="0" algn="l">
+              <a:lnSpc>
+                <a:spcPts val="835"/>
+              </a:lnSpc>
+              <a:buNone/>
+            </a:pPr>
+            <a:r>
+              <a:rPr lang="en-US" sz="900" dirty="0">
+                <a:latin typeface="Carlito" pitchFamily="34" charset="0"/>
+                <a:ea typeface="Carlito" pitchFamily="34" charset="-122"/>
+                <a:cs typeface="Carlito" pitchFamily="34" charset="-120"/>
+              </a:rPr>
+              <a:t>Промо «Подарок за покупку» (Ростов + Краснодар)</a:t>
+            </a:r>
+            <a:endParaRPr lang="en-US" sz="900" dirty="0"/>
+          </a:p>
+        </p:txBody>
+      </p:sp>
+      <p:sp>
+        <p:nvSpPr>
+          <p:cNvPr id="16" name="Text 46"/>
+          <p:cNvSpPr/>
+          <p:nvPr/>
+        </p:nvSpPr>
+        <p:spPr>
+          <a:xfrm>
+            <a:off x="270505" y="2425574"/>
+            <a:ext cx="111044" cy="103812"/>
+          </a:xfrm>
+          <a:prstGeom prst="rect">
+            <a:avLst/>
+          </a:prstGeom>
+          <a:noFill/>
+          <a:ln/>
+        </p:spPr>
+        <p:txBody>
+          <a:bodyPr wrap="none" lIns="0" tIns="0" rIns="0" bIns="0" rtlCol="0" anchor="ctr"/>
+          <a:lstStyle/>
+          <a:p>
+            <a:pPr marL="0" indent="0" algn="ctr">
+              <a:buNone/>
+            </a:pPr>
+            <a:r>
+              <a:rPr lang="en-US" sz="900" dirty="0">
+                <a:latin typeface="Segoe UI Symbol" pitchFamily="34" charset="0"/>
+                <a:ea typeface="Segoe UI Symbol" pitchFamily="34" charset="-122"/>
+                <a:cs typeface="Segoe UI Symbol" pitchFamily="34" charset="-120"/>
+              </a:rPr>
+              <a:t>←</a:t>
+            </a:r>
+            <a:endParaRPr lang="en-US" sz="900" dirty="0"/>
+          </a:p>
+        </p:txBody>
+      </p:sp>
+      <p:sp>
+        <p:nvSpPr>
+          <p:cNvPr id="17" name="Text 47"/>
+          <p:cNvSpPr/>
+          <p:nvPr/>
+        </p:nvSpPr>
+        <p:spPr>
+          <a:xfrm>
+            <a:off x="399091" y="2402276"/>
+            <a:ext cx="3065249" cy="179430"/>
+          </a:xfrm>
+          <a:prstGeom prst="rect">
+            <a:avLst/>
+          </a:prstGeom>
+          <a:noFill/>
+          <a:ln/>
+        </p:spPr>
+        <p:txBody>
+          <a:bodyPr wrap="square" lIns="0" tIns="0" rIns="0" bIns="0" rtlCol="0" anchor="t"/>
+          <a:lstStyle/>
+          <a:p>
+            <a:pPr marL="0" indent="0" algn="l">
+              <a:lnSpc>
+                <a:spcPts val="835"/>
+              </a:lnSpc>
+              <a:buNone/>
+            </a:pPr>
+            <a:r>
+              <a:rPr lang="en-US" sz="900" dirty="0">
+                <a:latin typeface="Carlito" pitchFamily="34" charset="0"/>
+                <a:ea typeface="Carlito" pitchFamily="34" charset="-122"/>
+                <a:cs typeface="Carlito" pitchFamily="34" charset="-120"/>
+              </a:rPr>
+              <a:t>Кэшбек </a:t>
+            </a:r>
+            <a:r>
+              <a:rPr lang="en-US" sz="900" b="1" dirty="0">
+                <a:latin typeface="Liberation Sans Narrow" pitchFamily="34" charset="0"/>
+                <a:ea typeface="Liberation Sans Narrow" pitchFamily="34" charset="-122"/>
+                <a:cs typeface="Liberation Sans Narrow" pitchFamily="34" charset="-120"/>
+              </a:rPr>
+              <a:t>5%</a:t>
+            </a:r>
+            <a:r>
+              <a:rPr lang="en-US" sz="900" dirty="0">
+                <a:latin typeface="Carlito" pitchFamily="34" charset="0"/>
+                <a:ea typeface="Carlito" pitchFamily="34" charset="-122"/>
+                <a:cs typeface="Carlito" pitchFamily="34" charset="-120"/>
+              </a:rPr>
+              <a:t> на TITAN (все </a:t>
+            </a:r>
+            <a:r>
+              <a:rPr lang="en-US" sz="900" b="1" dirty="0">
+                <a:latin typeface="Courier New" pitchFamily="34" charset="0"/>
+                <a:ea typeface="Courier New" pitchFamily="34" charset="-122"/>
+                <a:cs typeface="Courier New" pitchFamily="34" charset="-120"/>
+              </a:rPr>
+              <a:t>11 ТТ</a:t>
+            </a:r>
+            <a:r>
+              <a:rPr lang="en-US" sz="900" dirty="0">
+                <a:latin typeface="Carlito" pitchFamily="34" charset="0"/>
+                <a:ea typeface="Carlito" pitchFamily="34" charset="-122"/>
+                <a:cs typeface="Carlito" pitchFamily="34" charset="-120"/>
+              </a:rPr>
+              <a:t>)</a:t>
+            </a:r>
+            <a:endParaRPr lang="en-US" sz="900" dirty="0"/>
+          </a:p>
+        </p:txBody>
+      </p:sp>
+      <p:sp>
+        <p:nvSpPr>
+          <p:cNvPr id="18" name="Text 48"/>
+          <p:cNvSpPr/>
+          <p:nvPr/>
+        </p:nvSpPr>
+        <p:spPr>
+          <a:xfrm>
+            <a:off x="270505" y="2595908"/>
+            <a:ext cx="111044" cy="103812"/>
+          </a:xfrm>
+          <a:prstGeom prst="rect">
+            <a:avLst/>
+          </a:prstGeom>
+          <a:noFill/>
+          <a:ln/>
+        </p:spPr>
+        <p:txBody>
+          <a:bodyPr wrap="none" lIns="0" tIns="0" rIns="0" bIns="0" rtlCol="0" anchor="ctr"/>
+          <a:lstStyle/>
+          <a:p>
+            <a:pPr marL="0" indent="0" algn="ctr">
+              <a:buNone/>
+            </a:pPr>
+            <a:r>
+              <a:rPr lang="en-US" sz="900" dirty="0">
+                <a:latin typeface="Segoe UI Symbol" pitchFamily="34" charset="0"/>
+                <a:ea typeface="Segoe UI Symbol" pitchFamily="34" charset="-122"/>
+                <a:cs typeface="Segoe UI Symbol" pitchFamily="34" charset="-120"/>
+              </a:rPr>
+              <a:t>♟</a:t>
+            </a:r>
+            <a:endParaRPr lang="en-US" sz="900" dirty="0"/>
+          </a:p>
+        </p:txBody>
+      </p:sp>
+      <p:sp>
+        <p:nvSpPr>
+          <p:cNvPr id="19" name="Text 49"/>
+          <p:cNvSpPr/>
+          <p:nvPr/>
+        </p:nvSpPr>
+        <p:spPr>
+          <a:xfrm>
+            <a:off x="399091" y="2572610"/>
+            <a:ext cx="3065249" cy="179430"/>
+          </a:xfrm>
+          <a:prstGeom prst="rect">
+            <a:avLst/>
+          </a:prstGeom>
+          <a:noFill/>
+          <a:ln/>
+        </p:spPr>
+        <p:txBody>
+          <a:bodyPr wrap="square" lIns="0" tIns="0" rIns="0" bIns="0" rtlCol="0" anchor="t"/>
+          <a:lstStyle/>
+          <a:p>
+            <a:pPr marL="0" indent="0" algn="l">
+              <a:lnSpc>
+                <a:spcPts val="835"/>
+              </a:lnSpc>
+              <a:buNone/>
+            </a:pPr>
+            <a:r>
+              <a:rPr lang="en-US" sz="900" dirty="0">
+                <a:latin typeface="Carlito" pitchFamily="34" charset="0"/>
+                <a:ea typeface="Carlito" pitchFamily="34" charset="-122"/>
+                <a:cs typeface="Carlito" pitchFamily="34" charset="-120"/>
+              </a:rPr>
+              <a:t>Мастер-классы: </a:t>
+            </a:r>
+            <a:r>
+              <a:rPr lang="en-US" sz="900" b="1" dirty="0">
+                <a:latin typeface="Courier New" pitchFamily="34" charset="0"/>
+                <a:ea typeface="Courier New" pitchFamily="34" charset="-122"/>
+                <a:cs typeface="Courier New" pitchFamily="34" charset="-120"/>
+              </a:rPr>
+              <a:t>3 ТТ</a:t>
+            </a:r>
+            <a:r>
+              <a:rPr lang="en-US" sz="900" dirty="0">
+                <a:latin typeface="Carlito" pitchFamily="34" charset="0"/>
+                <a:ea typeface="Carlito" pitchFamily="34" charset="-122"/>
+                <a:cs typeface="Carlito" pitchFamily="34" charset="-120"/>
+              </a:rPr>
+              <a:t> в Ростове</a:t>
+            </a:r>
+            <a:endParaRPr lang="en-US" sz="900" dirty="0"/>
+          </a:p>
+        </p:txBody>
+      </p:sp>
+      <p:sp>
+        <p:nvSpPr>
+          <p:cNvPr id="20" name="Text 50"/>
+          <p:cNvSpPr/>
+          <p:nvPr/>
+        </p:nvSpPr>
+        <p:spPr>
+          <a:xfrm>
+            <a:off x="270505" y="2766242"/>
+            <a:ext cx="111044" cy="103812"/>
+          </a:xfrm>
+          <a:prstGeom prst="rect">
+            <a:avLst/>
+          </a:prstGeom>
+          <a:noFill/>
+          <a:ln/>
+        </p:spPr>
+        <p:txBody>
+          <a:bodyPr wrap="none" lIns="0" tIns="0" rIns="0" bIns="0" rtlCol="0" anchor="ctr"/>
+          <a:lstStyle/>
+          <a:p>
+            <a:pPr marL="0" indent="0" algn="ctr">
+              <a:buNone/>
+            </a:pPr>
+            <a:r>
+              <a:rPr lang="en-US" sz="900" dirty="0">
+                <a:latin typeface="Segoe UI Symbol" pitchFamily="34" charset="0"/>
+                <a:ea typeface="Segoe UI Symbol" pitchFamily="34" charset="-122"/>
+                <a:cs typeface="Segoe UI Symbol" pitchFamily="34" charset="-120"/>
+              </a:rPr>
+              <a:t>✦</a:t>
+            </a:r>
+            <a:endParaRPr lang="en-US" sz="900" dirty="0"/>
+          </a:p>
+        </p:txBody>
+      </p:sp>
+      <p:sp>
+        <p:nvSpPr>
+          <p:cNvPr id="21" name="Text 51"/>
+          <p:cNvSpPr/>
+          <p:nvPr/>
+        </p:nvSpPr>
+        <p:spPr>
+          <a:xfrm>
+            <a:off x="399094" y="2755276"/>
+            <a:ext cx="1330516" cy="135900"/>
+          </a:xfrm>
+          <a:prstGeom prst="rect">
+            <a:avLst/>
+          </a:prstGeom>
+          <a:noFill/>
+          <a:ln/>
+        </p:spPr>
+        <p:txBody>
+          <a:bodyPr wrap="none" lIns="0" tIns="0" rIns="0" bIns="0" rtlCol="0" anchor="t"/>
+          <a:lstStyle/>
+          <a:p>
+            <a:pPr marL="0" indent="0" algn="l">
+              <a:lnSpc>
+                <a:spcPts val="835"/>
+              </a:lnSpc>
+              <a:buNone/>
+            </a:pPr>
+            <a:r>
+              <a:rPr lang="en-US" sz="900" dirty="0">
+                <a:latin typeface="Carlito" pitchFamily="34" charset="0"/>
+                <a:ea typeface="Carlito" pitchFamily="34" charset="-122"/>
+                <a:cs typeface="Carlito" pitchFamily="34" charset="-120"/>
+              </a:rPr>
+              <a:t>Веерные выкрасы B2B:</a:t>
+            </a:r>
+            <a:endParaRPr lang="en-US" sz="900" dirty="0"/>
+          </a:p>
+        </p:txBody>
+      </p:sp>
+      <p:sp>
+        <p:nvSpPr>
+          <p:cNvPr id="23" name="Text 53"/>
+          <p:cNvSpPr/>
+          <p:nvPr/>
+        </p:nvSpPr>
+        <p:spPr>
+          <a:xfrm>
+            <a:off x="270505" y="2936576"/>
+            <a:ext cx="111044" cy="103812"/>
+          </a:xfrm>
+          <a:prstGeom prst="rect">
+            <a:avLst/>
+          </a:prstGeom>
+          <a:noFill/>
+          <a:ln/>
+        </p:spPr>
+        <p:txBody>
+          <a:bodyPr wrap="none" lIns="0" tIns="0" rIns="0" bIns="0" rtlCol="0" anchor="ctr"/>
+          <a:lstStyle/>
+          <a:p>
+            <a:pPr marL="0" indent="0" algn="ctr">
+              <a:buNone/>
+            </a:pPr>
+            <a:r>
+              <a:rPr lang="en-US" sz="900" dirty="0">
+                <a:latin typeface="Segoe UI Symbol" pitchFamily="34" charset="0"/>
+                <a:ea typeface="Segoe UI Symbol" pitchFamily="34" charset="-122"/>
+                <a:cs typeface="Segoe UI Symbol" pitchFamily="34" charset="-120"/>
+              </a:rPr>
+              <a:t>⌧</a:t>
+            </a:r>
+            <a:endParaRPr lang="en-US" sz="900" dirty="0"/>
+          </a:p>
+        </p:txBody>
+      </p:sp>
+      <p:sp>
+        <p:nvSpPr>
+          <p:cNvPr id="24" name="Text 54"/>
+          <p:cNvSpPr/>
+          <p:nvPr/>
+        </p:nvSpPr>
+        <p:spPr>
+          <a:xfrm>
+            <a:off x="399091" y="2913277"/>
+            <a:ext cx="3065249" cy="179430"/>
+          </a:xfrm>
+          <a:prstGeom prst="rect">
+            <a:avLst/>
+          </a:prstGeom>
+          <a:noFill/>
+          <a:ln/>
+        </p:spPr>
+        <p:txBody>
+          <a:bodyPr wrap="square" lIns="0" tIns="0" rIns="0" bIns="0" rtlCol="0" anchor="t"/>
+          <a:lstStyle/>
+          <a:p>
+            <a:pPr marL="0" indent="0" algn="l">
+              <a:lnSpc>
+                <a:spcPts val="835"/>
+              </a:lnSpc>
+              <a:buNone/>
+            </a:pPr>
+            <a:r>
+              <a:rPr lang="en-US" sz="900" dirty="0" err="1">
+                <a:latin typeface="Carlito" pitchFamily="34" charset="0"/>
+                <a:ea typeface="Carlito" pitchFamily="34" charset="-122"/>
+                <a:cs typeface="Carlito" pitchFamily="34" charset="-120"/>
+              </a:rPr>
+              <a:t>Скидка</a:t>
+            </a:r>
+            <a:r>
+              <a:rPr lang="en-US" sz="900" dirty="0">
+                <a:latin typeface="Carlito" pitchFamily="34" charset="0"/>
+                <a:ea typeface="Carlito" pitchFamily="34" charset="-122"/>
+                <a:cs typeface="Carlito" pitchFamily="34" charset="-120"/>
+              </a:rPr>
+              <a:t> </a:t>
+            </a:r>
+            <a:r>
+              <a:rPr lang="en-US" sz="900" dirty="0" smtClean="0">
+                <a:latin typeface="Carlito" pitchFamily="34" charset="0"/>
+                <a:ea typeface="Carlito" pitchFamily="34" charset="-122"/>
+                <a:cs typeface="Carlito" pitchFamily="34" charset="-120"/>
+              </a:rPr>
+              <a:t>10% + 10% (</a:t>
+            </a:r>
+            <a:r>
+              <a:rPr lang="en-US" sz="900" dirty="0">
+                <a:latin typeface="Carlito" pitchFamily="34" charset="0"/>
+                <a:ea typeface="Carlito" pitchFamily="34" charset="-122"/>
+                <a:cs typeface="Carlito" pitchFamily="34" charset="-120"/>
+              </a:rPr>
+              <a:t>жёлтый ценник) с </a:t>
+            </a:r>
+            <a:r>
+              <a:rPr lang="en-US" sz="900" b="1" dirty="0" smtClean="0">
+                <a:latin typeface="Liberation Sans Narrow" pitchFamily="34" charset="0"/>
+                <a:ea typeface="Liberation Sans Narrow" pitchFamily="34" charset="-122"/>
+                <a:cs typeface="Liberation Sans Narrow" pitchFamily="34" charset="-120"/>
+              </a:rPr>
+              <a:t>01.08 - 30.09</a:t>
+            </a:r>
+            <a:endParaRPr lang="en-US" sz="900" dirty="0"/>
+          </a:p>
+        </p:txBody>
+      </p:sp>
+      <p:pic>
+        <p:nvPicPr>
+          <p:cNvPr id="25" name="Picture 2" descr="C:\Users\zakolodniy\Downloads\Анализ статистики Лемана ПРо за 02.10.2026\01_monthly_trend.png"/>
+          <p:cNvPicPr>
+            <a:picLocks noChangeAspect="1" noChangeArrowheads="1"/>
+          </p:cNvPicPr>
+          <p:nvPr/>
+        </p:nvPicPr>
+        <p:blipFill>
+          <a:blip r:embed="rId2">
+            <a:extLst>
+              <a:ext uri="{28A0092B-C50C-407E-A947-70E740481C1C}">
+                <a14:useLocalDpi xmlns:a14="http://schemas.microsoft.com/office/drawing/2010/main" val="0"/>
+              </a:ext>
+            </a:extLst>
+          </a:blip>
+          <a:srcRect/>
+          <a:stretch>
+            <a:fillRect/>
+          </a:stretch>
+        </p:blipFill>
+        <p:spPr bwMode="auto">
+          <a:xfrm>
+            <a:off x="3818245" y="132311"/>
+            <a:ext cx="5083791" cy="2304207"/>
+          </a:xfrm>
+          <a:prstGeom prst="rect">
+            <a:avLst/>
+          </a:prstGeom>
+          <a:noFill/>
+          <a:extLst>
+            <a:ext uri="{909E8E84-426E-40DD-AFC4-6F175D3DCCD1}">
+              <a14:hiddenFill xmlns:a14="http://schemas.microsoft.com/office/drawing/2010/main">
+                <a:solidFill>
+                  <a:srgbClr val="FFFFFF"/>
+                </a:solidFill>
+              </a14:hiddenFill>
+            </a:ext>
+          </a:extLst>
+        </p:spPr>
+      </p:pic>
+      <p:pic>
+        <p:nvPicPr>
+          <p:cNvPr id="2051" name="Picture 3" descr="C:\Users\zakolodniy\Downloads\Анализ статистики Лемана ПРо за 02.10.2026\05_shop_performance_stock_transit.png"/>
+          <p:cNvPicPr>
+            <a:picLocks noChangeAspect="1" noChangeArrowheads="1"/>
+          </p:cNvPicPr>
+          <p:nvPr/>
+        </p:nvPicPr>
+        <p:blipFill>
+          <a:blip r:embed="rId3">
+            <a:extLst>
+              <a:ext uri="{28A0092B-C50C-407E-A947-70E740481C1C}">
+                <a14:useLocalDpi xmlns:a14="http://schemas.microsoft.com/office/drawing/2010/main" val="0"/>
+              </a:ext>
+            </a:extLst>
+          </a:blip>
+          <a:srcRect/>
+          <a:stretch>
+            <a:fillRect/>
+          </a:stretch>
+        </p:blipFill>
+        <p:spPr bwMode="auto">
+          <a:xfrm>
+            <a:off x="3818245" y="2531602"/>
+            <a:ext cx="5083791" cy="2433461"/>
+          </a:xfrm>
+          <a:prstGeom prst="rect">
+            <a:avLst/>
+          </a:prstGeom>
+          <a:noFill/>
+          <a:extLst>
+            <a:ext uri="{909E8E84-426E-40DD-AFC4-6F175D3DCCD1}">
+              <a14:hiddenFill xmlns:a14="http://schemas.microsoft.com/office/drawing/2010/main">
+                <a:solidFill>
+                  <a:srgbClr val="FFFFFF"/>
+                </a:solidFill>
+              </a14:hiddenFill>
+            </a:ext>
+          </a:extLst>
+        </p:spPr>
+      </p:pic>
+      <p:sp>
+        <p:nvSpPr>
+          <p:cNvPr id="28" name="Shape 33"/>
+          <p:cNvSpPr/>
+          <p:nvPr/>
+        </p:nvSpPr>
+        <p:spPr>
+          <a:xfrm>
+            <a:off x="248636" y="3284254"/>
+            <a:ext cx="3221404" cy="0"/>
           </a:xfrm>
           <a:prstGeom prst="line">
             <a:avLst/>
@@ -7569,46 +8284,84 @@
       </p:sp>
       <p:sp>
         <p:nvSpPr>
-          <p:cNvPr id="25" name="Text 13"/>
+          <p:cNvPr id="29" name="Text 54"/>
           <p:cNvSpPr/>
           <p:nvPr/>
         </p:nvSpPr>
         <p:spPr>
           <a:xfrm>
-            <a:off x="385762" y="859719"/>
-            <a:ext cx="21431" cy="114300"/>
-          </a:xfrm>
-          <a:prstGeom prst="roundRect">
-            <a:avLst>
-              <a:gd name="adj" fmla="val 88890"/>
-            </a:avLst>
-          </a:prstGeom>
-          <a:solidFill>
-            <a:srgbClr val="B5614A"/>
-          </a:solidFill>
+            <a:off x="284029" y="1384728"/>
+            <a:ext cx="3065249" cy="179430"/>
+          </a:xfrm>
+          <a:prstGeom prst="rect">
+            <a:avLst/>
+          </a:prstGeom>
+          <a:noFill/>
           <a:ln/>
         </p:spPr>
         <p:txBody>
-          <a:bodyPr wrap="square" rtlCol="0" anchor="ctr"/>
-          <a:lstStyle/>
-          <a:p>
-            <a:pPr marL="0" indent="0">
+          <a:bodyPr wrap="square" lIns="0" tIns="0" rIns="0" bIns="0" rtlCol="0" anchor="t"/>
+          <a:lstStyle/>
+          <a:p>
+            <a:pPr marL="0" indent="0" algn="ctr">
+              <a:lnSpc>
+                <a:spcPts val="835"/>
+              </a:lnSpc>
               <a:buNone/>
             </a:pPr>
-            <a:endParaRPr lang="en-US" dirty="0"/>
-          </a:p>
-        </p:txBody>
-      </p:sp>
-      <p:sp>
-        <p:nvSpPr>
-          <p:cNvPr id="26" name="Text 14"/>
+            <a:r>
+              <a:rPr lang="ru-RU" sz="1050" b="1" dirty="0" smtClean="0"/>
+              <a:t>Запуск продаж 01.06.2026 – 30.09.2026</a:t>
+            </a:r>
+            <a:endParaRPr lang="en-US" sz="1050" b="1" dirty="0"/>
+          </a:p>
+        </p:txBody>
+      </p:sp>
+      <p:sp>
+        <p:nvSpPr>
+          <p:cNvPr id="32" name="Text 54"/>
           <p:cNvSpPr/>
           <p:nvPr/>
         </p:nvSpPr>
         <p:spPr>
           <a:xfrm>
-            <a:off x="464341" y="852576"/>
-            <a:ext cx="128588" cy="128588"/>
+            <a:off x="316224" y="3336358"/>
+            <a:ext cx="3065249" cy="179430"/>
+          </a:xfrm>
+          <a:prstGeom prst="rect">
+            <a:avLst/>
+          </a:prstGeom>
+          <a:noFill/>
+          <a:ln/>
+        </p:spPr>
+        <p:txBody>
+          <a:bodyPr wrap="square" lIns="0" tIns="0" rIns="0" bIns="0" rtlCol="0" anchor="t"/>
+          <a:lstStyle/>
+          <a:p>
+            <a:pPr marL="0" indent="0" algn="ctr">
+              <a:lnSpc>
+                <a:spcPts val="835"/>
+              </a:lnSpc>
+              <a:buNone/>
+            </a:pPr>
+            <a:r>
+              <a:rPr lang="ru-RU" sz="1050" b="1" dirty="0" smtClean="0"/>
+              <a:t>Поддержка 01.010.2026 – 30.10.2026</a:t>
+            </a:r>
+            <a:endParaRPr lang="en-US" sz="1050" b="1" dirty="0"/>
+          </a:p>
+        </p:txBody>
+      </p:sp>
+      <p:sp>
+        <p:nvSpPr>
+          <p:cNvPr id="33" name="Text 39"/>
+          <p:cNvSpPr/>
+          <p:nvPr/>
+        </p:nvSpPr>
+        <p:spPr>
+          <a:xfrm>
+            <a:off x="284030" y="3696917"/>
+            <a:ext cx="111044" cy="103812"/>
           </a:xfrm>
           <a:prstGeom prst="rect">
             <a:avLst/>
@@ -7624,30 +8377,27 @@
               <a:buNone/>
             </a:pPr>
             <a:r>
-              <a:rPr lang="en-US" sz="1266" dirty="0">
-                <a:solidFill>
-                  <a:srgbClr val="B5614A"/>
-                </a:solidFill>
+              <a:rPr lang="en-US" sz="900" dirty="0">
                 <a:latin typeface="Segoe UI Symbol" pitchFamily="34" charset="0"/>
                 <a:ea typeface="Segoe UI Symbol" pitchFamily="34" charset="-122"/>
                 <a:cs typeface="Segoe UI Symbol" pitchFamily="34" charset="-120"/>
               </a:rPr>
-              <a:t>🏪</a:t>
-            </a:r>
-            <a:endParaRPr lang="en-US" sz="1266" dirty="0"/>
-          </a:p>
-        </p:txBody>
-      </p:sp>
-      <p:sp>
-        <p:nvSpPr>
-          <p:cNvPr id="27" name="Text 15"/>
+              <a:t>▭</a:t>
+            </a:r>
+            <a:endParaRPr lang="en-US" sz="900" dirty="0"/>
+          </a:p>
+        </p:txBody>
+      </p:sp>
+      <p:sp>
+        <p:nvSpPr>
+          <p:cNvPr id="34" name="Text 40"/>
           <p:cNvSpPr/>
           <p:nvPr/>
         </p:nvSpPr>
         <p:spPr>
           <a:xfrm>
-            <a:off x="650081" y="847219"/>
-            <a:ext cx="2388357" cy="139303"/>
+            <a:off x="412617" y="3685951"/>
+            <a:ext cx="1215824" cy="135900"/>
           </a:xfrm>
           <a:prstGeom prst="rect">
             <a:avLst/>
@@ -7657,81 +8407,6 @@
         </p:spPr>
         <p:txBody>
           <a:bodyPr wrap="none" lIns="0" tIns="0" rIns="0" bIns="0" rtlCol="0" anchor="t"/>
-          <a:lstStyle/>
-          <a:p>
-            <a:pPr marL="0" indent="0" algn="l">
-              <a:lnSpc>
-                <a:spcPts val="1097"/>
-              </a:lnSpc>
-              <a:buNone/>
-            </a:pPr>
-            <a:r>
-              <a:rPr lang="en-US" sz="800" b="1" kern="0" spc="84" dirty="0">
-                <a:latin typeface="Carlito" pitchFamily="34" charset="0"/>
-                <a:ea typeface="Carlito" pitchFamily="34" charset="-122"/>
-                <a:cs typeface="Carlito" pitchFamily="34" charset="-120"/>
-              </a:rPr>
-              <a:t>ДИСТРИБЬЮТОРСКИЙ КАНАЛ</a:t>
-            </a:r>
-            <a:endParaRPr lang="en-US" sz="800" dirty="0"/>
-          </a:p>
-        </p:txBody>
-      </p:sp>
-      <p:sp>
-        <p:nvSpPr>
-          <p:cNvPr id="28" name="Text 20"/>
-          <p:cNvSpPr/>
-          <p:nvPr/>
-        </p:nvSpPr>
-        <p:spPr>
-          <a:xfrm>
-            <a:off x="385760" y="1161888"/>
-            <a:ext cx="91440" cy="91440"/>
-          </a:xfrm>
-          <a:prstGeom prst="rect">
-            <a:avLst/>
-          </a:prstGeom>
-          <a:noFill/>
-          <a:ln/>
-        </p:spPr>
-        <p:txBody>
-          <a:bodyPr wrap="none" lIns="0" tIns="0" rIns="0" bIns="0" rtlCol="0" anchor="ctr"/>
-          <a:lstStyle/>
-          <a:p>
-            <a:pPr marL="0" indent="0" algn="ctr">
-              <a:buNone/>
-            </a:pPr>
-            <a:r>
-              <a:rPr lang="en-US" sz="844" dirty="0">
-                <a:latin typeface="Segoe UI Symbol" pitchFamily="34" charset="0"/>
-                <a:ea typeface="Segoe UI Symbol" pitchFamily="34" charset="-122"/>
-                <a:cs typeface="Segoe UI Symbol" pitchFamily="34" charset="-120"/>
-              </a:rPr>
-              <a:t>⚑</a:t>
-            </a:r>
-            <a:endParaRPr lang="en-US" sz="844" dirty="0"/>
-          </a:p>
-        </p:txBody>
-      </p:sp>
-      <p:sp>
-        <p:nvSpPr>
-          <p:cNvPr id="29" name="Text 21"/>
-          <p:cNvSpPr/>
-          <p:nvPr/>
-        </p:nvSpPr>
-        <p:spPr>
-          <a:xfrm>
-            <a:off x="514347" y="1147601"/>
-            <a:ext cx="2524088" cy="296141"/>
-          </a:xfrm>
-          <a:prstGeom prst="rect">
-            <a:avLst/>
-          </a:prstGeom>
-          <a:noFill/>
-          <a:ln/>
-        </p:spPr>
-        <p:txBody>
-          <a:bodyPr wrap="square" lIns="0" tIns="0" rIns="0" bIns="0" rtlCol="0" anchor="t"/>
           <a:lstStyle/>
           <a:p>
             <a:pPr marL="0" indent="0" algn="l">
@@ -7741,27 +8416,27 @@
               <a:buNone/>
             </a:pPr>
             <a:r>
-              <a:rPr lang="en-US" sz="800" dirty="0">
+              <a:rPr lang="en-US" sz="700" dirty="0">
                 <a:latin typeface="Carlito" pitchFamily="34" charset="0"/>
                 <a:ea typeface="Carlito" pitchFamily="34" charset="-122"/>
                 <a:cs typeface="Carlito" pitchFamily="34" charset="-120"/>
               </a:rPr>
-              <a:t>Пилоты: Палитра (Краснодар), И.П. Рыгалов (Пенза), Брозекс (Екатеринбург)</a:t>
-            </a:r>
-            <a:endParaRPr lang="en-US" sz="800" dirty="0"/>
-          </a:p>
-        </p:txBody>
-      </p:sp>
-      <p:sp>
-        <p:nvSpPr>
-          <p:cNvPr id="30" name="Text 22"/>
+              <a:t>РК на экранах Ростова:</a:t>
+            </a:r>
+            <a:endParaRPr lang="en-US" sz="700" dirty="0"/>
+          </a:p>
+        </p:txBody>
+      </p:sp>
+      <p:sp>
+        <p:nvSpPr>
+          <p:cNvPr id="35" name="Text 41"/>
           <p:cNvSpPr/>
           <p:nvPr/>
         </p:nvSpPr>
         <p:spPr>
           <a:xfrm>
-            <a:off x="366710" y="1418418"/>
-            <a:ext cx="91440" cy="91440"/>
+            <a:off x="1344654" y="3684601"/>
+            <a:ext cx="661930" cy="147225"/>
           </a:xfrm>
           <a:prstGeom prst="rect">
             <a:avLst/>
@@ -7770,43 +8445,7 @@
           <a:ln/>
         </p:spPr>
         <p:txBody>
-          <a:bodyPr wrap="none" lIns="0" tIns="0" rIns="0" bIns="0" rtlCol="0" anchor="ctr"/>
-          <a:lstStyle/>
-          <a:p>
-            <a:pPr marL="0" indent="0" algn="ctr">
-              <a:buNone/>
-            </a:pPr>
-            <a:r>
-              <a:rPr lang="en-US" sz="1400" dirty="0">
-                <a:latin typeface="Segoe UI Symbol" pitchFamily="34" charset="0"/>
-                <a:ea typeface="Segoe UI Symbol" pitchFamily="34" charset="-122"/>
-                <a:cs typeface="Segoe UI Symbol" pitchFamily="34" charset="-120"/>
-              </a:rPr>
-              <a:t>▿</a:t>
-            </a:r>
-            <a:endParaRPr lang="en-US" sz="1400" dirty="0"/>
-          </a:p>
-        </p:txBody>
-      </p:sp>
-      <p:sp>
-        <p:nvSpPr>
-          <p:cNvPr id="31" name="Text 23"/>
-          <p:cNvSpPr/>
-          <p:nvPr/>
-        </p:nvSpPr>
-        <p:spPr>
-          <a:xfrm>
-            <a:off x="514347" y="1416830"/>
-            <a:ext cx="2524088" cy="158046"/>
-          </a:xfrm>
-          <a:prstGeom prst="rect">
-            <a:avLst/>
-          </a:prstGeom>
-          <a:noFill/>
-          <a:ln/>
-        </p:spPr>
-        <p:txBody>
-          <a:bodyPr wrap="square" lIns="0" tIns="0" rIns="0" bIns="0" rtlCol="0" anchor="t"/>
+          <a:bodyPr wrap="none" lIns="0" tIns="0" rIns="0" bIns="0" rtlCol="0" anchor="t"/>
           <a:lstStyle/>
           <a:p>
             <a:pPr marL="0" indent="0" algn="l">
@@ -7816,67 +8455,43 @@
               <a:buNone/>
             </a:pPr>
             <a:r>
-              <a:rPr lang="en-US" sz="800" dirty="0">
-                <a:latin typeface="Carlito" pitchFamily="34" charset="0"/>
-                <a:ea typeface="Carlito" pitchFamily="34" charset="-122"/>
-                <a:cs typeface="Carlito" pitchFamily="34" charset="-120"/>
-              </a:rPr>
-              <a:t>Обучение: </a:t>
-            </a:r>
-            <a:r>
-              <a:rPr lang="en-US" sz="800" b="1" dirty="0">
+              <a:rPr lang="ru-RU" sz="900" b="1" dirty="0" smtClean="0">
                 <a:latin typeface="Courier New" pitchFamily="34" charset="0"/>
                 <a:ea typeface="Courier New" pitchFamily="34" charset="-122"/>
                 <a:cs typeface="Courier New" pitchFamily="34" charset="-120"/>
               </a:rPr>
-              <a:t>12 регионов</a:t>
-            </a:r>
-            <a:r>
-              <a:rPr lang="en-US" sz="800" dirty="0">
-                <a:latin typeface="Carlito" pitchFamily="34" charset="0"/>
-                <a:ea typeface="Carlito" pitchFamily="34" charset="-122"/>
-                <a:cs typeface="Carlito" pitchFamily="34" charset="-120"/>
-              </a:rPr>
-              <a:t>, </a:t>
-            </a:r>
-            <a:r>
-              <a:rPr lang="en-US" sz="800" b="1" dirty="0">
+              <a:t>2</a:t>
+            </a:r>
+            <a:r>
+              <a:rPr lang="en-US" sz="900" b="1" dirty="0" smtClean="0">
                 <a:latin typeface="Courier New" pitchFamily="34" charset="0"/>
                 <a:ea typeface="Courier New" pitchFamily="34" charset="-122"/>
                 <a:cs typeface="Courier New" pitchFamily="34" charset="-120"/>
               </a:rPr>
-              <a:t>19 РМ</a:t>
-            </a:r>
-            <a:r>
-              <a:rPr lang="en-US" sz="800" dirty="0">
-                <a:latin typeface="Carlito" pitchFamily="34" charset="0"/>
-                <a:ea typeface="Carlito" pitchFamily="34" charset="-122"/>
-                <a:cs typeface="Carlito" pitchFamily="34" charset="-120"/>
-              </a:rPr>
-              <a:t>, </a:t>
-            </a:r>
-            <a:r>
-              <a:rPr lang="en-US" sz="800" b="1" dirty="0">
+              <a:t> </a:t>
+            </a:r>
+            <a:r>
+              <a:rPr lang="en-US" sz="900" b="1" dirty="0">
                 <a:latin typeface="Courier New" pitchFamily="34" charset="0"/>
                 <a:ea typeface="Courier New" pitchFamily="34" charset="-122"/>
                 <a:cs typeface="Courier New" pitchFamily="34" charset="-120"/>
               </a:rPr>
-              <a:t>~350 ТП</a:t>
-            </a:r>
-            <a:endParaRPr lang="en-US" sz="800" dirty="0"/>
-          </a:p>
-        </p:txBody>
-      </p:sp>
-      <p:sp>
-        <p:nvSpPr>
-          <p:cNvPr id="32" name="Text 24"/>
+              <a:t>экранов</a:t>
+            </a:r>
+            <a:endParaRPr lang="en-US" sz="900" dirty="0"/>
+          </a:p>
+        </p:txBody>
+      </p:sp>
+      <p:sp>
+        <p:nvSpPr>
+          <p:cNvPr id="36" name="Text 48"/>
           <p:cNvSpPr/>
           <p:nvPr/>
         </p:nvSpPr>
         <p:spPr>
           <a:xfrm>
-            <a:off x="385760" y="1601452"/>
-            <a:ext cx="91440" cy="91440"/>
+            <a:off x="276884" y="3546015"/>
+            <a:ext cx="111044" cy="103812"/>
           </a:xfrm>
           <a:prstGeom prst="rect">
             <a:avLst/>
@@ -7892,27 +8507,27 @@
               <a:buNone/>
             </a:pPr>
             <a:r>
-              <a:rPr lang="en-US" sz="844" dirty="0">
+              <a:rPr lang="en-US" sz="900" dirty="0">
                 <a:latin typeface="Segoe UI Symbol" pitchFamily="34" charset="0"/>
                 <a:ea typeface="Segoe UI Symbol" pitchFamily="34" charset="-122"/>
                 <a:cs typeface="Segoe UI Symbol" pitchFamily="34" charset="-120"/>
               </a:rPr>
-              <a:t>◖</a:t>
-            </a:r>
-            <a:endParaRPr lang="en-US" sz="844" dirty="0"/>
-          </a:p>
-        </p:txBody>
-      </p:sp>
-      <p:sp>
-        <p:nvSpPr>
-          <p:cNvPr id="33" name="Text 25"/>
+              <a:t>♟</a:t>
+            </a:r>
+            <a:endParaRPr lang="en-US" sz="900" dirty="0"/>
+          </a:p>
+        </p:txBody>
+      </p:sp>
+      <p:sp>
+        <p:nvSpPr>
+          <p:cNvPr id="37" name="Text 49"/>
           <p:cNvSpPr/>
           <p:nvPr/>
         </p:nvSpPr>
         <p:spPr>
           <a:xfrm>
-            <a:off x="514347" y="1587164"/>
-            <a:ext cx="2524088" cy="316091"/>
+            <a:off x="405470" y="3529541"/>
+            <a:ext cx="3065249" cy="179430"/>
           </a:xfrm>
           <a:prstGeom prst="rect">
             <a:avLst/>
@@ -7931,788 +8546,37 @@
               <a:buNone/>
             </a:pPr>
             <a:r>
-              <a:rPr lang="en-US" sz="800" dirty="0">
+              <a:rPr lang="en-US" sz="900" dirty="0">
                 <a:latin typeface="Carlito" pitchFamily="34" charset="0"/>
                 <a:ea typeface="Carlito" pitchFamily="34" charset="-122"/>
                 <a:cs typeface="Carlito" pitchFamily="34" charset="-120"/>
               </a:rPr>
-              <a:t>POSM: </a:t>
-            </a:r>
-            <a:r>
-              <a:rPr lang="en-US" sz="800" dirty="0" err="1">
+              <a:t>Мастер-классы: </a:t>
+            </a:r>
+            <a:r>
+              <a:rPr lang="en-US" sz="900" b="1" dirty="0">
+                <a:latin typeface="Courier New" pitchFamily="34" charset="0"/>
+                <a:ea typeface="Courier New" pitchFamily="34" charset="-122"/>
+                <a:cs typeface="Courier New" pitchFamily="34" charset="-120"/>
+              </a:rPr>
+              <a:t>3 ТТ</a:t>
+            </a:r>
+            <a:r>
+              <a:rPr lang="en-US" sz="900" dirty="0">
                 <a:latin typeface="Carlito" pitchFamily="34" charset="0"/>
                 <a:ea typeface="Carlito" pitchFamily="34" charset="-122"/>
                 <a:cs typeface="Carlito" pitchFamily="34" charset="-120"/>
               </a:rPr>
-              <a:t>шелфтокеры</a:t>
-            </a:r>
-            <a:r>
-              <a:rPr lang="en-US" sz="800" dirty="0">
-                <a:latin typeface="Carlito" pitchFamily="34" charset="0"/>
-                <a:ea typeface="Carlito" pitchFamily="34" charset="-122"/>
-                <a:cs typeface="Carlito" pitchFamily="34" charset="-120"/>
-              </a:rPr>
-              <a:t> </a:t>
-            </a:r>
-            <a:r>
-              <a:rPr lang="en-US" sz="800" b="1" dirty="0" smtClean="0">
-                <a:latin typeface="Liberation Sans Narrow" pitchFamily="34" charset="0"/>
-                <a:ea typeface="Liberation Sans Narrow" pitchFamily="34" charset="-122"/>
-                <a:cs typeface="Liberation Sans Narrow" pitchFamily="34" charset="-120"/>
-              </a:rPr>
-              <a:t>1000 </a:t>
-            </a:r>
-            <a:r>
-              <a:rPr lang="en-US" sz="800" b="1" dirty="0">
-                <a:latin typeface="Liberation Sans Narrow" pitchFamily="34" charset="0"/>
-                <a:ea typeface="Liberation Sans Narrow" pitchFamily="34" charset="-122"/>
-                <a:cs typeface="Liberation Sans Narrow" pitchFamily="34" charset="-120"/>
-              </a:rPr>
-              <a:t>шт</a:t>
-            </a:r>
-            <a:r>
-              <a:rPr lang="en-US" sz="800" dirty="0">
-                <a:latin typeface="Carlito" pitchFamily="34" charset="0"/>
-                <a:ea typeface="Carlito" pitchFamily="34" charset="-122"/>
-                <a:cs typeface="Carlito" pitchFamily="34" charset="-120"/>
-              </a:rPr>
-              <a:t>, воблеры </a:t>
-            </a:r>
-            <a:r>
-              <a:rPr lang="en-US" sz="800" b="1" dirty="0">
-                <a:latin typeface="Liberation Sans Narrow" pitchFamily="34" charset="0"/>
-                <a:ea typeface="Liberation Sans Narrow" pitchFamily="34" charset="-122"/>
-                <a:cs typeface="Liberation Sans Narrow" pitchFamily="34" charset="-120"/>
-              </a:rPr>
-              <a:t>1000</a:t>
-            </a:r>
-            <a:r>
-              <a:rPr lang="en-US" sz="800" dirty="0">
-                <a:latin typeface="Carlito" pitchFamily="34" charset="0"/>
-                <a:ea typeface="Carlito" pitchFamily="34" charset="-122"/>
-                <a:cs typeface="Carlito" pitchFamily="34" charset="-120"/>
-              </a:rPr>
-              <a:t>, ценники </a:t>
-            </a:r>
-            <a:r>
-              <a:rPr lang="en-US" sz="800" b="1" dirty="0">
-                <a:latin typeface="Liberation Sans Narrow" pitchFamily="34" charset="0"/>
-                <a:ea typeface="Liberation Sans Narrow" pitchFamily="34" charset="-122"/>
-                <a:cs typeface="Liberation Sans Narrow" pitchFamily="34" charset="-120"/>
-              </a:rPr>
-              <a:t>1000</a:t>
-            </a:r>
-            <a:r>
-              <a:rPr lang="en-US" sz="800" dirty="0">
-                <a:latin typeface="Carlito" pitchFamily="34" charset="0"/>
-                <a:ea typeface="Carlito" pitchFamily="34" charset="-122"/>
-                <a:cs typeface="Carlito" pitchFamily="34" charset="-120"/>
-              </a:rPr>
-              <a:t>, листовки </a:t>
-            </a:r>
-            <a:r>
-              <a:rPr lang="en-US" sz="800" b="1" dirty="0">
-                <a:latin typeface="Liberation Sans Narrow" pitchFamily="34" charset="0"/>
-                <a:ea typeface="Liberation Sans Narrow" pitchFamily="34" charset="-122"/>
-                <a:cs typeface="Liberation Sans Narrow" pitchFamily="34" charset="-120"/>
-              </a:rPr>
-              <a:t>500</a:t>
-            </a:r>
-            <a:endParaRPr lang="en-US" sz="800" dirty="0"/>
-          </a:p>
-        </p:txBody>
-      </p:sp>
-      <p:sp>
-        <p:nvSpPr>
-          <p:cNvPr id="34" name="Text 26"/>
-          <p:cNvSpPr/>
-          <p:nvPr/>
-        </p:nvSpPr>
-        <p:spPr>
-          <a:xfrm>
-            <a:off x="385760" y="1884969"/>
-            <a:ext cx="91440" cy="91440"/>
-          </a:xfrm>
-          <a:prstGeom prst="rect">
-            <a:avLst/>
-          </a:prstGeom>
-          <a:noFill/>
-          <a:ln/>
-        </p:spPr>
-        <p:txBody>
-          <a:bodyPr wrap="none" lIns="0" tIns="0" rIns="0" bIns="0" rtlCol="0" anchor="ctr"/>
-          <a:lstStyle/>
-          <a:p>
-            <a:pPr marL="0" indent="0" algn="ctr">
-              <a:buNone/>
-            </a:pPr>
-            <a:r>
-              <a:rPr lang="en-US" sz="844" dirty="0">
-                <a:latin typeface="Segoe UI Symbol" pitchFamily="34" charset="0"/>
-                <a:ea typeface="Segoe UI Symbol" pitchFamily="34" charset="-122"/>
-                <a:cs typeface="Segoe UI Symbol" pitchFamily="34" charset="-120"/>
-              </a:rPr>
-              <a:t>▶</a:t>
-            </a:r>
-            <a:endParaRPr lang="en-US" sz="844" dirty="0"/>
-          </a:p>
-        </p:txBody>
-      </p:sp>
-      <p:sp>
-        <p:nvSpPr>
-          <p:cNvPr id="35" name="Text 27"/>
-          <p:cNvSpPr/>
-          <p:nvPr/>
-        </p:nvSpPr>
-        <p:spPr>
-          <a:xfrm>
-            <a:off x="514347" y="1870683"/>
-            <a:ext cx="2524088" cy="316091"/>
-          </a:xfrm>
-          <a:prstGeom prst="rect">
-            <a:avLst/>
-          </a:prstGeom>
-          <a:noFill/>
-          <a:ln/>
-        </p:spPr>
-        <p:txBody>
-          <a:bodyPr wrap="square" lIns="0" tIns="0" rIns="0" bIns="0" rtlCol="0" anchor="t"/>
-          <a:lstStyle/>
-          <a:p>
-            <a:pPr marL="0" indent="0" algn="l">
-              <a:lnSpc>
-                <a:spcPts val="835"/>
-              </a:lnSpc>
-              <a:buNone/>
-            </a:pPr>
-            <a:r>
-              <a:rPr lang="en-US" sz="800" dirty="0">
-                <a:latin typeface="Carlito" pitchFamily="34" charset="0"/>
-                <a:ea typeface="Carlito" pitchFamily="34" charset="-122"/>
-                <a:cs typeface="Carlito" pitchFamily="34" charset="-120"/>
-              </a:rPr>
-              <a:t>Контент: </a:t>
-            </a:r>
-            <a:r>
-              <a:rPr lang="en-US" sz="800" dirty="0" err="1" smtClean="0">
-                <a:latin typeface="Carlito" pitchFamily="34" charset="0"/>
-                <a:ea typeface="Carlito" pitchFamily="34" charset="-122"/>
-                <a:cs typeface="Carlito" pitchFamily="34" charset="-120"/>
-              </a:rPr>
-              <a:t>видеоинструкция</a:t>
-            </a:r>
-            <a:r>
-              <a:rPr lang="en-US" sz="800" dirty="0" smtClean="0">
-                <a:latin typeface="Carlito" pitchFamily="34" charset="0"/>
-                <a:ea typeface="Carlito" pitchFamily="34" charset="-122"/>
-                <a:cs typeface="Carlito" pitchFamily="34" charset="-120"/>
-              </a:rPr>
-              <a:t>, </a:t>
-            </a:r>
-            <a:r>
-              <a:rPr lang="en-US" sz="800" dirty="0" err="1" smtClean="0">
-                <a:latin typeface="Carlito" pitchFamily="34" charset="0"/>
-                <a:ea typeface="Carlito" pitchFamily="34" charset="-122"/>
-                <a:cs typeface="Carlito" pitchFamily="34" charset="-120"/>
-              </a:rPr>
-              <a:t>портфолио</a:t>
-            </a:r>
-            <a:r>
-              <a:rPr lang="en-US" sz="800" dirty="0">
-                <a:latin typeface="Carlito" pitchFamily="34" charset="0"/>
-                <a:ea typeface="Carlito" pitchFamily="34" charset="-122"/>
-                <a:cs typeface="Carlito" pitchFamily="34" charset="-120"/>
-              </a:rPr>
-              <a:t>,</a:t>
-            </a:r>
-            <a:r>
-              <a:rPr lang="en-US" sz="800" dirty="0" smtClean="0">
-                <a:latin typeface="Carlito" pitchFamily="34" charset="0"/>
-                <a:ea typeface="Carlito" pitchFamily="34" charset="-122"/>
-                <a:cs typeface="Carlito" pitchFamily="34" charset="-120"/>
-              </a:rPr>
-              <a:t> </a:t>
-            </a:r>
-            <a:r>
-              <a:rPr lang="en-US" sz="800" dirty="0" err="1" smtClean="0">
-                <a:latin typeface="Carlito" pitchFamily="34" charset="0"/>
-                <a:ea typeface="Carlito" pitchFamily="34" charset="-122"/>
-                <a:cs typeface="Carlito" pitchFamily="34" charset="-120"/>
-              </a:rPr>
-              <a:t>видео</a:t>
-            </a:r>
-            <a:r>
-              <a:rPr lang="en-US" sz="800" dirty="0" smtClean="0">
-                <a:latin typeface="Carlito" pitchFamily="34" charset="0"/>
-                <a:ea typeface="Carlito" pitchFamily="34" charset="-122"/>
-                <a:cs typeface="Carlito" pitchFamily="34" charset="-120"/>
-              </a:rPr>
-              <a:t> </a:t>
-            </a:r>
-            <a:r>
-              <a:rPr lang="en-US" sz="800" dirty="0" err="1">
-                <a:latin typeface="Carlito" pitchFamily="34" charset="0"/>
-                <a:ea typeface="Carlito" pitchFamily="34" charset="-122"/>
-                <a:cs typeface="Carlito" pitchFamily="34" charset="-120"/>
-              </a:rPr>
-              <a:t>для</a:t>
-            </a:r>
-            <a:r>
-              <a:rPr lang="en-US" sz="800" dirty="0">
-                <a:latin typeface="Carlito" pitchFamily="34" charset="0"/>
-                <a:ea typeface="Carlito" pitchFamily="34" charset="-122"/>
-                <a:cs typeface="Carlito" pitchFamily="34" charset="-120"/>
-              </a:rPr>
-              <a:t> </a:t>
-            </a:r>
-            <a:r>
-              <a:rPr lang="en-US" sz="800" dirty="0" smtClean="0">
-                <a:latin typeface="Carlito" pitchFamily="34" charset="0"/>
-                <a:ea typeface="Carlito" pitchFamily="34" charset="-122"/>
-                <a:cs typeface="Carlito" pitchFamily="34" charset="-120"/>
-              </a:rPr>
-              <a:t>ТП</a:t>
-            </a:r>
-            <a:endParaRPr lang="en-US" sz="800" dirty="0"/>
-          </a:p>
-        </p:txBody>
-      </p:sp>
-      <p:sp>
-        <p:nvSpPr>
-          <p:cNvPr id="36" name="Shape 28"/>
-          <p:cNvSpPr/>
-          <p:nvPr/>
-        </p:nvSpPr>
-        <p:spPr>
-          <a:xfrm>
-            <a:off x="385762" y="2157771"/>
-            <a:ext cx="2652675" cy="0"/>
-          </a:xfrm>
-          <a:prstGeom prst="line">
-            <a:avLst/>
-          </a:prstGeom>
-          <a:noFill/>
-          <a:ln w="7144">
-            <a:solidFill>
-              <a:srgbClr val="D9D2C2"/>
-            </a:solidFill>
-            <a:prstDash val="dash"/>
-          </a:ln>
-        </p:spPr>
-      </p:sp>
-      <p:sp>
-        <p:nvSpPr>
-          <p:cNvPr id="60" name="Text 68"/>
-          <p:cNvSpPr/>
-          <p:nvPr/>
-        </p:nvSpPr>
-        <p:spPr>
-          <a:xfrm>
-            <a:off x="296465" y="2693476"/>
-            <a:ext cx="2831381" cy="1721857"/>
-          </a:xfrm>
-          <a:prstGeom prst="roundRect">
-            <a:avLst>
-              <a:gd name="adj" fmla="val 3364"/>
-            </a:avLst>
-          </a:prstGeom>
-          <a:solidFill>
-            <a:srgbClr val="FFFFFF"/>
-          </a:solidFill>
-          <a:ln w="7144">
-            <a:solidFill>
-              <a:srgbClr val="D9D2C2"/>
-            </a:solidFill>
-            <a:prstDash val="solid"/>
-          </a:ln>
-        </p:spPr>
-        <p:txBody>
-          <a:bodyPr wrap="square" rtlCol="0" anchor="ctr"/>
-          <a:lstStyle/>
-          <a:p>
-            <a:pPr marL="0" indent="0">
-              <a:buNone/>
-            </a:pPr>
-            <a:endParaRPr lang="en-US" dirty="0"/>
-          </a:p>
-        </p:txBody>
-      </p:sp>
-      <p:sp>
-        <p:nvSpPr>
-          <p:cNvPr id="61" name="Shape 69"/>
-          <p:cNvSpPr/>
-          <p:nvPr/>
-        </p:nvSpPr>
-        <p:spPr>
-          <a:xfrm>
-            <a:off x="385762" y="2982798"/>
-            <a:ext cx="2652787" cy="0"/>
-          </a:xfrm>
-          <a:prstGeom prst="line">
-            <a:avLst/>
-          </a:prstGeom>
-          <a:noFill/>
-          <a:ln w="7144">
-            <a:solidFill>
-              <a:srgbClr val="D9D2C2"/>
-            </a:solidFill>
-            <a:prstDash val="solid"/>
-          </a:ln>
-        </p:spPr>
-      </p:sp>
-      <p:sp>
-        <p:nvSpPr>
-          <p:cNvPr id="62" name="Text 70"/>
-          <p:cNvSpPr/>
-          <p:nvPr/>
-        </p:nvSpPr>
-        <p:spPr>
-          <a:xfrm>
-            <a:off x="385762" y="2795274"/>
-            <a:ext cx="21431" cy="114300"/>
-          </a:xfrm>
-          <a:prstGeom prst="roundRect">
-            <a:avLst>
-              <a:gd name="adj" fmla="val 88890"/>
-            </a:avLst>
-          </a:prstGeom>
-          <a:solidFill>
-            <a:srgbClr val="B5614A"/>
-          </a:solidFill>
-          <a:ln/>
-        </p:spPr>
-        <p:txBody>
-          <a:bodyPr wrap="square" rtlCol="0" anchor="ctr"/>
-          <a:lstStyle/>
-          <a:p>
-            <a:pPr marL="0" indent="0">
-              <a:buNone/>
-            </a:pPr>
-            <a:endParaRPr lang="en-US" dirty="0"/>
-          </a:p>
-        </p:txBody>
-      </p:sp>
-      <p:sp>
-        <p:nvSpPr>
-          <p:cNvPr id="63" name="Text 71"/>
-          <p:cNvSpPr/>
-          <p:nvPr/>
-        </p:nvSpPr>
-        <p:spPr>
-          <a:xfrm>
-            <a:off x="464342" y="2788131"/>
-            <a:ext cx="128588" cy="128588"/>
-          </a:xfrm>
-          <a:prstGeom prst="rect">
-            <a:avLst/>
-          </a:prstGeom>
-          <a:noFill/>
-          <a:ln/>
-        </p:spPr>
-        <p:txBody>
-          <a:bodyPr wrap="none" lIns="0" tIns="0" rIns="0" bIns="0" rtlCol="0" anchor="ctr"/>
-          <a:lstStyle/>
-          <a:p>
-            <a:pPr marL="0" indent="0" algn="ctr">
-              <a:buNone/>
-            </a:pPr>
-            <a:r>
-              <a:rPr lang="en-US" sz="1266" dirty="0">
-                <a:solidFill>
-                  <a:srgbClr val="B5614A"/>
-                </a:solidFill>
-                <a:latin typeface="Segoe UI Symbol" pitchFamily="34" charset="0"/>
-                <a:ea typeface="Segoe UI Symbol" pitchFamily="34" charset="-122"/>
-                <a:cs typeface="Segoe UI Symbol" pitchFamily="34" charset="-120"/>
-              </a:rPr>
-              <a:t>▥</a:t>
-            </a:r>
-            <a:endParaRPr lang="en-US" sz="1266" dirty="0"/>
-          </a:p>
-        </p:txBody>
-      </p:sp>
-      <p:sp>
-        <p:nvSpPr>
-          <p:cNvPr id="64" name="Text 72"/>
-          <p:cNvSpPr/>
-          <p:nvPr/>
-        </p:nvSpPr>
-        <p:spPr>
-          <a:xfrm>
-            <a:off x="650079" y="2782774"/>
-            <a:ext cx="2388468" cy="139303"/>
-          </a:xfrm>
-          <a:prstGeom prst="rect">
-            <a:avLst/>
-          </a:prstGeom>
-          <a:noFill/>
-          <a:ln/>
-        </p:spPr>
-        <p:txBody>
-          <a:bodyPr wrap="none" lIns="0" tIns="0" rIns="0" bIns="0" rtlCol="0" anchor="t"/>
-          <a:lstStyle/>
-          <a:p>
-            <a:pPr marL="0" indent="0" algn="l">
-              <a:lnSpc>
-                <a:spcPts val="1097"/>
-              </a:lnSpc>
-              <a:buNone/>
-            </a:pPr>
-            <a:r>
-              <a:rPr lang="en-US" sz="800" b="1" kern="0" spc="84" dirty="0">
-                <a:latin typeface="Carlito" pitchFamily="34" charset="0"/>
-                <a:ea typeface="Carlito" pitchFamily="34" charset="-122"/>
-                <a:cs typeface="Carlito" pitchFamily="34" charset="-120"/>
-              </a:rPr>
-              <a:t>B2B КАНАЛ</a:t>
-            </a:r>
-            <a:endParaRPr lang="en-US" sz="800" dirty="0"/>
-          </a:p>
-        </p:txBody>
-      </p:sp>
-      <p:sp>
-        <p:nvSpPr>
-          <p:cNvPr id="65" name="Text 73"/>
-          <p:cNvSpPr/>
-          <p:nvPr/>
-        </p:nvSpPr>
-        <p:spPr>
-          <a:xfrm>
-            <a:off x="385760" y="3086382"/>
-            <a:ext cx="91440" cy="91440"/>
-          </a:xfrm>
-          <a:prstGeom prst="rect">
-            <a:avLst/>
-          </a:prstGeom>
-          <a:noFill/>
-          <a:ln/>
-        </p:spPr>
-        <p:txBody>
-          <a:bodyPr wrap="none" lIns="0" tIns="0" rIns="0" bIns="0" rtlCol="0" anchor="ctr"/>
-          <a:lstStyle/>
-          <a:p>
-            <a:pPr marL="0" indent="0" algn="ctr">
-              <a:buNone/>
-            </a:pPr>
-            <a:r>
-              <a:rPr lang="en-US" sz="844" dirty="0">
-                <a:latin typeface="Segoe UI Symbol" pitchFamily="34" charset="0"/>
-                <a:ea typeface="Segoe UI Symbol" pitchFamily="34" charset="-122"/>
-                <a:cs typeface="Segoe UI Symbol" pitchFamily="34" charset="-120"/>
-              </a:rPr>
-              <a:t>⚗</a:t>
-            </a:r>
-            <a:endParaRPr lang="en-US" sz="844" dirty="0"/>
-          </a:p>
-        </p:txBody>
-      </p:sp>
-      <p:sp>
-        <p:nvSpPr>
-          <p:cNvPr id="66" name="Text 74"/>
-          <p:cNvSpPr/>
-          <p:nvPr/>
-        </p:nvSpPr>
-        <p:spPr>
-          <a:xfrm>
-            <a:off x="514350" y="3072094"/>
-            <a:ext cx="2524199" cy="158046"/>
-          </a:xfrm>
-          <a:prstGeom prst="rect">
-            <a:avLst/>
-          </a:prstGeom>
-          <a:noFill/>
-          <a:ln/>
-        </p:spPr>
-        <p:txBody>
-          <a:bodyPr wrap="square" lIns="0" tIns="0" rIns="0" bIns="0" rtlCol="0" anchor="t"/>
-          <a:lstStyle/>
-          <a:p>
-            <a:pPr marL="0" indent="0" algn="l">
-              <a:lnSpc>
-                <a:spcPts val="835"/>
-              </a:lnSpc>
-              <a:buNone/>
-            </a:pPr>
-            <a:r>
-              <a:rPr lang="en-US" sz="800" dirty="0">
-                <a:latin typeface="Carlito" pitchFamily="34" charset="0"/>
-                <a:ea typeface="Carlito" pitchFamily="34" charset="-122"/>
-                <a:cs typeface="Carlito" pitchFamily="34" charset="-120"/>
-              </a:rPr>
-              <a:t>Тест-образец: пробник </a:t>
-            </a:r>
-            <a:r>
-              <a:rPr lang="en-US" sz="800" b="1" dirty="0">
-                <a:latin typeface="Liberation Sans Narrow" pitchFamily="34" charset="0"/>
-                <a:ea typeface="Liberation Sans Narrow" pitchFamily="34" charset="-122"/>
-                <a:cs typeface="Liberation Sans Narrow" pitchFamily="34" charset="-120"/>
-              </a:rPr>
-              <a:t>0,4 л</a:t>
-            </a:r>
-            <a:r>
-              <a:rPr lang="en-US" sz="800" dirty="0">
-                <a:latin typeface="Carlito" pitchFamily="34" charset="0"/>
-                <a:ea typeface="Carlito" pitchFamily="34" charset="-122"/>
-                <a:cs typeface="Carlito" pitchFamily="34" charset="-120"/>
-              </a:rPr>
-              <a:t> + веерные выкрасы</a:t>
-            </a:r>
-            <a:endParaRPr lang="en-US" sz="800" dirty="0"/>
-          </a:p>
-        </p:txBody>
-      </p:sp>
-      <p:sp>
-        <p:nvSpPr>
-          <p:cNvPr id="67" name="Text 75"/>
-          <p:cNvSpPr/>
-          <p:nvPr/>
-        </p:nvSpPr>
-        <p:spPr>
-          <a:xfrm>
-            <a:off x="385760" y="3256716"/>
-            <a:ext cx="91440" cy="91440"/>
-          </a:xfrm>
-          <a:prstGeom prst="rect">
-            <a:avLst/>
-          </a:prstGeom>
-          <a:noFill/>
-          <a:ln/>
-        </p:spPr>
-        <p:txBody>
-          <a:bodyPr wrap="none" lIns="0" tIns="0" rIns="0" bIns="0" rtlCol="0" anchor="ctr"/>
-          <a:lstStyle/>
-          <a:p>
-            <a:pPr marL="0" indent="0" algn="ctr">
-              <a:buNone/>
-            </a:pPr>
-            <a:r>
-              <a:rPr lang="en-US" sz="844" dirty="0">
-                <a:latin typeface="Segoe UI Symbol" pitchFamily="34" charset="0"/>
-                <a:ea typeface="Segoe UI Symbol" pitchFamily="34" charset="-122"/>
-                <a:cs typeface="Segoe UI Symbol" pitchFamily="34" charset="-120"/>
-              </a:rPr>
-              <a:t>▤</a:t>
-            </a:r>
-            <a:endParaRPr lang="en-US" sz="844" dirty="0"/>
-          </a:p>
-        </p:txBody>
-      </p:sp>
-      <p:sp>
-        <p:nvSpPr>
-          <p:cNvPr id="68" name="Text 76"/>
-          <p:cNvSpPr/>
-          <p:nvPr/>
-        </p:nvSpPr>
-        <p:spPr>
-          <a:xfrm>
-            <a:off x="514350" y="3242429"/>
-            <a:ext cx="2524199" cy="148070"/>
-          </a:xfrm>
-          <a:prstGeom prst="rect">
-            <a:avLst/>
-          </a:prstGeom>
-          <a:noFill/>
-          <a:ln/>
-        </p:spPr>
-        <p:txBody>
-          <a:bodyPr wrap="square" lIns="0" tIns="0" rIns="0" bIns="0" rtlCol="0" anchor="t"/>
-          <a:lstStyle/>
-          <a:p>
-            <a:pPr marL="0" indent="0" algn="l">
-              <a:lnSpc>
-                <a:spcPts val="835"/>
-              </a:lnSpc>
-              <a:buNone/>
-            </a:pPr>
-            <a:r>
-              <a:rPr lang="en-US" sz="800" dirty="0">
-                <a:latin typeface="Carlito" pitchFamily="34" charset="0"/>
-                <a:ea typeface="Carlito" pitchFamily="34" charset="-122"/>
-                <a:cs typeface="Carlito" pitchFamily="34" charset="-120"/>
-              </a:rPr>
-              <a:t>Листовка B2B с расчётом ССВ</a:t>
-            </a:r>
-            <a:endParaRPr lang="en-US" sz="800" dirty="0"/>
-          </a:p>
-        </p:txBody>
-      </p:sp>
-      <p:sp>
-        <p:nvSpPr>
-          <p:cNvPr id="69" name="Text 77"/>
-          <p:cNvSpPr/>
-          <p:nvPr/>
-        </p:nvSpPr>
-        <p:spPr>
-          <a:xfrm>
-            <a:off x="385760" y="3419906"/>
-            <a:ext cx="91440" cy="91440"/>
-          </a:xfrm>
-          <a:prstGeom prst="rect">
-            <a:avLst/>
-          </a:prstGeom>
-          <a:noFill/>
-          <a:ln/>
-        </p:spPr>
-        <p:txBody>
-          <a:bodyPr wrap="none" lIns="0" tIns="0" rIns="0" bIns="0" rtlCol="0" anchor="ctr"/>
-          <a:lstStyle/>
-          <a:p>
-            <a:pPr marL="0" indent="0" algn="ctr">
-              <a:buNone/>
-            </a:pPr>
-            <a:r>
-              <a:rPr lang="en-US" sz="844" dirty="0">
-                <a:latin typeface="Segoe UI Symbol" pitchFamily="34" charset="0"/>
-                <a:ea typeface="Segoe UI Symbol" pitchFamily="34" charset="-122"/>
-                <a:cs typeface="Segoe UI Symbol" pitchFamily="34" charset="-120"/>
-              </a:rPr>
-              <a:t>⚒</a:t>
-            </a:r>
-            <a:endParaRPr lang="en-US" sz="844" dirty="0"/>
-          </a:p>
-        </p:txBody>
-      </p:sp>
-      <p:sp>
-        <p:nvSpPr>
-          <p:cNvPr id="70" name="Text 78"/>
-          <p:cNvSpPr/>
-          <p:nvPr/>
-        </p:nvSpPr>
-        <p:spPr>
-          <a:xfrm>
-            <a:off x="514350" y="3405619"/>
-            <a:ext cx="2524199" cy="296141"/>
-          </a:xfrm>
-          <a:prstGeom prst="rect">
-            <a:avLst/>
-          </a:prstGeom>
-          <a:noFill/>
-          <a:ln/>
-        </p:spPr>
-        <p:txBody>
-          <a:bodyPr wrap="square" lIns="0" tIns="0" rIns="0" bIns="0" rtlCol="0" anchor="t"/>
-          <a:lstStyle/>
-          <a:p>
-            <a:pPr marL="0" indent="0" algn="l">
-              <a:lnSpc>
-                <a:spcPts val="835"/>
-              </a:lnSpc>
-              <a:buNone/>
-            </a:pPr>
-            <a:r>
-              <a:rPr lang="en-US" sz="800" dirty="0">
-                <a:latin typeface="Carlito" pitchFamily="34" charset="0"/>
-                <a:ea typeface="Carlito" pitchFamily="34" charset="-122"/>
-                <a:cs typeface="Carlito" pitchFamily="34" charset="-120"/>
-              </a:rPr>
-              <a:t>6 инструментов: тест-образец, листовка, инфлюенсер, маржа, портфолио</a:t>
-            </a:r>
-            <a:endParaRPr lang="en-US" sz="800" dirty="0"/>
-          </a:p>
-        </p:txBody>
-      </p:sp>
-      <p:sp>
-        <p:nvSpPr>
-          <p:cNvPr id="71" name="Text 79"/>
-          <p:cNvSpPr/>
-          <p:nvPr/>
-        </p:nvSpPr>
-        <p:spPr>
-          <a:xfrm>
-            <a:off x="385760" y="3689136"/>
-            <a:ext cx="91440" cy="91440"/>
-          </a:xfrm>
-          <a:prstGeom prst="rect">
-            <a:avLst/>
-          </a:prstGeom>
-          <a:noFill/>
-          <a:ln/>
-        </p:spPr>
-        <p:txBody>
-          <a:bodyPr wrap="none" lIns="0" tIns="0" rIns="0" bIns="0" rtlCol="0" anchor="ctr"/>
-          <a:lstStyle/>
-          <a:p>
-            <a:pPr marL="0" indent="0" algn="ctr">
-              <a:buNone/>
-            </a:pPr>
-            <a:r>
-              <a:rPr lang="en-US" sz="844" dirty="0">
-                <a:latin typeface="Segoe UI Symbol" pitchFamily="34" charset="0"/>
-                <a:ea typeface="Segoe UI Symbol" pitchFamily="34" charset="-122"/>
-                <a:cs typeface="Segoe UI Symbol" pitchFamily="34" charset="-120"/>
-              </a:rPr>
-              <a:t>↗</a:t>
-            </a:r>
-            <a:endParaRPr lang="en-US" sz="844" dirty="0"/>
-          </a:p>
-        </p:txBody>
-      </p:sp>
-      <p:sp>
-        <p:nvSpPr>
-          <p:cNvPr id="72" name="Text 80"/>
-          <p:cNvSpPr/>
-          <p:nvPr/>
-        </p:nvSpPr>
-        <p:spPr>
-          <a:xfrm>
-            <a:off x="514350" y="3674849"/>
-            <a:ext cx="2524199" cy="148070"/>
-          </a:xfrm>
-          <a:prstGeom prst="rect">
-            <a:avLst/>
-          </a:prstGeom>
-          <a:noFill/>
-          <a:ln/>
-        </p:spPr>
-        <p:txBody>
-          <a:bodyPr wrap="square" lIns="0" tIns="0" rIns="0" bIns="0" rtlCol="0" anchor="t"/>
-          <a:lstStyle/>
-          <a:p>
-            <a:pPr marL="0" indent="0" algn="l">
-              <a:lnSpc>
-                <a:spcPts val="835"/>
-              </a:lnSpc>
-              <a:buNone/>
-            </a:pPr>
-            <a:r>
-              <a:rPr lang="en-US" sz="800" dirty="0">
-                <a:latin typeface="Carlito" pitchFamily="34" charset="0"/>
-                <a:ea typeface="Carlito" pitchFamily="34" charset="-122"/>
-                <a:cs typeface="Carlito" pitchFamily="34" charset="-120"/>
-              </a:rPr>
-              <a:t>Расчёт маржинальности по фасовкам (8,5 л выгоднее)</a:t>
-            </a:r>
-            <a:endParaRPr lang="en-US" sz="800" dirty="0"/>
-          </a:p>
-        </p:txBody>
-      </p:sp>
-      <p:sp>
-        <p:nvSpPr>
-          <p:cNvPr id="73" name="Shape 81"/>
-          <p:cNvSpPr/>
-          <p:nvPr/>
-        </p:nvSpPr>
-        <p:spPr>
-          <a:xfrm>
-            <a:off x="385762" y="3898760"/>
-            <a:ext cx="2652787" cy="0"/>
-          </a:xfrm>
-          <a:prstGeom prst="line">
-            <a:avLst/>
-          </a:prstGeom>
-          <a:noFill/>
-          <a:ln w="7144">
-            <a:solidFill>
-              <a:srgbClr val="D9D2C2"/>
-            </a:solidFill>
-            <a:prstDash val="dash"/>
-          </a:ln>
-        </p:spPr>
+              <a:t> в Ростове</a:t>
+            </a:r>
+            <a:endParaRPr lang="en-US" sz="900" dirty="0"/>
+          </a:p>
+        </p:txBody>
       </p:sp>
     </p:spTree>
     <p:extLst>
       <p:ext uri="{BB962C8B-B14F-4D97-AF65-F5344CB8AC3E}">
-        <p14:creationId xmlns:p14="http://schemas.microsoft.com/office/powerpoint/2010/main" val="2412404899"/>
+        <p14:creationId xmlns:p14="http://schemas.microsoft.com/office/powerpoint/2010/main" val="1029298718"/>
       </p:ext>
     </p:extLst>
   </p:cSld>
@@ -8741,18 +8605,140 @@
       </p:grpSpPr>
       <p:sp>
         <p:nvSpPr>
-          <p:cNvPr id="2" name="Text 32"/>
+          <p:cNvPr id="2" name="Text 1"/>
           <p:cNvSpPr/>
           <p:nvPr/>
         </p:nvSpPr>
         <p:spPr>
           <a:xfrm>
-            <a:off x="383154" y="984258"/>
-            <a:ext cx="2831269" cy="2953132"/>
+            <a:off x="228602" y="283370"/>
+            <a:ext cx="157163" cy="157163"/>
+          </a:xfrm>
+          <a:prstGeom prst="rect">
+            <a:avLst/>
+          </a:prstGeom>
+          <a:noFill/>
+          <a:ln/>
+        </p:spPr>
+        <p:txBody>
+          <a:bodyPr wrap="none" lIns="0" tIns="0" rIns="0" bIns="0" rtlCol="0" anchor="ctr"/>
+          <a:lstStyle/>
+          <a:p>
+            <a:pPr marL="0" indent="0" algn="ctr">
+              <a:buNone/>
+            </a:pPr>
+            <a:endParaRPr lang="en-US" sz="1547" dirty="0"/>
+          </a:p>
+        </p:txBody>
+      </p:sp>
+      <p:sp>
+        <p:nvSpPr>
+          <p:cNvPr id="3" name="Text 2"/>
+          <p:cNvSpPr/>
+          <p:nvPr/>
+        </p:nvSpPr>
+        <p:spPr>
+          <a:xfrm>
+            <a:off x="305885" y="272942"/>
+            <a:ext cx="770453" cy="231458"/>
+          </a:xfrm>
+          <a:prstGeom prst="rect">
+            <a:avLst/>
+          </a:prstGeom>
+          <a:noFill/>
+          <a:ln/>
+        </p:spPr>
+        <p:txBody>
+          <a:bodyPr wrap="none" lIns="0" tIns="0" rIns="0" bIns="0" rtlCol="0" anchor="t"/>
+          <a:lstStyle/>
+          <a:p>
+            <a:pPr marL="0" indent="0" algn="l">
+              <a:lnSpc>
+                <a:spcPts val="1688"/>
+              </a:lnSpc>
+              <a:buNone/>
+            </a:pPr>
+            <a:r>
+              <a:rPr lang="en-US" sz="1600" b="1" kern="0" spc="113" dirty="0">
+                <a:solidFill>
+                  <a:schemeClr val="tx1">
+                    <a:lumMod val="50000"/>
+                    <a:lumOff val="50000"/>
+                  </a:schemeClr>
+                </a:solidFill>
+                <a:latin typeface="Carlito" pitchFamily="34" charset="0"/>
+                <a:ea typeface="Carlito" pitchFamily="34" charset="-122"/>
+                <a:cs typeface="Carlito" pitchFamily="34" charset="-120"/>
+              </a:rPr>
+              <a:t>TITAN</a:t>
+            </a:r>
+            <a:endParaRPr lang="en-US" sz="1600" dirty="0">
+              <a:solidFill>
+                <a:schemeClr val="tx1">
+                  <a:lumMod val="50000"/>
+                  <a:lumOff val="50000"/>
+                </a:schemeClr>
+              </a:solidFill>
+            </a:endParaRPr>
+          </a:p>
+        </p:txBody>
+      </p:sp>
+      <p:sp>
+        <p:nvSpPr>
+          <p:cNvPr id="4" name="Text 5"/>
+          <p:cNvSpPr/>
+          <p:nvPr/>
+        </p:nvSpPr>
+        <p:spPr>
+          <a:xfrm>
+            <a:off x="1118897" y="284939"/>
+            <a:ext cx="1380514" cy="178594"/>
+          </a:xfrm>
+          <a:prstGeom prst="rect">
+            <a:avLst/>
+          </a:prstGeom>
+          <a:noFill/>
+          <a:ln/>
+        </p:spPr>
+        <p:txBody>
+          <a:bodyPr wrap="none" lIns="0" tIns="0" rIns="0" bIns="0" rtlCol="0" anchor="t"/>
+          <a:lstStyle/>
+          <a:p>
+            <a:pPr marL="0" indent="0" algn="l">
+              <a:lnSpc>
+                <a:spcPts val="1406"/>
+              </a:lnSpc>
+              <a:buNone/>
+            </a:pPr>
+            <a:r>
+              <a:rPr lang="en-US" sz="1200" b="1" kern="0" spc="56" dirty="0">
+                <a:solidFill>
+                  <a:srgbClr val="2F3A48"/>
+                </a:solidFill>
+                <a:latin typeface="Carlito" pitchFamily="34" charset="0"/>
+                <a:ea typeface="Carlito" pitchFamily="34" charset="-122"/>
+                <a:cs typeface="Carlito" pitchFamily="34" charset="-120"/>
+              </a:rPr>
+              <a:t>ЧТО СДЕЛАНО</a:t>
+            </a:r>
+            <a:endParaRPr lang="en-US" sz="1200" dirty="0"/>
+          </a:p>
+        </p:txBody>
+      </p:sp>
+      <p:sp>
+        <p:nvSpPr>
+          <p:cNvPr id="5" name="Text 6"/>
+          <p:cNvSpPr/>
+          <p:nvPr/>
+        </p:nvSpPr>
+        <p:spPr>
+          <a:xfrm>
+            <a:off x="7633311" y="245936"/>
+            <a:ext cx="1139029" cy="232029"/>
           </a:xfrm>
           <a:prstGeom prst="roundRect">
             <a:avLst>
-              <a:gd name="adj" fmla="val 3364"/>
+              <a:gd name="adj" fmla="val 24631"/>
             </a:avLst>
           </a:prstGeom>
           <a:solidFill>
@@ -8778,19 +8764,141 @@
       </p:sp>
       <p:sp>
         <p:nvSpPr>
-          <p:cNvPr id="3" name="Shape 33"/>
+          <p:cNvPr id="6" name="Text 8"/>
           <p:cNvSpPr/>
           <p:nvPr/>
         </p:nvSpPr>
         <p:spPr>
           <a:xfrm>
-            <a:off x="472451" y="1635252"/>
-            <a:ext cx="2652675" cy="0"/>
-          </a:xfrm>
-          <a:prstGeom prst="line">
-            <a:avLst/>
-          </a:prstGeom>
-          <a:noFill/>
+            <a:off x="7851542" y="314272"/>
+            <a:ext cx="702208" cy="107156"/>
+          </a:xfrm>
+          <a:prstGeom prst="rect">
+            <a:avLst/>
+          </a:prstGeom>
+          <a:noFill/>
+          <a:ln/>
+        </p:spPr>
+        <p:txBody>
+          <a:bodyPr wrap="none" lIns="0" tIns="0" rIns="0" bIns="0" rtlCol="0" anchor="t"/>
+          <a:lstStyle/>
+          <a:p>
+            <a:pPr marL="0" indent="0" algn="l">
+              <a:lnSpc>
+                <a:spcPts val="844"/>
+              </a:lnSpc>
+              <a:buNone/>
+            </a:pPr>
+            <a:r>
+              <a:rPr lang="en-US" sz="600" b="1" kern="0" spc="28" dirty="0">
+                <a:latin typeface="Carlito" pitchFamily="34" charset="0"/>
+                <a:ea typeface="Carlito" pitchFamily="34" charset="-122"/>
+                <a:cs typeface="Carlito" pitchFamily="34" charset="-120"/>
+              </a:rPr>
+              <a:t>ЭТАП 1 · АКТИВЕН</a:t>
+            </a:r>
+            <a:endParaRPr lang="en-US" sz="600" b="1" dirty="0"/>
+          </a:p>
+        </p:txBody>
+      </p:sp>
+      <p:sp>
+        <p:nvSpPr>
+          <p:cNvPr id="21" name="Text 7"/>
+          <p:cNvSpPr/>
+          <p:nvPr/>
+        </p:nvSpPr>
+        <p:spPr>
+          <a:xfrm>
+            <a:off x="7743141" y="333375"/>
+            <a:ext cx="57150" cy="57150"/>
+          </a:xfrm>
+          <a:prstGeom prst="roundRect">
+            <a:avLst>
+              <a:gd name="adj" fmla="val 166650000"/>
+            </a:avLst>
+          </a:prstGeom>
+          <a:solidFill>
+            <a:srgbClr val="2ECC71">
+              <a:alpha val="79000"/>
+            </a:srgbClr>
+          </a:solidFill>
+          <a:ln/>
+        </p:spPr>
+        <p:txBody>
+          <a:bodyPr wrap="square" rtlCol="0" anchor="ctr"/>
+          <a:lstStyle/>
+          <a:p>
+            <a:pPr marL="0" indent="0">
+              <a:buNone/>
+            </a:pPr>
+            <a:endParaRPr lang="en-US" dirty="0"/>
+          </a:p>
+        </p:txBody>
+      </p:sp>
+      <p:sp>
+        <p:nvSpPr>
+          <p:cNvPr id="22" name="Rectangle 2"/>
+          <p:cNvSpPr/>
+          <p:nvPr/>
+        </p:nvSpPr>
+        <p:spPr>
+          <a:xfrm>
+            <a:off x="1021010" y="230807"/>
+            <a:ext cx="28000" cy="250000"/>
+          </a:xfrm>
+          <a:prstGeom prst="rect">
+            <a:avLst/>
+          </a:prstGeom>
+          <a:solidFill>
+            <a:schemeClr val="tx1"/>
+          </a:solidFill>
+          <a:ln>
+            <a:noFill/>
+          </a:ln>
+          <a:effectLst/>
+        </p:spPr>
+        <p:style>
+          <a:lnRef idx="1">
+            <a:schemeClr val="accent1"/>
+          </a:lnRef>
+          <a:fillRef idx="3">
+            <a:schemeClr val="accent1"/>
+          </a:fillRef>
+          <a:effectRef idx="2">
+            <a:schemeClr val="accent1"/>
+          </a:effectRef>
+          <a:fontRef idx="minor">
+            <a:schemeClr val="lt1"/>
+          </a:fontRef>
+        </p:style>
+        <p:txBody>
+          <a:bodyPr rtlCol="0" anchor="ctr"/>
+          <a:lstStyle/>
+          <a:p>
+            <a:pPr algn="ctr"/>
+            <a:endParaRPr/>
+          </a:p>
+        </p:txBody>
+      </p:sp>
+      <p:sp>
+        <p:nvSpPr>
+          <p:cNvPr id="23" name="Text 11"/>
+          <p:cNvSpPr/>
+          <p:nvPr/>
+        </p:nvSpPr>
+        <p:spPr>
+          <a:xfrm>
+            <a:off x="233763" y="681122"/>
+            <a:ext cx="2831269" cy="1721858"/>
+          </a:xfrm>
+          <a:prstGeom prst="roundRect">
+            <a:avLst>
+              <a:gd name="adj" fmla="val 3364"/>
+            </a:avLst>
+          </a:prstGeom>
+          <a:solidFill>
+            <a:srgbClr val="FFFFFF"/>
+          </a:solidFill>
           <a:ln w="7144">
             <a:solidFill>
               <a:srgbClr val="D9D2C2"/>
@@ -8798,16 +8906,49 @@
             <a:prstDash val="solid"/>
           </a:ln>
         </p:spPr>
-      </p:sp>
-      <p:sp>
-        <p:nvSpPr>
-          <p:cNvPr id="4" name="Text 34"/>
+        <p:txBody>
+          <a:bodyPr wrap="square" rtlCol="0" anchor="ctr"/>
+          <a:lstStyle/>
+          <a:p>
+            <a:pPr marL="0" indent="0">
+              <a:buNone/>
+            </a:pPr>
+            <a:endParaRPr lang="en-US" dirty="0"/>
+          </a:p>
+        </p:txBody>
+      </p:sp>
+      <p:sp>
+        <p:nvSpPr>
+          <p:cNvPr id="24" name="Shape 12"/>
           <p:cNvSpPr/>
           <p:nvPr/>
         </p:nvSpPr>
         <p:spPr>
           <a:xfrm>
-            <a:off x="472451" y="1058760"/>
+            <a:off x="385762" y="1047243"/>
+            <a:ext cx="2652675" cy="0"/>
+          </a:xfrm>
+          <a:prstGeom prst="line">
+            <a:avLst/>
+          </a:prstGeom>
+          <a:noFill/>
+          <a:ln w="7144">
+            <a:solidFill>
+              <a:srgbClr val="D9D2C2"/>
+            </a:solidFill>
+            <a:prstDash val="solid"/>
+          </a:ln>
+        </p:spPr>
+      </p:sp>
+      <p:sp>
+        <p:nvSpPr>
+          <p:cNvPr id="25" name="Text 13"/>
+          <p:cNvSpPr/>
+          <p:nvPr/>
+        </p:nvSpPr>
+        <p:spPr>
+          <a:xfrm>
+            <a:off x="385762" y="859719"/>
             <a:ext cx="21431" cy="114300"/>
           </a:xfrm>
           <a:prstGeom prst="roundRect">
@@ -8833,13 +8974,13 @@
       </p:sp>
       <p:sp>
         <p:nvSpPr>
-          <p:cNvPr id="5" name="Text 35"/>
+          <p:cNvPr id="26" name="Text 14"/>
           <p:cNvSpPr/>
           <p:nvPr/>
         </p:nvSpPr>
         <p:spPr>
           <a:xfrm>
-            <a:off x="551030" y="1072089"/>
+            <a:off x="464341" y="852576"/>
             <a:ext cx="128588" cy="128588"/>
           </a:xfrm>
           <a:prstGeom prst="rect">
@@ -8864,7 +9005,7 @@
                 <a:ea typeface="Segoe UI Symbol" pitchFamily="34" charset="-122"/>
                 <a:cs typeface="Segoe UI Symbol" pitchFamily="34" charset="-120"/>
               </a:rPr>
-              <a:t>🛒</a:t>
+              <a:t>🏪</a:t>
             </a:r>
             <a:endParaRPr lang="en-US" sz="1266" dirty="0"/>
           </a:p>
@@ -8872,13 +9013,13 @@
       </p:sp>
       <p:sp>
         <p:nvSpPr>
-          <p:cNvPr id="6" name="Text 36"/>
+          <p:cNvPr id="27" name="Text 15"/>
           <p:cNvSpPr/>
           <p:nvPr/>
         </p:nvSpPr>
         <p:spPr>
           <a:xfrm>
-            <a:off x="736767" y="1066732"/>
+            <a:off x="650081" y="847219"/>
             <a:ext cx="2388357" cy="139303"/>
           </a:xfrm>
           <a:prstGeom prst="rect">
@@ -8898,58 +9039,26 @@
               <a:buNone/>
             </a:pPr>
             <a:r>
-              <a:rPr lang="en-US" sz="1000" b="1" kern="0" spc="84" dirty="0">
+              <a:rPr lang="en-US" sz="800" b="1" kern="0" spc="84" dirty="0">
                 <a:latin typeface="Carlito" pitchFamily="34" charset="0"/>
                 <a:ea typeface="Carlito" pitchFamily="34" charset="-122"/>
                 <a:cs typeface="Carlito" pitchFamily="34" charset="-120"/>
               </a:rPr>
-              <a:t>СЕТЕВОЙ </a:t>
-            </a:r>
-            <a:r>
-              <a:rPr lang="en-US" sz="1000" b="1" kern="0" spc="84" dirty="0" smtClean="0">
-                <a:latin typeface="Carlito" pitchFamily="34" charset="0"/>
-                <a:ea typeface="Carlito" pitchFamily="34" charset="-122"/>
-                <a:cs typeface="Carlito" pitchFamily="34" charset="-120"/>
-              </a:rPr>
-              <a:t>КАНАЛ</a:t>
-            </a:r>
-            <a:r>
-              <a:rPr lang="ru-RU" sz="1000" b="1" kern="0" spc="84" dirty="0" smtClean="0">
-                <a:latin typeface="Carlito" pitchFamily="34" charset="0"/>
-                <a:ea typeface="Carlito" pitchFamily="34" charset="-122"/>
-                <a:cs typeface="Carlito" pitchFamily="34" charset="-120"/>
-              </a:rPr>
-              <a:t> – </a:t>
-            </a:r>
-            <a:r>
-              <a:rPr lang="ru-RU" sz="1000" b="1" kern="0" spc="84" dirty="0" err="1" smtClean="0">
-                <a:latin typeface="Carlito" pitchFamily="34" charset="0"/>
-                <a:ea typeface="Carlito" pitchFamily="34" charset="-122"/>
-                <a:cs typeface="Carlito" pitchFamily="34" charset="-120"/>
-              </a:rPr>
-              <a:t>Лемана</a:t>
-            </a:r>
-            <a:r>
-              <a:rPr lang="ru-RU" sz="1000" b="1" kern="0" spc="84" dirty="0" smtClean="0">
-                <a:latin typeface="Carlito" pitchFamily="34" charset="0"/>
-                <a:ea typeface="Carlito" pitchFamily="34" charset="-122"/>
-                <a:cs typeface="Carlito" pitchFamily="34" charset="-120"/>
-              </a:rPr>
-              <a:t> Про</a:t>
-            </a:r>
-            <a:endParaRPr lang="en-US" sz="1000" dirty="0"/>
-          </a:p>
-        </p:txBody>
-      </p:sp>
-      <p:sp>
-        <p:nvSpPr>
-          <p:cNvPr id="7" name="Text 37"/>
+              <a:t>ДИСТРИБЬЮТОРСКИЙ КАНАЛ</a:t>
+            </a:r>
+            <a:endParaRPr lang="en-US" sz="800" dirty="0"/>
+          </a:p>
+        </p:txBody>
+      </p:sp>
+      <p:sp>
+        <p:nvSpPr>
+          <p:cNvPr id="28" name="Text 20"/>
           <p:cNvSpPr/>
           <p:nvPr/>
         </p:nvSpPr>
         <p:spPr>
           <a:xfrm>
-            <a:off x="472449" y="1738836"/>
+            <a:off x="385760" y="1161888"/>
             <a:ext cx="91440" cy="91440"/>
           </a:xfrm>
           <a:prstGeom prst="rect">
@@ -8971,7 +9080,7 @@
                 <a:ea typeface="Segoe UI Symbol" pitchFamily="34" charset="-122"/>
                 <a:cs typeface="Segoe UI Symbol" pitchFamily="34" charset="-120"/>
               </a:rPr>
-              <a:t>🏪</a:t>
+              <a:t>⚑</a:t>
             </a:r>
             <a:endParaRPr lang="en-US" sz="844" dirty="0"/>
           </a:p>
@@ -8979,14 +9088,14 @@
       </p:sp>
       <p:sp>
         <p:nvSpPr>
-          <p:cNvPr id="8" name="Text 38"/>
+          <p:cNvPr id="29" name="Text 21"/>
           <p:cNvSpPr/>
           <p:nvPr/>
         </p:nvSpPr>
         <p:spPr>
           <a:xfrm>
-            <a:off x="601036" y="1724548"/>
-            <a:ext cx="2524088" cy="158046"/>
+            <a:off x="514347" y="1147601"/>
+            <a:ext cx="2524088" cy="296141"/>
           </a:xfrm>
           <a:prstGeom prst="rect">
             <a:avLst/>
@@ -8995,7 +9104,7 @@
           <a:ln/>
         </p:spPr>
         <p:txBody>
-          <a:bodyPr wrap="none" lIns="0" tIns="0" rIns="0" bIns="0" rtlCol="0" anchor="t"/>
+          <a:bodyPr wrap="square" lIns="0" tIns="0" rIns="0" bIns="0" rtlCol="0" anchor="t"/>
           <a:lstStyle/>
           <a:p>
             <a:pPr marL="0" indent="0" algn="l">
@@ -9010,23 +9119,7 @@
                 <a:ea typeface="Carlito" pitchFamily="34" charset="-122"/>
                 <a:cs typeface="Carlito" pitchFamily="34" charset="-120"/>
               </a:rPr>
-              <a:t>Лемана Про: </a:t>
-            </a:r>
-            <a:r>
-              <a:rPr lang="en-US" sz="800" b="1" dirty="0">
-                <a:latin typeface="Courier New" pitchFamily="34" charset="0"/>
-                <a:ea typeface="Courier New" pitchFamily="34" charset="-122"/>
-                <a:cs typeface="Courier New" pitchFamily="34" charset="-120"/>
-              </a:rPr>
-              <a:t>11 ТТ</a:t>
-            </a:r>
-            <a:r>
-              <a:rPr lang="en-US" sz="800" dirty="0">
-                <a:latin typeface="Carlito" pitchFamily="34" charset="0"/>
-                <a:ea typeface="Carlito" pitchFamily="34" charset="-122"/>
-                <a:cs typeface="Carlito" pitchFamily="34" charset="-120"/>
-              </a:rPr>
-              <a:t> в ЮФО</a:t>
+              <a:t>Пилоты: Палитра (Краснодар), И.П. Рыгалов (Пенза), Брозекс (Екатеринбург)</a:t>
             </a:r>
             <a:endParaRPr lang="en-US" sz="800" dirty="0"/>
           </a:p>
@@ -9034,13 +9127,13 @@
       </p:sp>
       <p:sp>
         <p:nvSpPr>
-          <p:cNvPr id="9" name="Text 39"/>
+          <p:cNvPr id="30" name="Text 22"/>
           <p:cNvSpPr/>
           <p:nvPr/>
         </p:nvSpPr>
         <p:spPr>
           <a:xfrm>
-            <a:off x="472449" y="1909170"/>
+            <a:off x="366710" y="1418418"/>
             <a:ext cx="91440" cy="91440"/>
           </a:xfrm>
           <a:prstGeom prst="rect">
@@ -9057,27 +9150,27 @@
               <a:buNone/>
             </a:pPr>
             <a:r>
-              <a:rPr lang="en-US" sz="844" dirty="0">
+              <a:rPr lang="en-US" sz="1400" dirty="0">
                 <a:latin typeface="Segoe UI Symbol" pitchFamily="34" charset="0"/>
                 <a:ea typeface="Segoe UI Symbol" pitchFamily="34" charset="-122"/>
                 <a:cs typeface="Segoe UI Symbol" pitchFamily="34" charset="-120"/>
               </a:rPr>
-              <a:t>▭</a:t>
-            </a:r>
-            <a:endParaRPr lang="en-US" sz="844" dirty="0"/>
-          </a:p>
-        </p:txBody>
-      </p:sp>
-      <p:sp>
-        <p:nvSpPr>
-          <p:cNvPr id="10" name="Text 40"/>
+              <a:t>▿</a:t>
+            </a:r>
+            <a:endParaRPr lang="en-US" sz="1400" dirty="0"/>
+          </a:p>
+        </p:txBody>
+      </p:sp>
+      <p:sp>
+        <p:nvSpPr>
+          <p:cNvPr id="31" name="Text 23"/>
           <p:cNvSpPr/>
           <p:nvPr/>
         </p:nvSpPr>
         <p:spPr>
           <a:xfrm>
-            <a:off x="601036" y="1902027"/>
-            <a:ext cx="1001174" cy="119703"/>
+            <a:off x="514347" y="1416830"/>
+            <a:ext cx="2524088" cy="158046"/>
           </a:xfrm>
           <a:prstGeom prst="rect">
             <a:avLst/>
@@ -9086,7 +9179,7 @@
           <a:ln/>
         </p:spPr>
         <p:txBody>
-          <a:bodyPr wrap="none" lIns="0" tIns="0" rIns="0" bIns="0" rtlCol="0" anchor="t"/>
+          <a:bodyPr wrap="square" lIns="0" tIns="0" rIns="0" bIns="0" rtlCol="0" anchor="t"/>
           <a:lstStyle/>
           <a:p>
             <a:pPr marL="0" indent="0" algn="l">
@@ -9096,27 +9189,67 @@
               <a:buNone/>
             </a:pPr>
             <a:r>
-              <a:rPr lang="en-US" sz="619" dirty="0">
+              <a:rPr lang="en-US" sz="800" dirty="0">
                 <a:latin typeface="Carlito" pitchFamily="34" charset="0"/>
                 <a:ea typeface="Carlito" pitchFamily="34" charset="-122"/>
                 <a:cs typeface="Carlito" pitchFamily="34" charset="-120"/>
               </a:rPr>
-              <a:t>РК на экранах Ростова:</a:t>
-            </a:r>
-            <a:endParaRPr lang="en-US" sz="619" dirty="0"/>
-          </a:p>
-        </p:txBody>
-      </p:sp>
-      <p:sp>
-        <p:nvSpPr>
-          <p:cNvPr id="11" name="Text 41"/>
+              <a:t>Обучение: </a:t>
+            </a:r>
+            <a:r>
+              <a:rPr lang="en-US" sz="800" b="1" dirty="0">
+                <a:latin typeface="Courier New" pitchFamily="34" charset="0"/>
+                <a:ea typeface="Courier New" pitchFamily="34" charset="-122"/>
+                <a:cs typeface="Courier New" pitchFamily="34" charset="-120"/>
+              </a:rPr>
+              <a:t>12 регионов</a:t>
+            </a:r>
+            <a:r>
+              <a:rPr lang="en-US" sz="800" dirty="0">
+                <a:latin typeface="Carlito" pitchFamily="34" charset="0"/>
+                <a:ea typeface="Carlito" pitchFamily="34" charset="-122"/>
+                <a:cs typeface="Carlito" pitchFamily="34" charset="-120"/>
+              </a:rPr>
+              <a:t>, </a:t>
+            </a:r>
+            <a:r>
+              <a:rPr lang="en-US" sz="800" b="1" dirty="0">
+                <a:latin typeface="Courier New" pitchFamily="34" charset="0"/>
+                <a:ea typeface="Courier New" pitchFamily="34" charset="-122"/>
+                <a:cs typeface="Courier New" pitchFamily="34" charset="-120"/>
+              </a:rPr>
+              <a:t>19 РМ</a:t>
+            </a:r>
+            <a:r>
+              <a:rPr lang="en-US" sz="800" dirty="0">
+                <a:latin typeface="Carlito" pitchFamily="34" charset="0"/>
+                <a:ea typeface="Carlito" pitchFamily="34" charset="-122"/>
+                <a:cs typeface="Carlito" pitchFamily="34" charset="-120"/>
+              </a:rPr>
+              <a:t>, </a:t>
+            </a:r>
+            <a:r>
+              <a:rPr lang="en-US" sz="800" b="1" dirty="0">
+                <a:latin typeface="Courier New" pitchFamily="34" charset="0"/>
+                <a:ea typeface="Courier New" pitchFamily="34" charset="-122"/>
+                <a:cs typeface="Courier New" pitchFamily="34" charset="-120"/>
+              </a:rPr>
+              <a:t>~350 ТП</a:t>
+            </a:r>
+            <a:endParaRPr lang="en-US" sz="800" dirty="0"/>
+          </a:p>
+        </p:txBody>
+      </p:sp>
+      <p:sp>
+        <p:nvSpPr>
+          <p:cNvPr id="32" name="Text 24"/>
           <p:cNvSpPr/>
           <p:nvPr/>
         </p:nvSpPr>
         <p:spPr>
           <a:xfrm>
-            <a:off x="1533072" y="1902027"/>
-            <a:ext cx="545068" cy="129679"/>
+            <a:off x="385760" y="1601452"/>
+            <a:ext cx="91440" cy="91440"/>
           </a:xfrm>
           <a:prstGeom prst="rect">
             <a:avLst/>
@@ -9125,7 +9258,43 @@
           <a:ln/>
         </p:spPr>
         <p:txBody>
-          <a:bodyPr wrap="none" lIns="0" tIns="0" rIns="0" bIns="0" rtlCol="0" anchor="t"/>
+          <a:bodyPr wrap="none" lIns="0" tIns="0" rIns="0" bIns="0" rtlCol="0" anchor="ctr"/>
+          <a:lstStyle/>
+          <a:p>
+            <a:pPr marL="0" indent="0" algn="ctr">
+              <a:buNone/>
+            </a:pPr>
+            <a:r>
+              <a:rPr lang="en-US" sz="844" dirty="0">
+                <a:latin typeface="Segoe UI Symbol" pitchFamily="34" charset="0"/>
+                <a:ea typeface="Segoe UI Symbol" pitchFamily="34" charset="-122"/>
+                <a:cs typeface="Segoe UI Symbol" pitchFamily="34" charset="-120"/>
+              </a:rPr>
+              <a:t>◖</a:t>
+            </a:r>
+            <a:endParaRPr lang="en-US" sz="844" dirty="0"/>
+          </a:p>
+        </p:txBody>
+      </p:sp>
+      <p:sp>
+        <p:nvSpPr>
+          <p:cNvPr id="33" name="Text 25"/>
+          <p:cNvSpPr/>
+          <p:nvPr/>
+        </p:nvSpPr>
+        <p:spPr>
+          <a:xfrm>
+            <a:off x="514347" y="1587164"/>
+            <a:ext cx="2524088" cy="316091"/>
+          </a:xfrm>
+          <a:prstGeom prst="rect">
+            <a:avLst/>
+          </a:prstGeom>
+          <a:noFill/>
+          <a:ln/>
+        </p:spPr>
+        <p:txBody>
+          <a:bodyPr wrap="square" lIns="0" tIns="0" rIns="0" bIns="0" rtlCol="0" anchor="t"/>
           <a:lstStyle/>
           <a:p>
             <a:pPr marL="0" indent="0" algn="l">
@@ -9135,12 +9304,92 @@
               <a:buNone/>
             </a:pPr>
             <a:r>
+              <a:rPr lang="en-US" sz="800" dirty="0">
+                <a:latin typeface="Carlito" pitchFamily="34" charset="0"/>
+                <a:ea typeface="Carlito" pitchFamily="34" charset="-122"/>
+                <a:cs typeface="Carlito" pitchFamily="34" charset="-120"/>
+              </a:rPr>
+              <a:t>POSM: </a:t>
+            </a:r>
+            <a:r>
+              <a:rPr lang="en-US" sz="800" dirty="0" err="1">
+                <a:latin typeface="Carlito" pitchFamily="34" charset="0"/>
+                <a:ea typeface="Carlito" pitchFamily="34" charset="-122"/>
+                <a:cs typeface="Carlito" pitchFamily="34" charset="-120"/>
+              </a:rPr>
+              <a:t>шелфтокеры</a:t>
+            </a:r>
+            <a:r>
+              <a:rPr lang="en-US" sz="800" dirty="0">
+                <a:latin typeface="Carlito" pitchFamily="34" charset="0"/>
+                <a:ea typeface="Carlito" pitchFamily="34" charset="-122"/>
+                <a:cs typeface="Carlito" pitchFamily="34" charset="-120"/>
+              </a:rPr>
+              <a:t> </a:t>
+            </a:r>
+            <a:r>
+              <a:rPr lang="en-US" sz="800" b="1" dirty="0" smtClean="0">
+                <a:latin typeface="Liberation Sans Narrow" pitchFamily="34" charset="0"/>
+                <a:ea typeface="Liberation Sans Narrow" pitchFamily="34" charset="-122"/>
+                <a:cs typeface="Liberation Sans Narrow" pitchFamily="34" charset="-120"/>
+              </a:rPr>
+              <a:t>1000 </a:t>
+            </a:r>
+            <a:r>
               <a:rPr lang="en-US" sz="800" b="1" dirty="0">
-                <a:latin typeface="Courier New" pitchFamily="34" charset="0"/>
-                <a:ea typeface="Courier New" pitchFamily="34" charset="-122"/>
-                <a:cs typeface="Courier New" pitchFamily="34" charset="-120"/>
-              </a:rPr>
-              <a:t>6 экранов</a:t>
+                <a:latin typeface="Liberation Sans Narrow" pitchFamily="34" charset="0"/>
+                <a:ea typeface="Liberation Sans Narrow" pitchFamily="34" charset="-122"/>
+                <a:cs typeface="Liberation Sans Narrow" pitchFamily="34" charset="-120"/>
+              </a:rPr>
+              <a:t>шт</a:t>
+            </a:r>
+            <a:r>
+              <a:rPr lang="en-US" sz="800" dirty="0">
+                <a:latin typeface="Carlito" pitchFamily="34" charset="0"/>
+                <a:ea typeface="Carlito" pitchFamily="34" charset="-122"/>
+                <a:cs typeface="Carlito" pitchFamily="34" charset="-120"/>
+              </a:rPr>
+              <a:t>, воблеры </a:t>
+            </a:r>
+            <a:r>
+              <a:rPr lang="en-US" sz="800" b="1" dirty="0">
+                <a:latin typeface="Liberation Sans Narrow" pitchFamily="34" charset="0"/>
+                <a:ea typeface="Liberation Sans Narrow" pitchFamily="34" charset="-122"/>
+                <a:cs typeface="Liberation Sans Narrow" pitchFamily="34" charset="-120"/>
+              </a:rPr>
+              <a:t>1000</a:t>
+            </a:r>
+            <a:r>
+              <a:rPr lang="en-US" sz="800" dirty="0">
+                <a:latin typeface="Carlito" pitchFamily="34" charset="0"/>
+                <a:ea typeface="Carlito" pitchFamily="34" charset="-122"/>
+                <a:cs typeface="Carlito" pitchFamily="34" charset="-120"/>
+              </a:rPr>
+              <a:t>, ценники </a:t>
+            </a:r>
+            <a:r>
+              <a:rPr lang="en-US" sz="800" b="1" dirty="0">
+                <a:latin typeface="Liberation Sans Narrow" pitchFamily="34" charset="0"/>
+                <a:ea typeface="Liberation Sans Narrow" pitchFamily="34" charset="-122"/>
+                <a:cs typeface="Liberation Sans Narrow" pitchFamily="34" charset="-120"/>
+              </a:rPr>
+              <a:t>1000</a:t>
+            </a:r>
+            <a:r>
+              <a:rPr lang="en-US" sz="800" dirty="0">
+                <a:latin typeface="Carlito" pitchFamily="34" charset="0"/>
+                <a:ea typeface="Carlito" pitchFamily="34" charset="-122"/>
+                <a:cs typeface="Carlito" pitchFamily="34" charset="-120"/>
+              </a:rPr>
+              <a:t>, листовки </a:t>
+            </a:r>
+            <a:r>
+              <a:rPr lang="en-US" sz="800" b="1" dirty="0">
+                <a:latin typeface="Liberation Sans Narrow" pitchFamily="34" charset="0"/>
+                <a:ea typeface="Liberation Sans Narrow" pitchFamily="34" charset="-122"/>
+                <a:cs typeface="Liberation Sans Narrow" pitchFamily="34" charset="-120"/>
+              </a:rPr>
+              <a:t>500</a:t>
             </a:r>
             <a:endParaRPr lang="en-US" sz="800" dirty="0"/>
           </a:p>
@@ -9148,13 +9397,13 @@
       </p:sp>
       <p:sp>
         <p:nvSpPr>
-          <p:cNvPr id="12" name="Text 42"/>
+          <p:cNvPr id="34" name="Text 26"/>
           <p:cNvSpPr/>
           <p:nvPr/>
         </p:nvSpPr>
         <p:spPr>
           <a:xfrm>
-            <a:off x="472449" y="2079503"/>
+            <a:off x="385760" y="1884969"/>
             <a:ext cx="91440" cy="91440"/>
           </a:xfrm>
           <a:prstGeom prst="rect">
@@ -9176,7 +9425,7 @@
                 <a:ea typeface="Segoe UI Symbol" pitchFamily="34" charset="-122"/>
                 <a:cs typeface="Segoe UI Symbol" pitchFamily="34" charset="-120"/>
               </a:rPr>
-              <a:t>☞</a:t>
+              <a:t>▶</a:t>
             </a:r>
             <a:endParaRPr lang="en-US" sz="844" dirty="0"/>
           </a:p>
@@ -9184,14 +9433,14 @@
       </p:sp>
       <p:sp>
         <p:nvSpPr>
-          <p:cNvPr id="13" name="Text 43"/>
+          <p:cNvPr id="35" name="Text 27"/>
           <p:cNvSpPr/>
           <p:nvPr/>
         </p:nvSpPr>
         <p:spPr>
           <a:xfrm>
-            <a:off x="601036" y="2065216"/>
-            <a:ext cx="2524088" cy="158046"/>
+            <a:off x="514347" y="1870683"/>
+            <a:ext cx="2524088" cy="316091"/>
           </a:xfrm>
           <a:prstGeom prst="rect">
             <a:avLst/>
@@ -9200,7 +9449,7 @@
           <a:ln/>
         </p:spPr>
         <p:txBody>
-          <a:bodyPr wrap="none" lIns="0" tIns="0" rIns="0" bIns="0" rtlCol="0" anchor="t"/>
+          <a:bodyPr wrap="square" lIns="0" tIns="0" rIns="0" bIns="0" rtlCol="0" anchor="t"/>
           <a:lstStyle/>
           <a:p>
             <a:pPr marL="0" indent="0" algn="l">
@@ -9215,15 +9464,87 @@
                 <a:ea typeface="Carlito" pitchFamily="34" charset="-122"/>
                 <a:cs typeface="Carlito" pitchFamily="34" charset="-120"/>
               </a:rPr>
-              <a:t>Таргет ВКонтакте по </a:t>
-            </a:r>
-            <a:r>
-              <a:rPr lang="en-US" sz="800" b="1" dirty="0">
-                <a:latin typeface="Courier New" pitchFamily="34" charset="0"/>
-                <a:ea typeface="Courier New" pitchFamily="34" charset="-122"/>
-                <a:cs typeface="Courier New" pitchFamily="34" charset="-120"/>
-              </a:rPr>
-              <a:t>11 ТТ</a:t>
+              <a:t>Контент: </a:t>
+            </a:r>
+            <a:r>
+              <a:rPr lang="en-US" sz="800" dirty="0" err="1" smtClean="0">
+                <a:latin typeface="Carlito" pitchFamily="34" charset="0"/>
+                <a:ea typeface="Carlito" pitchFamily="34" charset="-122"/>
+                <a:cs typeface="Carlito" pitchFamily="34" charset="-120"/>
+              </a:rPr>
+              <a:t>видеоинструкция</a:t>
+            </a:r>
+            <a:r>
+              <a:rPr lang="en-US" sz="800" dirty="0" smtClean="0">
+                <a:latin typeface="Carlito" pitchFamily="34" charset="0"/>
+                <a:ea typeface="Carlito" pitchFamily="34" charset="-122"/>
+                <a:cs typeface="Carlito" pitchFamily="34" charset="-120"/>
+              </a:rPr>
+              <a:t>, </a:t>
+            </a:r>
+            <a:r>
+              <a:rPr lang="en-US" sz="800" dirty="0" err="1" smtClean="0">
+                <a:latin typeface="Carlito" pitchFamily="34" charset="0"/>
+                <a:ea typeface="Carlito" pitchFamily="34" charset="-122"/>
+                <a:cs typeface="Carlito" pitchFamily="34" charset="-120"/>
+              </a:rPr>
+              <a:t>портфолио</a:t>
+            </a:r>
+            <a:r>
+              <a:rPr lang="en-US" sz="800" dirty="0">
+                <a:latin typeface="Carlito" pitchFamily="34" charset="0"/>
+                <a:ea typeface="Carlito" pitchFamily="34" charset="-122"/>
+                <a:cs typeface="Carlito" pitchFamily="34" charset="-120"/>
+              </a:rPr>
+              <a:t>,</a:t>
+            </a:r>
+            <a:r>
+              <a:rPr lang="en-US" sz="800" dirty="0" smtClean="0">
+                <a:latin typeface="Carlito" pitchFamily="34" charset="0"/>
+                <a:ea typeface="Carlito" pitchFamily="34" charset="-122"/>
+                <a:cs typeface="Carlito" pitchFamily="34" charset="-120"/>
+              </a:rPr>
+              <a:t> </a:t>
+            </a:r>
+            <a:r>
+              <a:rPr lang="en-US" sz="800" dirty="0" err="1" smtClean="0">
+                <a:latin typeface="Carlito" pitchFamily="34" charset="0"/>
+                <a:ea typeface="Carlito" pitchFamily="34" charset="-122"/>
+                <a:cs typeface="Carlito" pitchFamily="34" charset="-120"/>
+              </a:rPr>
+              <a:t>видео</a:t>
+            </a:r>
+            <a:r>
+              <a:rPr lang="en-US" sz="800" dirty="0" smtClean="0">
+                <a:latin typeface="Carlito" pitchFamily="34" charset="0"/>
+                <a:ea typeface="Carlito" pitchFamily="34" charset="-122"/>
+                <a:cs typeface="Carlito" pitchFamily="34" charset="-120"/>
+              </a:rPr>
+              <a:t> </a:t>
+            </a:r>
+            <a:r>
+              <a:rPr lang="en-US" sz="800" dirty="0" err="1">
+                <a:latin typeface="Carlito" pitchFamily="34" charset="0"/>
+                <a:ea typeface="Carlito" pitchFamily="34" charset="-122"/>
+                <a:cs typeface="Carlito" pitchFamily="34" charset="-120"/>
+              </a:rPr>
+              <a:t>для</a:t>
+            </a:r>
+            <a:r>
+              <a:rPr lang="en-US" sz="800" dirty="0">
+                <a:latin typeface="Carlito" pitchFamily="34" charset="0"/>
+                <a:ea typeface="Carlito" pitchFamily="34" charset="-122"/>
+                <a:cs typeface="Carlito" pitchFamily="34" charset="-120"/>
+              </a:rPr>
+              <a:t> </a:t>
+            </a:r>
+            <a:r>
+              <a:rPr lang="en-US" sz="800" dirty="0" smtClean="0">
+                <a:latin typeface="Carlito" pitchFamily="34" charset="0"/>
+                <a:ea typeface="Carlito" pitchFamily="34" charset="-122"/>
+                <a:cs typeface="Carlito" pitchFamily="34" charset="-120"/>
+              </a:rPr>
+              <a:t>ТП</a:t>
             </a:r>
             <a:endParaRPr lang="en-US" sz="800" dirty="0"/>
           </a:p>
@@ -9231,13 +9552,206 @@
       </p:sp>
       <p:sp>
         <p:nvSpPr>
-          <p:cNvPr id="14" name="Text 44"/>
+          <p:cNvPr id="36" name="Shape 28"/>
           <p:cNvSpPr/>
           <p:nvPr/>
         </p:nvSpPr>
         <p:spPr>
           <a:xfrm>
-            <a:off x="472449" y="2249837"/>
+            <a:off x="385762" y="2157771"/>
+            <a:ext cx="2652675" cy="0"/>
+          </a:xfrm>
+          <a:prstGeom prst="line">
+            <a:avLst/>
+          </a:prstGeom>
+          <a:noFill/>
+          <a:ln w="7144">
+            <a:solidFill>
+              <a:srgbClr val="D9D2C2"/>
+            </a:solidFill>
+            <a:prstDash val="dash"/>
+          </a:ln>
+        </p:spPr>
+      </p:sp>
+      <p:sp>
+        <p:nvSpPr>
+          <p:cNvPr id="60" name="Text 68"/>
+          <p:cNvSpPr/>
+          <p:nvPr/>
+        </p:nvSpPr>
+        <p:spPr>
+          <a:xfrm>
+            <a:off x="296465" y="2693476"/>
+            <a:ext cx="2831381" cy="1721857"/>
+          </a:xfrm>
+          <a:prstGeom prst="roundRect">
+            <a:avLst>
+              <a:gd name="adj" fmla="val 3364"/>
+            </a:avLst>
+          </a:prstGeom>
+          <a:solidFill>
+            <a:srgbClr val="FFFFFF"/>
+          </a:solidFill>
+          <a:ln w="7144">
+            <a:solidFill>
+              <a:srgbClr val="D9D2C2"/>
+            </a:solidFill>
+            <a:prstDash val="solid"/>
+          </a:ln>
+        </p:spPr>
+        <p:txBody>
+          <a:bodyPr wrap="square" rtlCol="0" anchor="ctr"/>
+          <a:lstStyle/>
+          <a:p>
+            <a:pPr marL="0" indent="0">
+              <a:buNone/>
+            </a:pPr>
+            <a:endParaRPr lang="en-US" dirty="0"/>
+          </a:p>
+        </p:txBody>
+      </p:sp>
+      <p:sp>
+        <p:nvSpPr>
+          <p:cNvPr id="61" name="Shape 69"/>
+          <p:cNvSpPr/>
+          <p:nvPr/>
+        </p:nvSpPr>
+        <p:spPr>
+          <a:xfrm>
+            <a:off x="385762" y="2982798"/>
+            <a:ext cx="2652787" cy="0"/>
+          </a:xfrm>
+          <a:prstGeom prst="line">
+            <a:avLst/>
+          </a:prstGeom>
+          <a:noFill/>
+          <a:ln w="7144">
+            <a:solidFill>
+              <a:srgbClr val="D9D2C2"/>
+            </a:solidFill>
+            <a:prstDash val="solid"/>
+          </a:ln>
+        </p:spPr>
+      </p:sp>
+      <p:sp>
+        <p:nvSpPr>
+          <p:cNvPr id="62" name="Text 70"/>
+          <p:cNvSpPr/>
+          <p:nvPr/>
+        </p:nvSpPr>
+        <p:spPr>
+          <a:xfrm>
+            <a:off x="385762" y="2795274"/>
+            <a:ext cx="21431" cy="114300"/>
+          </a:xfrm>
+          <a:prstGeom prst="roundRect">
+            <a:avLst>
+              <a:gd name="adj" fmla="val 88890"/>
+            </a:avLst>
+          </a:prstGeom>
+          <a:solidFill>
+            <a:srgbClr val="B5614A"/>
+          </a:solidFill>
+          <a:ln/>
+        </p:spPr>
+        <p:txBody>
+          <a:bodyPr wrap="square" rtlCol="0" anchor="ctr"/>
+          <a:lstStyle/>
+          <a:p>
+            <a:pPr marL="0" indent="0">
+              <a:buNone/>
+            </a:pPr>
+            <a:endParaRPr lang="en-US" dirty="0"/>
+          </a:p>
+        </p:txBody>
+      </p:sp>
+      <p:sp>
+        <p:nvSpPr>
+          <p:cNvPr id="63" name="Text 71"/>
+          <p:cNvSpPr/>
+          <p:nvPr/>
+        </p:nvSpPr>
+        <p:spPr>
+          <a:xfrm>
+            <a:off x="464342" y="2788131"/>
+            <a:ext cx="128588" cy="128588"/>
+          </a:xfrm>
+          <a:prstGeom prst="rect">
+            <a:avLst/>
+          </a:prstGeom>
+          <a:noFill/>
+          <a:ln/>
+        </p:spPr>
+        <p:txBody>
+          <a:bodyPr wrap="none" lIns="0" tIns="0" rIns="0" bIns="0" rtlCol="0" anchor="ctr"/>
+          <a:lstStyle/>
+          <a:p>
+            <a:pPr marL="0" indent="0" algn="ctr">
+              <a:buNone/>
+            </a:pPr>
+            <a:r>
+              <a:rPr lang="en-US" sz="1266" dirty="0">
+                <a:solidFill>
+                  <a:srgbClr val="B5614A"/>
+                </a:solidFill>
+                <a:latin typeface="Segoe UI Symbol" pitchFamily="34" charset="0"/>
+                <a:ea typeface="Segoe UI Symbol" pitchFamily="34" charset="-122"/>
+                <a:cs typeface="Segoe UI Symbol" pitchFamily="34" charset="-120"/>
+              </a:rPr>
+              <a:t>▥</a:t>
+            </a:r>
+            <a:endParaRPr lang="en-US" sz="1266" dirty="0"/>
+          </a:p>
+        </p:txBody>
+      </p:sp>
+      <p:sp>
+        <p:nvSpPr>
+          <p:cNvPr id="64" name="Text 72"/>
+          <p:cNvSpPr/>
+          <p:nvPr/>
+        </p:nvSpPr>
+        <p:spPr>
+          <a:xfrm>
+            <a:off x="650079" y="2782774"/>
+            <a:ext cx="2388468" cy="139303"/>
+          </a:xfrm>
+          <a:prstGeom prst="rect">
+            <a:avLst/>
+          </a:prstGeom>
+          <a:noFill/>
+          <a:ln/>
+        </p:spPr>
+        <p:txBody>
+          <a:bodyPr wrap="none" lIns="0" tIns="0" rIns="0" bIns="0" rtlCol="0" anchor="t"/>
+          <a:lstStyle/>
+          <a:p>
+            <a:pPr marL="0" indent="0" algn="l">
+              <a:lnSpc>
+                <a:spcPts val="1097"/>
+              </a:lnSpc>
+              <a:buNone/>
+            </a:pPr>
+            <a:r>
+              <a:rPr lang="en-US" sz="800" b="1" kern="0" spc="84" dirty="0">
+                <a:latin typeface="Carlito" pitchFamily="34" charset="0"/>
+                <a:ea typeface="Carlito" pitchFamily="34" charset="-122"/>
+                <a:cs typeface="Carlito" pitchFamily="34" charset="-120"/>
+              </a:rPr>
+              <a:t>B2B КАНАЛ</a:t>
+            </a:r>
+            <a:endParaRPr lang="en-US" sz="800" dirty="0"/>
+          </a:p>
+        </p:txBody>
+      </p:sp>
+      <p:sp>
+        <p:nvSpPr>
+          <p:cNvPr id="65" name="Text 73"/>
+          <p:cNvSpPr/>
+          <p:nvPr/>
+        </p:nvSpPr>
+        <p:spPr>
+          <a:xfrm>
+            <a:off x="385760" y="3086382"/>
             <a:ext cx="91440" cy="91440"/>
           </a:xfrm>
           <a:prstGeom prst="rect">
@@ -9259,7 +9773,7 @@
                 <a:ea typeface="Segoe UI Symbol" pitchFamily="34" charset="-122"/>
                 <a:cs typeface="Segoe UI Symbol" pitchFamily="34" charset="-120"/>
               </a:rPr>
-              <a:t>✦</a:t>
+              <a:t>⚗</a:t>
             </a:r>
             <a:endParaRPr lang="en-US" sz="844" dirty="0"/>
           </a:p>
@@ -9267,14 +9781,14 @@
       </p:sp>
       <p:sp>
         <p:nvSpPr>
-          <p:cNvPr id="15" name="Text 45"/>
+          <p:cNvPr id="66" name="Text 74"/>
           <p:cNvSpPr/>
           <p:nvPr/>
         </p:nvSpPr>
         <p:spPr>
           <a:xfrm>
-            <a:off x="601036" y="2235551"/>
-            <a:ext cx="2524088" cy="148070"/>
+            <a:off x="514350" y="3072094"/>
+            <a:ext cx="2524199" cy="158046"/>
           </a:xfrm>
           <a:prstGeom prst="rect">
             <a:avLst/>
@@ -9298,7 +9812,23 @@
                 <a:ea typeface="Carlito" pitchFamily="34" charset="-122"/>
                 <a:cs typeface="Carlito" pitchFamily="34" charset="-120"/>
               </a:rPr>
-              <a:t>Промо «Подарок за покупку» (Ростов + Краснодар)</a:t>
+              <a:t>Тест-образец: пробник </a:t>
+            </a:r>
+            <a:r>
+              <a:rPr lang="en-US" sz="800" b="1" dirty="0">
+                <a:latin typeface="Liberation Sans Narrow" pitchFamily="34" charset="0"/>
+                <a:ea typeface="Liberation Sans Narrow" pitchFamily="34" charset="-122"/>
+                <a:cs typeface="Liberation Sans Narrow" pitchFamily="34" charset="-120"/>
+              </a:rPr>
+              <a:t>0,4 л</a:t>
+            </a:r>
+            <a:r>
+              <a:rPr lang="en-US" sz="800" dirty="0">
+                <a:latin typeface="Carlito" pitchFamily="34" charset="0"/>
+                <a:ea typeface="Carlito" pitchFamily="34" charset="-122"/>
+                <a:cs typeface="Carlito" pitchFamily="34" charset="-120"/>
+              </a:rPr>
+              <a:t> + веерные выкрасы</a:t>
             </a:r>
             <a:endParaRPr lang="en-US" sz="800" dirty="0"/>
           </a:p>
@@ -9306,13 +9836,13 @@
       </p:sp>
       <p:sp>
         <p:nvSpPr>
-          <p:cNvPr id="16" name="Text 46"/>
+          <p:cNvPr id="67" name="Text 75"/>
           <p:cNvSpPr/>
           <p:nvPr/>
         </p:nvSpPr>
         <p:spPr>
           <a:xfrm>
-            <a:off x="472449" y="2413027"/>
+            <a:off x="385760" y="3256716"/>
             <a:ext cx="91440" cy="91440"/>
           </a:xfrm>
           <a:prstGeom prst="rect">
@@ -9334,7 +9864,7 @@
                 <a:ea typeface="Segoe UI Symbol" pitchFamily="34" charset="-122"/>
                 <a:cs typeface="Segoe UI Symbol" pitchFamily="34" charset="-120"/>
               </a:rPr>
-              <a:t>←</a:t>
+              <a:t>▤</a:t>
             </a:r>
             <a:endParaRPr lang="en-US" sz="844" dirty="0"/>
           </a:p>
@@ -9342,14 +9872,14 @@
       </p:sp>
       <p:sp>
         <p:nvSpPr>
-          <p:cNvPr id="17" name="Text 47"/>
+          <p:cNvPr id="68" name="Text 76"/>
           <p:cNvSpPr/>
           <p:nvPr/>
         </p:nvSpPr>
         <p:spPr>
           <a:xfrm>
-            <a:off x="601036" y="2398740"/>
-            <a:ext cx="2524088" cy="158046"/>
+            <a:off x="514350" y="3242429"/>
+            <a:ext cx="2524199" cy="148070"/>
           </a:xfrm>
           <a:prstGeom prst="rect">
             <a:avLst/>
@@ -9373,39 +9903,7 @@
                 <a:ea typeface="Carlito" pitchFamily="34" charset="-122"/>
                 <a:cs typeface="Carlito" pitchFamily="34" charset="-120"/>
               </a:rPr>
-              <a:t>Кэшбек </a:t>
-            </a:r>
-            <a:r>
-              <a:rPr lang="en-US" sz="800" b="1" dirty="0">
-                <a:latin typeface="Liberation Sans Narrow" pitchFamily="34" charset="0"/>
-                <a:ea typeface="Liberation Sans Narrow" pitchFamily="34" charset="-122"/>
-                <a:cs typeface="Liberation Sans Narrow" pitchFamily="34" charset="-120"/>
-              </a:rPr>
-              <a:t>5%</a:t>
-            </a:r>
-            <a:r>
-              <a:rPr lang="en-US" sz="800" dirty="0">
-                <a:latin typeface="Carlito" pitchFamily="34" charset="0"/>
-                <a:ea typeface="Carlito" pitchFamily="34" charset="-122"/>
-                <a:cs typeface="Carlito" pitchFamily="34" charset="-120"/>
-              </a:rPr>
-              <a:t> на TITAN (все </a:t>
-            </a:r>
-            <a:r>
-              <a:rPr lang="en-US" sz="800" b="1" dirty="0">
-                <a:latin typeface="Courier New" pitchFamily="34" charset="0"/>
-                <a:ea typeface="Courier New" pitchFamily="34" charset="-122"/>
-                <a:cs typeface="Courier New" pitchFamily="34" charset="-120"/>
-              </a:rPr>
-              <a:t>11 ТТ</a:t>
-            </a:r>
-            <a:r>
-              <a:rPr lang="en-US" sz="800" dirty="0">
-                <a:latin typeface="Carlito" pitchFamily="34" charset="0"/>
-                <a:ea typeface="Carlito" pitchFamily="34" charset="-122"/>
-                <a:cs typeface="Carlito" pitchFamily="34" charset="-120"/>
-              </a:rPr>
-              <a:t>)</a:t>
+              <a:t>Листовка B2B с расчётом ССВ</a:t>
             </a:r>
             <a:endParaRPr lang="en-US" sz="800" dirty="0"/>
           </a:p>
@@ -9413,13 +9911,13 @@
       </p:sp>
       <p:sp>
         <p:nvSpPr>
-          <p:cNvPr id="18" name="Text 48"/>
+          <p:cNvPr id="69" name="Text 77"/>
           <p:cNvSpPr/>
           <p:nvPr/>
         </p:nvSpPr>
         <p:spPr>
           <a:xfrm>
-            <a:off x="472449" y="2583361"/>
+            <a:off x="385760" y="3419906"/>
             <a:ext cx="91440" cy="91440"/>
           </a:xfrm>
           <a:prstGeom prst="rect">
@@ -9441,7 +9939,7 @@
                 <a:ea typeface="Segoe UI Symbol" pitchFamily="34" charset="-122"/>
                 <a:cs typeface="Segoe UI Symbol" pitchFamily="34" charset="-120"/>
               </a:rPr>
-              <a:t>♟</a:t>
+              <a:t>⚒</a:t>
             </a:r>
             <a:endParaRPr lang="en-US" sz="844" dirty="0"/>
           </a:p>
@@ -9449,14 +9947,14 @@
       </p:sp>
       <p:sp>
         <p:nvSpPr>
-          <p:cNvPr id="19" name="Text 49"/>
+          <p:cNvPr id="70" name="Text 78"/>
           <p:cNvSpPr/>
           <p:nvPr/>
         </p:nvSpPr>
         <p:spPr>
           <a:xfrm>
-            <a:off x="601036" y="2569074"/>
-            <a:ext cx="2524088" cy="158046"/>
+            <a:off x="514350" y="3405619"/>
+            <a:ext cx="2524199" cy="296141"/>
           </a:xfrm>
           <a:prstGeom prst="rect">
             <a:avLst/>
@@ -9480,23 +9978,7 @@
                 <a:ea typeface="Carlito" pitchFamily="34" charset="-122"/>
                 <a:cs typeface="Carlito" pitchFamily="34" charset="-120"/>
               </a:rPr>
-              <a:t>Мастер-классы: </a:t>
-            </a:r>
-            <a:r>
-              <a:rPr lang="en-US" sz="800" b="1" dirty="0">
-                <a:latin typeface="Courier New" pitchFamily="34" charset="0"/>
-                <a:ea typeface="Courier New" pitchFamily="34" charset="-122"/>
-                <a:cs typeface="Courier New" pitchFamily="34" charset="-120"/>
-              </a:rPr>
-              <a:t>3 ТТ</a:t>
-            </a:r>
-            <a:r>
-              <a:rPr lang="en-US" sz="800" dirty="0">
-                <a:latin typeface="Carlito" pitchFamily="34" charset="0"/>
-                <a:ea typeface="Carlito" pitchFamily="34" charset="-122"/>
-                <a:cs typeface="Carlito" pitchFamily="34" charset="-120"/>
-              </a:rPr>
-              <a:t> в Ростове</a:t>
+              <a:t>6 инструментов: тест-образец, листовка, инфлюенсер, маржа, портфолио</a:t>
             </a:r>
             <a:endParaRPr lang="en-US" sz="800" dirty="0"/>
           </a:p>
@@ -9504,13 +9986,13 @@
       </p:sp>
       <p:sp>
         <p:nvSpPr>
-          <p:cNvPr id="20" name="Text 50"/>
+          <p:cNvPr id="71" name="Text 79"/>
           <p:cNvSpPr/>
           <p:nvPr/>
         </p:nvSpPr>
         <p:spPr>
           <a:xfrm>
-            <a:off x="472449" y="2753695"/>
+            <a:off x="385760" y="3689136"/>
             <a:ext cx="91440" cy="91440"/>
           </a:xfrm>
           <a:prstGeom prst="rect">
@@ -9532,7 +10014,7 @@
                 <a:ea typeface="Segoe UI Symbol" pitchFamily="34" charset="-122"/>
                 <a:cs typeface="Segoe UI Symbol" pitchFamily="34" charset="-120"/>
               </a:rPr>
-              <a:t>✦</a:t>
+              <a:t>↗</a:t>
             </a:r>
             <a:endParaRPr lang="en-US" sz="844" dirty="0"/>
           </a:p>
@@ -9540,14 +10022,14 @@
       </p:sp>
       <p:sp>
         <p:nvSpPr>
-          <p:cNvPr id="21" name="Text 51"/>
+          <p:cNvPr id="72" name="Text 80"/>
           <p:cNvSpPr/>
           <p:nvPr/>
         </p:nvSpPr>
         <p:spPr>
           <a:xfrm>
-            <a:off x="601038" y="2746552"/>
-            <a:ext cx="1095617" cy="119703"/>
+            <a:off x="514350" y="3674849"/>
+            <a:ext cx="2524199" cy="148070"/>
           </a:xfrm>
           <a:prstGeom prst="rect">
             <a:avLst/>
@@ -9556,7 +10038,7 @@
           <a:ln/>
         </p:spPr>
         <p:txBody>
-          <a:bodyPr wrap="none" lIns="0" tIns="0" rIns="0" bIns="0" rtlCol="0" anchor="t"/>
+          <a:bodyPr wrap="square" lIns="0" tIns="0" rIns="0" bIns="0" rtlCol="0" anchor="t"/>
           <a:lstStyle/>
           <a:p>
             <a:pPr marL="0" indent="0" algn="l">
@@ -9571,7 +10053,7 @@
                 <a:ea typeface="Carlito" pitchFamily="34" charset="-122"/>
                 <a:cs typeface="Carlito" pitchFamily="34" charset="-120"/>
               </a:rPr>
-              <a:t>Веерные выкрасы B2B:</a:t>
+              <a:t>Расчёт маржинальности по фасовкам (8,5 л выгоднее)</a:t>
             </a:r>
             <a:endParaRPr lang="en-US" sz="800" dirty="0"/>
           </a:p>
@@ -9579,203 +10061,14 @@
       </p:sp>
       <p:sp>
         <p:nvSpPr>
-          <p:cNvPr id="23" name="Text 53"/>
+          <p:cNvPr id="73" name="Shape 81"/>
           <p:cNvSpPr/>
           <p:nvPr/>
         </p:nvSpPr>
         <p:spPr>
           <a:xfrm>
-            <a:off x="472449" y="2924029"/>
-            <a:ext cx="91440" cy="91440"/>
-          </a:xfrm>
-          <a:prstGeom prst="rect">
-            <a:avLst/>
-          </a:prstGeom>
-          <a:noFill/>
-          <a:ln/>
-        </p:spPr>
-        <p:txBody>
-          <a:bodyPr wrap="none" lIns="0" tIns="0" rIns="0" bIns="0" rtlCol="0" anchor="ctr"/>
-          <a:lstStyle/>
-          <a:p>
-            <a:pPr marL="0" indent="0" algn="ctr">
-              <a:buNone/>
-            </a:pPr>
-            <a:r>
-              <a:rPr lang="en-US" sz="844" dirty="0">
-                <a:latin typeface="Segoe UI Symbol" pitchFamily="34" charset="0"/>
-                <a:ea typeface="Segoe UI Symbol" pitchFamily="34" charset="-122"/>
-                <a:cs typeface="Segoe UI Symbol" pitchFamily="34" charset="-120"/>
-              </a:rPr>
-              <a:t>⌧</a:t>
-            </a:r>
-            <a:endParaRPr lang="en-US" sz="844" dirty="0"/>
-          </a:p>
-        </p:txBody>
-      </p:sp>
-      <p:sp>
-        <p:nvSpPr>
-          <p:cNvPr id="24" name="Text 54"/>
-          <p:cNvSpPr/>
-          <p:nvPr/>
-        </p:nvSpPr>
-        <p:spPr>
-          <a:xfrm>
-            <a:off x="601036" y="2909741"/>
-            <a:ext cx="2524088" cy="158046"/>
-          </a:xfrm>
-          <a:prstGeom prst="rect">
-            <a:avLst/>
-          </a:prstGeom>
-          <a:noFill/>
-          <a:ln/>
-        </p:spPr>
-        <p:txBody>
-          <a:bodyPr wrap="square" lIns="0" tIns="0" rIns="0" bIns="0" rtlCol="0" anchor="t"/>
-          <a:lstStyle/>
-          <a:p>
-            <a:pPr marL="0" indent="0" algn="l">
-              <a:lnSpc>
-                <a:spcPts val="835"/>
-              </a:lnSpc>
-              <a:buNone/>
-            </a:pPr>
-            <a:r>
-              <a:rPr lang="en-US" sz="800" dirty="0" err="1">
-                <a:latin typeface="Carlito" pitchFamily="34" charset="0"/>
-                <a:ea typeface="Carlito" pitchFamily="34" charset="-122"/>
-                <a:cs typeface="Carlito" pitchFamily="34" charset="-120"/>
-              </a:rPr>
-              <a:t>Скидка</a:t>
-            </a:r>
-            <a:r>
-              <a:rPr lang="en-US" sz="800" dirty="0">
-                <a:latin typeface="Carlito" pitchFamily="34" charset="0"/>
-                <a:ea typeface="Carlito" pitchFamily="34" charset="-122"/>
-                <a:cs typeface="Carlito" pitchFamily="34" charset="-120"/>
-              </a:rPr>
-              <a:t> </a:t>
-            </a:r>
-            <a:r>
-              <a:rPr lang="en-US" sz="800" dirty="0" smtClean="0">
-                <a:latin typeface="Carlito" pitchFamily="34" charset="0"/>
-                <a:ea typeface="Carlito" pitchFamily="34" charset="-122"/>
-                <a:cs typeface="Carlito" pitchFamily="34" charset="-120"/>
-              </a:rPr>
-              <a:t>10% + 10% (</a:t>
-            </a:r>
-            <a:r>
-              <a:rPr lang="en-US" sz="800" dirty="0">
-                <a:latin typeface="Carlito" pitchFamily="34" charset="0"/>
-                <a:ea typeface="Carlito" pitchFamily="34" charset="-122"/>
-                <a:cs typeface="Carlito" pitchFamily="34" charset="-120"/>
-              </a:rPr>
-              <a:t>жёлтый ценник) с </a:t>
-            </a:r>
-            <a:r>
-              <a:rPr lang="en-US" sz="800" b="1" dirty="0" smtClean="0">
-                <a:latin typeface="Liberation Sans Narrow" pitchFamily="34" charset="0"/>
-                <a:ea typeface="Liberation Sans Narrow" pitchFamily="34" charset="-122"/>
-                <a:cs typeface="Liberation Sans Narrow" pitchFamily="34" charset="-120"/>
-              </a:rPr>
-              <a:t>01.08 - 30.09</a:t>
-            </a:r>
-            <a:endParaRPr lang="en-US" sz="800" dirty="0"/>
-          </a:p>
-        </p:txBody>
-      </p:sp>
-      <p:pic>
-        <p:nvPicPr>
-          <p:cNvPr id="25" name="Picture 2" descr="C:\Users\zakolodniy\Downloads\Анализ статистики Лемана ПРо за 02.10.2026\01_monthly_trend.png"/>
-          <p:cNvPicPr>
-            <a:picLocks noChangeAspect="1" noChangeArrowheads="1"/>
-          </p:cNvPicPr>
-          <p:nvPr/>
-        </p:nvPicPr>
-        <p:blipFill>
-          <a:blip r:embed="rId2">
-            <a:extLst>
-              <a:ext uri="{28A0092B-C50C-407E-A947-70E740481C1C}">
-                <a14:useLocalDpi xmlns:a14="http://schemas.microsoft.com/office/drawing/2010/main" val="0"/>
-              </a:ext>
-            </a:extLst>
-          </a:blip>
-          <a:srcRect/>
-          <a:stretch>
-            <a:fillRect/>
-          </a:stretch>
-        </p:blipFill>
-        <p:spPr bwMode="auto">
-          <a:xfrm>
-            <a:off x="3684895" y="132311"/>
-            <a:ext cx="5083791" cy="2304207"/>
-          </a:xfrm>
-          <a:prstGeom prst="rect">
-            <a:avLst/>
-          </a:prstGeom>
-          <a:noFill/>
-          <a:extLst>
-            <a:ext uri="{909E8E84-426E-40DD-AFC4-6F175D3DCCD1}">
-              <a14:hiddenFill xmlns:a14="http://schemas.microsoft.com/office/drawing/2010/main">
-                <a:solidFill>
-                  <a:srgbClr val="FFFFFF"/>
-                </a:solidFill>
-              </a14:hiddenFill>
-            </a:ext>
-          </a:extLst>
-        </p:spPr>
-      </p:pic>
-      <p:pic>
-        <p:nvPicPr>
-          <p:cNvPr id="2051" name="Picture 3" descr="C:\Users\zakolodniy\Downloads\Анализ статистики Лемана ПРо за 02.10.2026\05_shop_performance_stock_transit.png"/>
-          <p:cNvPicPr>
-            <a:picLocks noChangeAspect="1" noChangeArrowheads="1"/>
-          </p:cNvPicPr>
-          <p:nvPr/>
-        </p:nvPicPr>
-        <p:blipFill>
-          <a:blip r:embed="rId3">
-            <a:extLst>
-              <a:ext uri="{28A0092B-C50C-407E-A947-70E740481C1C}">
-                <a14:useLocalDpi xmlns:a14="http://schemas.microsoft.com/office/drawing/2010/main" val="0"/>
-              </a:ext>
-            </a:extLst>
-          </a:blip>
-          <a:srcRect/>
-          <a:stretch>
-            <a:fillRect/>
-          </a:stretch>
-        </p:blipFill>
-        <p:spPr bwMode="auto">
-          <a:xfrm>
-            <a:off x="3684895" y="2531602"/>
-            <a:ext cx="5083791" cy="2433461"/>
-          </a:xfrm>
-          <a:prstGeom prst="rect">
-            <a:avLst/>
-          </a:prstGeom>
-          <a:noFill/>
-          <a:extLst>
-            <a:ext uri="{909E8E84-426E-40DD-AFC4-6F175D3DCCD1}">
-              <a14:hiddenFill xmlns:a14="http://schemas.microsoft.com/office/drawing/2010/main">
-                <a:solidFill>
-                  <a:srgbClr val="FFFFFF"/>
-                </a:solidFill>
-              </a14:hiddenFill>
-            </a:ext>
-          </a:extLst>
-        </p:spPr>
-      </p:pic>
-      <p:sp>
-        <p:nvSpPr>
-          <p:cNvPr id="28" name="Shape 33"/>
-          <p:cNvSpPr/>
-          <p:nvPr/>
-        </p:nvSpPr>
-        <p:spPr>
-          <a:xfrm>
-            <a:off x="450579" y="3259335"/>
-            <a:ext cx="2652675" cy="0"/>
+            <a:off x="385762" y="3898760"/>
+            <a:ext cx="2652787" cy="0"/>
           </a:xfrm>
           <a:prstGeom prst="line">
             <a:avLst/>
@@ -9785,305 +10078,503 @@
             <a:solidFill>
               <a:srgbClr val="D9D2C2"/>
             </a:solidFill>
-            <a:prstDash val="solid"/>
+            <a:prstDash val="dash"/>
           </a:ln>
         </p:spPr>
       </p:sp>
       <p:sp>
         <p:nvSpPr>
-          <p:cNvPr id="29" name="Text 54"/>
-          <p:cNvSpPr/>
-          <p:nvPr/>
-        </p:nvSpPr>
-        <p:spPr>
-          <a:xfrm>
-            <a:off x="485974" y="1381192"/>
-            <a:ext cx="2524088" cy="158046"/>
-          </a:xfrm>
-          <a:prstGeom prst="rect">
-            <a:avLst/>
-          </a:prstGeom>
-          <a:noFill/>
-          <a:ln/>
-        </p:spPr>
-        <p:txBody>
-          <a:bodyPr wrap="square" lIns="0" tIns="0" rIns="0" bIns="0" rtlCol="0" anchor="t"/>
-          <a:lstStyle/>
-          <a:p>
-            <a:pPr marL="0" indent="0" algn="ctr">
+          <p:cNvPr id="40" name="Rectangle 1"/>
+          <p:cNvSpPr>
+            <a:spLocks noChangeArrowheads="1"/>
+          </p:cNvSpPr>
+          <p:nvPr/>
+        </p:nvSpPr>
+        <p:spPr bwMode="auto">
+          <a:xfrm>
+            <a:off x="3200784" y="516554"/>
+            <a:ext cx="5695566" cy="1969770"/>
+          </a:xfrm>
+          <a:prstGeom prst="rect">
+            <a:avLst/>
+          </a:prstGeom>
+          <a:noFill/>
+          <a:ln>
+            <a:noFill/>
+          </a:ln>
+          <a:effectLst/>
+          <a:extLst>
+            <a:ext uri="{909E8E84-426E-40DD-AFC4-6F175D3DCCD1}">
+              <a14:hiddenFill xmlns:a14="http://schemas.microsoft.com/office/drawing/2010/main">
+                <a:solidFill>
+                  <a:schemeClr val="accent1"/>
+                </a:solidFill>
+              </a14:hiddenFill>
+            </a:ext>
+            <a:ext uri="{91240B29-F687-4F45-9708-019B960494DF}">
+              <a14:hiddenLine xmlns:a14="http://schemas.microsoft.com/office/drawing/2010/main" w="9525">
+                <a:solidFill>
+                  <a:schemeClr val="tx1"/>
+                </a:solidFill>
+                <a:miter lim="800000"/>
+                <a:headEnd/>
+                <a:tailEnd/>
+              </a14:hiddenLine>
+            </a:ext>
+            <a:ext uri="{AF507438-7753-43E0-B8FC-AC1667EBCBE1}">
+              <a14:hiddenEffects xmlns:a14="http://schemas.microsoft.com/office/drawing/2010/main">
+                <a:effectLst>
+                  <a:outerShdw dist="35921" dir="2700000" algn="ctr" rotWithShape="0">
+                    <a:schemeClr val="bg2"/>
+                  </a:outerShdw>
+                </a:effectLst>
+              </a14:hiddenEffects>
+            </a:ext>
+          </a:extLst>
+        </p:spPr>
+        <p:txBody>
+          <a:bodyPr vert="horz" wrap="square" lIns="91440" tIns="45720" rIns="91440" bIns="45720" numCol="1" anchor="ctr" anchorCtr="0" compatLnSpc="1">
+            <a:prstTxWarp prst="textNoShape">
+              <a:avLst/>
+            </a:prstTxWarp>
+            <a:spAutoFit/>
+          </a:bodyPr>
+          <a:lstStyle/>
+          <a:p>
+            <a:pPr marL="0" marR="0" lvl="0" indent="0" algn="ctr" defTabSz="914400" rtl="0" eaLnBrk="1" fontAlgn="base" latinLnBrk="0" hangingPunct="1">
               <a:lnSpc>
-                <a:spcPts val="835"/>
+                <a:spcPct val="100000"/>
               </a:lnSpc>
-              <a:buNone/>
+              <a:spcBef>
+                <a:spcPct val="0"/>
+              </a:spcBef>
+              <a:spcAft>
+                <a:spcPct val="0"/>
+              </a:spcAft>
+              <a:buClrTx/>
+              <a:buSzTx/>
+              <a:tabLst/>
             </a:pPr>
             <a:r>
-              <a:rPr lang="ru-RU" sz="1000" b="1" dirty="0" smtClean="0"/>
-              <a:t>Запуск продаж 01.06.2026 – 30.09.2026</a:t>
-            </a:r>
-            <a:endParaRPr lang="en-US" sz="1000" b="1" dirty="0"/>
-          </a:p>
-        </p:txBody>
-      </p:sp>
-      <p:sp>
-        <p:nvSpPr>
-          <p:cNvPr id="32" name="Text 54"/>
-          <p:cNvSpPr/>
-          <p:nvPr/>
-        </p:nvSpPr>
-        <p:spPr>
-          <a:xfrm>
-            <a:off x="518169" y="3332822"/>
-            <a:ext cx="2524088" cy="158046"/>
-          </a:xfrm>
-          <a:prstGeom prst="rect">
-            <a:avLst/>
-          </a:prstGeom>
-          <a:noFill/>
-          <a:ln/>
-        </p:spPr>
-        <p:txBody>
-          <a:bodyPr wrap="square" lIns="0" tIns="0" rIns="0" bIns="0" rtlCol="0" anchor="t"/>
-          <a:lstStyle/>
-          <a:p>
-            <a:pPr marL="0" indent="0" algn="ctr">
+              <a:rPr lang="ru-RU" sz="1100" b="1" dirty="0" smtClean="0">
+                <a:latin typeface="Arial" charset="0"/>
+                <a:cs typeface="Arial" charset="0"/>
+              </a:rPr>
+              <a:t>9 месяцев 2025 </a:t>
+            </a:r>
+            <a:r>
+              <a:rPr lang="en-US" sz="1100" b="1" dirty="0" err="1" smtClean="0">
+                <a:latin typeface="Arial" charset="0"/>
+                <a:cs typeface="Arial" charset="0"/>
+              </a:rPr>
+              <a:t>vs</a:t>
+            </a:r>
+            <a:r>
+              <a:rPr lang="en-US" sz="1100" b="1" dirty="0" smtClean="0">
+                <a:latin typeface="Arial" charset="0"/>
+                <a:cs typeface="Arial" charset="0"/>
+              </a:rPr>
+              <a:t> 9 </a:t>
+            </a:r>
+            <a:r>
+              <a:rPr lang="ru-RU" sz="1100" b="1" dirty="0" smtClean="0">
+                <a:latin typeface="Arial" charset="0"/>
+                <a:cs typeface="Arial" charset="0"/>
+              </a:rPr>
+              <a:t>месяцев 2026</a:t>
+            </a:r>
+          </a:p>
+          <a:p>
+            <a:pPr marL="0" marR="0" lvl="0" indent="0" algn="ctr" defTabSz="914400" rtl="0" eaLnBrk="1" fontAlgn="base" latinLnBrk="0" hangingPunct="1">
               <a:lnSpc>
-                <a:spcPts val="835"/>
+                <a:spcPct val="100000"/>
               </a:lnSpc>
-              <a:buNone/>
+              <a:spcBef>
+                <a:spcPct val="0"/>
+              </a:spcBef>
+              <a:spcAft>
+                <a:spcPct val="0"/>
+              </a:spcAft>
+              <a:buClrTx/>
+              <a:buSzTx/>
+              <a:tabLst/>
             </a:pPr>
             <a:r>
-              <a:rPr lang="ru-RU" sz="1000" b="1" dirty="0" smtClean="0"/>
-              <a:t>Поддержка 01.010.2026 – 30.10.2026</a:t>
-            </a:r>
-            <a:endParaRPr lang="en-US" sz="1000" b="1" dirty="0"/>
-          </a:p>
-        </p:txBody>
-      </p:sp>
-      <p:sp>
-        <p:nvSpPr>
-          <p:cNvPr id="33" name="Text 39"/>
-          <p:cNvSpPr/>
-          <p:nvPr/>
-        </p:nvSpPr>
-        <p:spPr>
-          <a:xfrm>
-            <a:off x="485974" y="3684370"/>
-            <a:ext cx="91440" cy="91440"/>
-          </a:xfrm>
-          <a:prstGeom prst="rect">
-            <a:avLst/>
-          </a:prstGeom>
-          <a:noFill/>
-          <a:ln/>
-        </p:spPr>
-        <p:txBody>
-          <a:bodyPr wrap="none" lIns="0" tIns="0" rIns="0" bIns="0" rtlCol="0" anchor="ctr"/>
-          <a:lstStyle/>
-          <a:p>
-            <a:pPr marL="0" indent="0" algn="ctr">
-              <a:buNone/>
+              <a:rPr lang="ru-RU" sz="1100" b="1" dirty="0" smtClean="0">
+                <a:latin typeface="Arial" charset="0"/>
+                <a:cs typeface="Arial" charset="0"/>
+              </a:rPr>
+              <a:t> </a:t>
+            </a:r>
+            <a:endParaRPr kumimoji="0" lang="ru-RU" sz="1100" b="1" i="0" u="none" strike="noStrike" cap="none" normalizeH="0" baseline="0" dirty="0" smtClean="0">
+              <a:ln>
+                <a:noFill/>
+              </a:ln>
+              <a:solidFill>
+                <a:schemeClr val="tx1"/>
+              </a:solidFill>
+              <a:effectLst/>
+              <a:latin typeface="Arial" charset="0"/>
+              <a:cs typeface="Arial" charset="0"/>
+            </a:endParaRPr>
+          </a:p>
+          <a:p>
+            <a:pPr marL="0" marR="0" lvl="0" indent="0" algn="l" defTabSz="914400" rtl="0" eaLnBrk="1" fontAlgn="base" latinLnBrk="0" hangingPunct="1">
+              <a:lnSpc>
+                <a:spcPct val="100000"/>
+              </a:lnSpc>
+              <a:spcBef>
+                <a:spcPct val="0"/>
+              </a:spcBef>
+              <a:spcAft>
+                <a:spcPct val="0"/>
+              </a:spcAft>
+              <a:buClrTx/>
+              <a:buSzTx/>
+              <a:tabLst/>
             </a:pPr>
             <a:r>
-              <a:rPr lang="en-US" sz="844" dirty="0">
-                <a:latin typeface="Segoe UI Symbol" pitchFamily="34" charset="0"/>
-                <a:ea typeface="Segoe UI Symbol" pitchFamily="34" charset="-122"/>
-                <a:cs typeface="Segoe UI Symbol" pitchFamily="34" charset="-120"/>
-              </a:rPr>
-              <a:t>▭</a:t>
-            </a:r>
-            <a:endParaRPr lang="en-US" sz="844" dirty="0"/>
-          </a:p>
-        </p:txBody>
-      </p:sp>
-      <p:sp>
-        <p:nvSpPr>
-          <p:cNvPr id="34" name="Text 40"/>
-          <p:cNvSpPr/>
-          <p:nvPr/>
-        </p:nvSpPr>
-        <p:spPr>
-          <a:xfrm>
-            <a:off x="614561" y="3677227"/>
-            <a:ext cx="1001174" cy="119703"/>
-          </a:xfrm>
-          <a:prstGeom prst="rect">
-            <a:avLst/>
-          </a:prstGeom>
-          <a:noFill/>
-          <a:ln/>
-        </p:spPr>
-        <p:txBody>
-          <a:bodyPr wrap="none" lIns="0" tIns="0" rIns="0" bIns="0" rtlCol="0" anchor="t"/>
-          <a:lstStyle/>
-          <a:p>
-            <a:pPr marL="0" indent="0" algn="l">
+              <a:rPr kumimoji="0" lang="ru-RU" sz="1000" b="1" i="0" u="none" strike="noStrike" cap="none" normalizeH="0" baseline="0" dirty="0" smtClean="0">
+                <a:ln>
+                  <a:noFill/>
+                </a:ln>
+                <a:solidFill>
+                  <a:schemeClr val="tx1"/>
+                </a:solidFill>
+                <a:effectLst/>
+                <a:latin typeface="Arial" charset="0"/>
+                <a:cs typeface="Arial" charset="0"/>
+              </a:rPr>
+              <a:t>1. БРОЗЭКС — АКБ:</a:t>
+            </a:r>
+            <a:r>
+              <a:rPr kumimoji="0" lang="ru-RU" sz="1000" b="0" i="0" u="none" strike="noStrike" cap="none" normalizeH="0" baseline="0" dirty="0" smtClean="0">
+                <a:ln>
+                  <a:noFill/>
+                </a:ln>
+                <a:solidFill>
+                  <a:schemeClr val="tx1"/>
+                </a:solidFill>
+                <a:effectLst/>
+                <a:latin typeface="Arial" charset="0"/>
+                <a:cs typeface="Arial" charset="0"/>
+              </a:rPr>
+              <a:t> 108 → 125 клиентов (+15.7%)</a:t>
+            </a:r>
+          </a:p>
+          <a:p>
+            <a:pPr marL="0" marR="0" lvl="0" indent="0" algn="l" defTabSz="914400" rtl="0" eaLnBrk="0" fontAlgn="base" latinLnBrk="0" hangingPunct="0">
               <a:lnSpc>
-                <a:spcPts val="835"/>
+                <a:spcPct val="100000"/>
               </a:lnSpc>
-              <a:buNone/>
+              <a:spcBef>
+                <a:spcPct val="0"/>
+              </a:spcBef>
+              <a:spcAft>
+                <a:spcPct val="0"/>
+              </a:spcAft>
+              <a:buClrTx/>
+              <a:buSzTx/>
+              <a:tabLst/>
             </a:pPr>
             <a:r>
-              <a:rPr lang="en-US" sz="619" dirty="0">
-                <a:latin typeface="Carlito" pitchFamily="34" charset="0"/>
-                <a:ea typeface="Carlito" pitchFamily="34" charset="-122"/>
-                <a:cs typeface="Carlito" pitchFamily="34" charset="-120"/>
-              </a:rPr>
-              <a:t>РК на экранах Ростова:</a:t>
-            </a:r>
-            <a:endParaRPr lang="en-US" sz="619" dirty="0"/>
-          </a:p>
-        </p:txBody>
-      </p:sp>
-      <p:sp>
-        <p:nvSpPr>
-          <p:cNvPr id="35" name="Text 41"/>
-          <p:cNvSpPr/>
-          <p:nvPr/>
-        </p:nvSpPr>
-        <p:spPr>
-          <a:xfrm>
-            <a:off x="1546597" y="3677227"/>
-            <a:ext cx="545068" cy="129679"/>
-          </a:xfrm>
-          <a:prstGeom prst="rect">
-            <a:avLst/>
-          </a:prstGeom>
-          <a:noFill/>
-          <a:ln/>
-        </p:spPr>
-        <p:txBody>
-          <a:bodyPr wrap="none" lIns="0" tIns="0" rIns="0" bIns="0" rtlCol="0" anchor="t"/>
-          <a:lstStyle/>
-          <a:p>
-            <a:pPr marL="0" indent="0" algn="l">
+              <a:rPr kumimoji="0" lang="ru-RU" sz="1000" b="1" i="0" u="none" strike="noStrike" cap="none" normalizeH="0" baseline="0" dirty="0" smtClean="0">
+                <a:ln>
+                  <a:noFill/>
+                </a:ln>
+                <a:solidFill>
+                  <a:schemeClr val="tx1"/>
+                </a:solidFill>
+                <a:effectLst/>
+                <a:latin typeface="Arial" charset="0"/>
+                <a:cs typeface="Arial" charset="0"/>
+              </a:rPr>
+              <a:t>2. Рыгалов — АКБ:</a:t>
+            </a:r>
+            <a:r>
+              <a:rPr kumimoji="0" lang="ru-RU" sz="1000" b="0" i="0" u="none" strike="noStrike" cap="none" normalizeH="0" baseline="0" dirty="0" smtClean="0">
+                <a:ln>
+                  <a:noFill/>
+                </a:ln>
+                <a:solidFill>
+                  <a:schemeClr val="tx1"/>
+                </a:solidFill>
+                <a:effectLst/>
+                <a:latin typeface="Arial" charset="0"/>
+                <a:cs typeface="Arial" charset="0"/>
+              </a:rPr>
+              <a:t> 82 → 100 клиентов (+22.0%)</a:t>
+            </a:r>
+          </a:p>
+          <a:p>
+            <a:pPr marL="0" marR="0" lvl="0" indent="0" algn="l" defTabSz="914400" rtl="0" eaLnBrk="0" fontAlgn="base" latinLnBrk="0" hangingPunct="0">
               <a:lnSpc>
-                <a:spcPts val="835"/>
+                <a:spcPct val="100000"/>
               </a:lnSpc>
-              <a:buNone/>
+              <a:spcBef>
+                <a:spcPct val="0"/>
+              </a:spcBef>
+              <a:spcAft>
+                <a:spcPct val="0"/>
+              </a:spcAft>
+              <a:buClrTx/>
+              <a:buSzTx/>
+              <a:tabLst/>
             </a:pPr>
             <a:r>
-              <a:rPr lang="ru-RU" sz="800" b="1" dirty="0" smtClean="0">
-                <a:latin typeface="Courier New" pitchFamily="34" charset="0"/>
-                <a:ea typeface="Courier New" pitchFamily="34" charset="-122"/>
-                <a:cs typeface="Courier New" pitchFamily="34" charset="-120"/>
-              </a:rPr>
-              <a:t>2</a:t>
-            </a:r>
-            <a:r>
-              <a:rPr lang="en-US" sz="800" b="1" dirty="0" smtClean="0">
-                <a:latin typeface="Courier New" pitchFamily="34" charset="0"/>
-                <a:ea typeface="Courier New" pitchFamily="34" charset="-122"/>
-                <a:cs typeface="Courier New" pitchFamily="34" charset="-120"/>
-              </a:rPr>
-              <a:t> </a:t>
-            </a:r>
-            <a:r>
-              <a:rPr lang="en-US" sz="800" b="1" dirty="0">
-                <a:latin typeface="Courier New" pitchFamily="34" charset="0"/>
-                <a:ea typeface="Courier New" pitchFamily="34" charset="-122"/>
-                <a:cs typeface="Courier New" pitchFamily="34" charset="-120"/>
-              </a:rPr>
-              <a:t>экранов</a:t>
-            </a:r>
-            <a:endParaRPr lang="en-US" sz="800" dirty="0"/>
-          </a:p>
-        </p:txBody>
-      </p:sp>
-      <p:sp>
-        <p:nvSpPr>
-          <p:cNvPr id="36" name="Text 48"/>
-          <p:cNvSpPr/>
-          <p:nvPr/>
-        </p:nvSpPr>
-        <p:spPr>
-          <a:xfrm>
-            <a:off x="478828" y="3533468"/>
-            <a:ext cx="91440" cy="91440"/>
-          </a:xfrm>
-          <a:prstGeom prst="rect">
-            <a:avLst/>
-          </a:prstGeom>
-          <a:noFill/>
-          <a:ln/>
-        </p:spPr>
-        <p:txBody>
-          <a:bodyPr wrap="none" lIns="0" tIns="0" rIns="0" bIns="0" rtlCol="0" anchor="ctr"/>
-          <a:lstStyle/>
-          <a:p>
-            <a:pPr marL="0" indent="0" algn="ctr">
-              <a:buNone/>
+              <a:rPr kumimoji="0" lang="ru-RU" sz="1000" b="1" i="0" u="none" strike="noStrike" cap="none" normalizeH="0" baseline="0" dirty="0" smtClean="0">
+                <a:ln>
+                  <a:noFill/>
+                </a:ln>
+                <a:solidFill>
+                  <a:schemeClr val="tx1"/>
+                </a:solidFill>
+                <a:effectLst/>
+                <a:latin typeface="Arial" charset="0"/>
+                <a:cs typeface="Arial" charset="0"/>
+              </a:rPr>
+              <a:t>3. БРОЗЭКС — Товарооборот:</a:t>
+            </a:r>
+            <a:r>
+              <a:rPr kumimoji="0" lang="ru-RU" sz="1000" b="0" i="0" u="none" strike="noStrike" cap="none" normalizeH="0" baseline="0" dirty="0" smtClean="0">
+                <a:ln>
+                  <a:noFill/>
+                </a:ln>
+                <a:solidFill>
+                  <a:schemeClr val="tx1"/>
+                </a:solidFill>
+                <a:effectLst/>
+                <a:latin typeface="Arial" charset="0"/>
+                <a:cs typeface="Arial" charset="0"/>
+              </a:rPr>
+              <a:t> 2 014 796 ₽ → 3 439 931 ₽ (+70.7%)</a:t>
+            </a:r>
+          </a:p>
+          <a:p>
+            <a:pPr marL="0" marR="0" lvl="0" indent="0" algn="l" defTabSz="914400" rtl="0" eaLnBrk="0" fontAlgn="base" latinLnBrk="0" hangingPunct="0">
+              <a:lnSpc>
+                <a:spcPct val="100000"/>
+              </a:lnSpc>
+              <a:spcBef>
+                <a:spcPct val="0"/>
+              </a:spcBef>
+              <a:spcAft>
+                <a:spcPct val="0"/>
+              </a:spcAft>
+              <a:buClrTx/>
+              <a:buSzTx/>
+              <a:tabLst/>
             </a:pPr>
             <a:r>
-              <a:rPr lang="en-US" sz="844" dirty="0">
-                <a:latin typeface="Segoe UI Symbol" pitchFamily="34" charset="0"/>
-                <a:ea typeface="Segoe UI Symbol" pitchFamily="34" charset="-122"/>
-                <a:cs typeface="Segoe UI Symbol" pitchFamily="34" charset="-120"/>
-              </a:rPr>
-              <a:t>♟</a:t>
-            </a:r>
-            <a:endParaRPr lang="en-US" sz="844" dirty="0"/>
-          </a:p>
-        </p:txBody>
-      </p:sp>
-      <p:sp>
-        <p:nvSpPr>
-          <p:cNvPr id="37" name="Text 49"/>
-          <p:cNvSpPr/>
-          <p:nvPr/>
-        </p:nvSpPr>
-        <p:spPr>
-          <a:xfrm>
-            <a:off x="607415" y="3526005"/>
-            <a:ext cx="2524088" cy="158046"/>
-          </a:xfrm>
-          <a:prstGeom prst="rect">
-            <a:avLst/>
-          </a:prstGeom>
-          <a:noFill/>
-          <a:ln/>
-        </p:spPr>
-        <p:txBody>
-          <a:bodyPr wrap="square" lIns="0" tIns="0" rIns="0" bIns="0" rtlCol="0" anchor="t"/>
-          <a:lstStyle/>
-          <a:p>
-            <a:pPr marL="0" indent="0" algn="l">
+              <a:rPr kumimoji="0" lang="ru-RU" sz="1000" b="1" i="0" u="none" strike="noStrike" cap="none" normalizeH="0" baseline="0" dirty="0" smtClean="0">
+                <a:ln>
+                  <a:noFill/>
+                </a:ln>
+                <a:solidFill>
+                  <a:schemeClr val="tx1"/>
+                </a:solidFill>
+                <a:effectLst/>
+                <a:latin typeface="Arial" charset="0"/>
+                <a:cs typeface="Arial" charset="0"/>
+              </a:rPr>
+              <a:t>4. Рыгалов — Товарооборот:</a:t>
+            </a:r>
+            <a:r>
+              <a:rPr kumimoji="0" lang="ru-RU" sz="1000" b="0" i="0" u="none" strike="noStrike" cap="none" normalizeH="0" baseline="0" dirty="0" smtClean="0">
+                <a:ln>
+                  <a:noFill/>
+                </a:ln>
+                <a:solidFill>
+                  <a:schemeClr val="tx1"/>
+                </a:solidFill>
+                <a:effectLst/>
+                <a:latin typeface="Arial" charset="0"/>
+                <a:cs typeface="Arial" charset="0"/>
+              </a:rPr>
+              <a:t> 2 555 783 ₽ → 2 690 942 ₽ (+5.3%)</a:t>
+            </a:r>
+          </a:p>
+          <a:p>
+            <a:pPr marL="0" marR="0" lvl="0" indent="0" algn="l" defTabSz="914400" rtl="0" eaLnBrk="0" fontAlgn="base" latinLnBrk="0" hangingPunct="0">
               <a:lnSpc>
-                <a:spcPts val="835"/>
+                <a:spcPct val="100000"/>
               </a:lnSpc>
-              <a:buNone/>
+              <a:spcBef>
+                <a:spcPct val="0"/>
+              </a:spcBef>
+              <a:spcAft>
+                <a:spcPct val="0"/>
+              </a:spcAft>
+              <a:buClrTx/>
+              <a:buSzTx/>
+              <a:tabLst/>
             </a:pPr>
-            <a:r>
-              <a:rPr lang="en-US" sz="800" dirty="0">
-                <a:latin typeface="Carlito" pitchFamily="34" charset="0"/>
-                <a:ea typeface="Carlito" pitchFamily="34" charset="-122"/>
-                <a:cs typeface="Carlito" pitchFamily="34" charset="-120"/>
-              </a:rPr>
-              <a:t>Мастер-классы: </a:t>
-            </a:r>
-            <a:r>
-              <a:rPr lang="en-US" sz="800" b="1" dirty="0">
-                <a:latin typeface="Courier New" pitchFamily="34" charset="0"/>
-                <a:ea typeface="Courier New" pitchFamily="34" charset="-122"/>
-                <a:cs typeface="Courier New" pitchFamily="34" charset="-120"/>
-              </a:rPr>
-              <a:t>3 ТТ</a:t>
-            </a:r>
-            <a:r>
-              <a:rPr lang="en-US" sz="800" dirty="0">
-                <a:latin typeface="Carlito" pitchFamily="34" charset="0"/>
-                <a:ea typeface="Carlito" pitchFamily="34" charset="-122"/>
-                <a:cs typeface="Carlito" pitchFamily="34" charset="-120"/>
-              </a:rPr>
-              <a:t> в Ростове</a:t>
-            </a:r>
-            <a:endParaRPr lang="en-US" sz="800" dirty="0"/>
+            <a:endParaRPr kumimoji="0" lang="ru-RU" sz="1000" b="0" i="0" u="none" strike="noStrike" cap="none" normalizeH="0" baseline="0" dirty="0" smtClean="0">
+              <a:ln>
+                <a:noFill/>
+              </a:ln>
+              <a:solidFill>
+                <a:schemeClr val="tx1"/>
+              </a:solidFill>
+              <a:effectLst/>
+              <a:latin typeface="Arial" charset="0"/>
+              <a:cs typeface="Arial" charset="0"/>
+            </a:endParaRPr>
+          </a:p>
+          <a:p>
+            <a:pPr marL="0" marR="0" lvl="0" indent="0" algn="l" defTabSz="914400" rtl="0" eaLnBrk="0" fontAlgn="base" latinLnBrk="0" hangingPunct="0">
+              <a:lnSpc>
+                <a:spcPct val="100000"/>
+              </a:lnSpc>
+              <a:spcBef>
+                <a:spcPct val="0"/>
+              </a:spcBef>
+              <a:spcAft>
+                <a:spcPct val="0"/>
+              </a:spcAft>
+              <a:buClrTx/>
+              <a:buSzTx/>
+              <a:buFontTx/>
+              <a:buChar char="•"/>
+              <a:tabLst/>
+            </a:pPr>
+            <a:r>
+              <a:rPr kumimoji="0" lang="ru-RU" sz="1000" b="1" i="0" u="none" strike="noStrike" cap="none" normalizeH="0" baseline="0" dirty="0" smtClean="0">
+                <a:ln>
+                  <a:noFill/>
+                </a:ln>
+                <a:solidFill>
+                  <a:schemeClr val="tx1"/>
+                </a:solidFill>
+                <a:effectLst/>
+                <a:latin typeface="Arial" charset="0"/>
+                <a:cs typeface="Arial" charset="0"/>
+              </a:rPr>
+              <a:t>💡 Вывод по БРОЗЭКС:</a:t>
+            </a:r>
+            <a:r>
+              <a:rPr kumimoji="0" lang="ru-RU" sz="1000" b="0" i="0" u="none" strike="noStrike" cap="none" normalizeH="0" baseline="0" dirty="0" smtClean="0">
+                <a:ln>
+                  <a:noFill/>
+                </a:ln>
+                <a:solidFill>
+                  <a:schemeClr val="tx1"/>
+                </a:solidFill>
+                <a:effectLst/>
+                <a:latin typeface="Arial" charset="0"/>
+                <a:cs typeface="Arial" charset="0"/>
+              </a:rPr>
+              <a:t> Товарооборот растёт быстрее АКБ (+70,7% </a:t>
+            </a:r>
+            <a:r>
+              <a:rPr kumimoji="0" lang="ru-RU" sz="1000" b="0" i="0" u="none" strike="noStrike" cap="none" normalizeH="0" baseline="0" dirty="0" err="1" smtClean="0">
+                <a:ln>
+                  <a:noFill/>
+                </a:ln>
+                <a:solidFill>
+                  <a:schemeClr val="tx1"/>
+                </a:solidFill>
+                <a:effectLst/>
+                <a:latin typeface="Arial" charset="0"/>
+                <a:cs typeface="Arial" charset="0"/>
+              </a:rPr>
+              <a:t>vs</a:t>
+            </a:r>
+            <a:r>
+              <a:rPr kumimoji="0" lang="ru-RU" sz="1000" b="0" i="0" u="none" strike="noStrike" cap="none" normalizeH="0" baseline="0" dirty="0" smtClean="0">
+                <a:ln>
+                  <a:noFill/>
+                </a:ln>
+                <a:solidFill>
+                  <a:schemeClr val="tx1"/>
+                </a:solidFill>
+                <a:effectLst/>
+                <a:latin typeface="Arial" charset="0"/>
+                <a:cs typeface="Arial" charset="0"/>
+              </a:rPr>
+              <a:t> +15,7%) — означает рост среднего чека на клиента. Эффективная работа с существующей базой + расширение.</a:t>
+            </a:r>
+          </a:p>
+          <a:p>
+            <a:pPr marL="0" marR="0" lvl="0" indent="0" algn="l" defTabSz="914400" rtl="0" eaLnBrk="0" fontAlgn="base" latinLnBrk="0" hangingPunct="0">
+              <a:lnSpc>
+                <a:spcPct val="100000"/>
+              </a:lnSpc>
+              <a:spcBef>
+                <a:spcPct val="0"/>
+              </a:spcBef>
+              <a:spcAft>
+                <a:spcPct val="0"/>
+              </a:spcAft>
+              <a:buClrTx/>
+              <a:buSzTx/>
+              <a:buFontTx/>
+              <a:buChar char="•"/>
+              <a:tabLst/>
+            </a:pPr>
+            <a:r>
+              <a:rPr kumimoji="0" lang="ru-RU" sz="1000" b="1" i="0" u="none" strike="noStrike" cap="none" normalizeH="0" baseline="0" dirty="0" smtClean="0">
+                <a:ln>
+                  <a:noFill/>
+                </a:ln>
+                <a:solidFill>
+                  <a:schemeClr val="tx1"/>
+                </a:solidFill>
+                <a:effectLst/>
+                <a:latin typeface="Arial" charset="0"/>
+                <a:cs typeface="Arial" charset="0"/>
+              </a:rPr>
+              <a:t>💡 Вывод по Рыгалову:</a:t>
+            </a:r>
+            <a:r>
+              <a:rPr kumimoji="0" lang="ru-RU" sz="1000" b="0" i="0" u="none" strike="noStrike" cap="none" normalizeH="0" baseline="0" dirty="0" smtClean="0">
+                <a:ln>
+                  <a:noFill/>
+                </a:ln>
+                <a:solidFill>
+                  <a:schemeClr val="tx1"/>
+                </a:solidFill>
+                <a:effectLst/>
+                <a:latin typeface="Arial" charset="0"/>
+                <a:cs typeface="Arial" charset="0"/>
+              </a:rPr>
+              <a:t> АКБ растёт быстрее товарооборота (+22,0% </a:t>
+            </a:r>
+            <a:r>
+              <a:rPr kumimoji="0" lang="ru-RU" sz="1000" b="0" i="0" u="none" strike="noStrike" cap="none" normalizeH="0" baseline="0" dirty="0" err="1" smtClean="0">
+                <a:ln>
+                  <a:noFill/>
+                </a:ln>
+                <a:solidFill>
+                  <a:schemeClr val="tx1"/>
+                </a:solidFill>
+                <a:effectLst/>
+                <a:latin typeface="Arial" charset="0"/>
+                <a:cs typeface="Arial" charset="0"/>
+              </a:rPr>
+              <a:t>vs</a:t>
+            </a:r>
+            <a:r>
+              <a:rPr kumimoji="0" lang="ru-RU" sz="1000" b="0" i="0" u="none" strike="noStrike" cap="none" normalizeH="0" baseline="0" dirty="0" smtClean="0">
+                <a:ln>
+                  <a:noFill/>
+                </a:ln>
+                <a:solidFill>
+                  <a:schemeClr val="tx1"/>
+                </a:solidFill>
+                <a:effectLst/>
+                <a:latin typeface="Arial" charset="0"/>
+                <a:cs typeface="Arial" charset="0"/>
+              </a:rPr>
+              <a:t> +5,3%) — новые клиенты дают меньший чек. Требуется работа по увеличению среднего объёма закупок. </a:t>
+            </a:r>
           </a:p>
         </p:txBody>
       </p:sp>
     </p:spTree>
     <p:extLst>
       <p:ext uri="{BB962C8B-B14F-4D97-AF65-F5344CB8AC3E}">
-        <p14:creationId xmlns:p14="http://schemas.microsoft.com/office/powerpoint/2010/main" val="1029298718"/>
+        <p14:creationId xmlns:p14="http://schemas.microsoft.com/office/powerpoint/2010/main" val="2412404899"/>
       </p:ext>
     </p:extLst>
   </p:cSld>
@@ -12176,14 +12667,14 @@
       </p:grpSpPr>
       <p:sp>
         <p:nvSpPr>
-          <p:cNvPr id="5" name="TextBox 4"/>
+          <p:cNvPr id="2" name="TextBox 1"/>
           <p:cNvSpPr txBox="1"/>
           <p:nvPr/>
         </p:nvSpPr>
         <p:spPr>
           <a:xfrm>
-            <a:off x="120650" y="520700"/>
-            <a:ext cx="7226300" cy="338554"/>
+            <a:off x="140000" y="180000"/>
+            <a:ext cx="8800000" cy="340000"/>
           </a:xfrm>
           <a:prstGeom prst="rect">
             <a:avLst/>
@@ -12198,60 +12689,62 @@
           <a:p>
             <a:pPr algn="l"/>
             <a:r>
-              <a:rPr lang="ru-RU" sz="2200" b="1" dirty="0" smtClean="0">
+              <a:rPr sz="2000" b="1">
                 <a:solidFill>
                   <a:srgbClr val="2F3A48"/>
                 </a:solidFill>
                 <a:latin typeface="Inter"/>
               </a:rPr>
-              <a:t>Выход в сегмент </a:t>
-            </a:r>
-            <a:r>
-              <a:rPr sz="2200" b="1" dirty="0" err="1" smtClean="0">
-                <a:solidFill>
-                  <a:srgbClr val="2F3A48"/>
+              <a:t>Запуск новинок · Стандартизация процесса</a:t>
+            </a:r>
+          </a:p>
+        </p:txBody>
+      </p:sp>
+      <p:sp>
+        <p:nvSpPr>
+          <p:cNvPr id="3" name="TextBox 2"/>
+          <p:cNvSpPr txBox="1"/>
+          <p:nvPr/>
+        </p:nvSpPr>
+        <p:spPr>
+          <a:xfrm>
+            <a:off x="140000" y="560000"/>
+            <a:ext cx="8800000" cy="360000"/>
+          </a:xfrm>
+          <a:prstGeom prst="rect">
+            <a:avLst/>
+          </a:prstGeom>
+          <a:noFill/>
+        </p:spPr>
+        <p:txBody>
+          <a:bodyPr wrap="square" lIns="0" tIns="0" rIns="0" bIns="0" anchor="t">
+            <a:spAutoFit/>
+          </a:bodyPr>
+          <a:lstStyle/>
+          <a:p>
+            <a:pPr algn="l"/>
+            <a:r>
+              <a:rPr sz="1100" b="0">
+                <a:solidFill>
+                  <a:srgbClr val="8A95A3"/>
                 </a:solidFill>
                 <a:latin typeface="Inter"/>
               </a:rPr>
-              <a:t>жилищного</a:t>
-            </a:r>
-            <a:r>
-              <a:rPr sz="2200" b="1" dirty="0" smtClean="0">
-                <a:solidFill>
-                  <a:srgbClr val="2F3A48"/>
-                </a:solidFill>
-                <a:latin typeface="Inter"/>
-              </a:rPr>
-              <a:t> </a:t>
-            </a:r>
-            <a:r>
-              <a:rPr sz="2200" b="1" dirty="0" err="1">
-                <a:solidFill>
-                  <a:srgbClr val="2F3A48"/>
-                </a:solidFill>
-                <a:latin typeface="Inter"/>
-              </a:rPr>
-              <a:t>строительства</a:t>
-            </a:r>
-            <a:endParaRPr sz="2200" b="1" dirty="0">
-              <a:solidFill>
-                <a:srgbClr val="2F3A48"/>
-              </a:solidFill>
-              <a:latin typeface="Inter"/>
-            </a:endParaRPr>
-          </a:p>
-        </p:txBody>
-      </p:sp>
-      <p:sp>
-        <p:nvSpPr>
-          <p:cNvPr id="6" name="Rounded Rectangle 5"/>
+              <a:t>Единый стандарт вывода новинок и поддержки в период выхода на рынок</a:t>
+            </a:r>
+          </a:p>
+        </p:txBody>
+      </p:sp>
+      <p:sp>
+        <p:nvSpPr>
+          <p:cNvPr id="4" name="Rounded Rectangle 3"/>
           <p:cNvSpPr/>
           <p:nvPr/>
         </p:nvSpPr>
         <p:spPr>
           <a:xfrm>
-            <a:off x="7270750" y="139065"/>
-            <a:ext cx="1601590" cy="268605"/>
+            <a:off x="7200000" y="160000"/>
+            <a:ext cx="1800000" cy="280000"/>
           </a:xfrm>
           <a:prstGeom prst="roundRect">
             <a:avLst>
@@ -12293,14 +12786,14 @@
       </p:sp>
       <p:sp>
         <p:nvSpPr>
-          <p:cNvPr id="7" name="TextBox 6"/>
+          <p:cNvPr id="5" name="TextBox 4"/>
           <p:cNvSpPr txBox="1"/>
           <p:nvPr/>
         </p:nvSpPr>
         <p:spPr>
           <a:xfrm>
-            <a:off x="7397750" y="190649"/>
-            <a:ext cx="1368950" cy="153888"/>
+            <a:off x="7200000" y="205000"/>
+            <a:ext cx="1800000" cy="235000"/>
           </a:xfrm>
           <a:prstGeom prst="rect">
             <a:avLst/>
@@ -12315,35 +12808,26 @@
           <a:p>
             <a:pPr algn="ctr"/>
             <a:r>
-              <a:rPr sz="1000" b="1" spc="150" dirty="0" smtClean="0">
+              <a:rPr sz="1000" b="1" spc="150">
                 <a:solidFill>
                   <a:srgbClr val="C9A77C"/>
                 </a:solidFill>
                 <a:latin typeface="Inter"/>
               </a:rPr>
-              <a:t>В </a:t>
-            </a:r>
-            <a:r>
-              <a:rPr sz="1000" b="1" spc="150" dirty="0">
-                <a:solidFill>
-                  <a:srgbClr val="C9A77C"/>
-                </a:solidFill>
-                <a:latin typeface="Inter"/>
-              </a:rPr>
-              <a:t>РАБОТЕ</a:t>
-            </a:r>
-          </a:p>
-        </p:txBody>
-      </p:sp>
-      <p:sp>
-        <p:nvSpPr>
-          <p:cNvPr id="8" name="Rectangle 7"/>
+              <a:t>СТАНДАРТ · ВНЕДРЕНИЕ</a:t>
+            </a:r>
+          </a:p>
+        </p:txBody>
+      </p:sp>
+      <p:sp>
+        <p:nvSpPr>
+          <p:cNvPr id="6" name="Rectangle 5"/>
           <p:cNvSpPr/>
           <p:nvPr/>
         </p:nvSpPr>
         <p:spPr>
           <a:xfrm>
-            <a:off x="143256" y="453390"/>
+            <a:off x="140000" y="800000"/>
             <a:ext cx="8855724" cy="28575"/>
           </a:xfrm>
           <a:prstGeom prst="rect">
@@ -12382,14 +12866,14 @@
       </p:sp>
       <p:sp>
         <p:nvSpPr>
-          <p:cNvPr id="9" name="Rounded Rectangle 8"/>
+          <p:cNvPr id="7" name="Rounded Rectangle 6"/>
           <p:cNvSpPr/>
           <p:nvPr/>
         </p:nvSpPr>
         <p:spPr>
           <a:xfrm>
-            <a:off x="61200" y="962590"/>
-            <a:ext cx="6066960" cy="3975450"/>
+            <a:off x="61200" y="960000"/>
+            <a:ext cx="6066960" cy="3500000"/>
           </a:xfrm>
           <a:prstGeom prst="roundRect">
             <a:avLst>
@@ -12431,6 +12915,2129 @@
       </p:sp>
       <p:sp>
         <p:nvSpPr>
+          <p:cNvPr id="8" name="TextBox 7"/>
+          <p:cNvSpPr txBox="1"/>
+          <p:nvPr/>
+        </p:nvSpPr>
+        <p:spPr>
+          <a:xfrm>
+            <a:off x="261200" y="1100000"/>
+            <a:ext cx="8000000" cy="220000"/>
+          </a:xfrm>
+          <a:prstGeom prst="rect">
+            <a:avLst/>
+          </a:prstGeom>
+          <a:noFill/>
+        </p:spPr>
+        <p:txBody>
+          <a:bodyPr wrap="square" lIns="0" tIns="0" rIns="0" bIns="0" anchor="t">
+            <a:spAutoFit/>
+          </a:bodyPr>
+          <a:lstStyle/>
+          <a:p>
+            <a:pPr algn="l"/>
+            <a:r>
+              <a:rPr sz="1100" b="1" spc="200">
+                <a:solidFill>
+                  <a:srgbClr val="C00000"/>
+                </a:solidFill>
+                <a:latin typeface="Inter"/>
+              </a:rPr>
+              <a:t>СТАНДАРТ ВЫВОДА НОВИНКИ</a:t>
+            </a:r>
+          </a:p>
+        </p:txBody>
+      </p:sp>
+      <p:sp>
+        <p:nvSpPr>
+          <p:cNvPr id="9" name="TextBox 8"/>
+          <p:cNvSpPr txBox="1"/>
+          <p:nvPr/>
+        </p:nvSpPr>
+        <p:spPr>
+          <a:xfrm>
+            <a:off x="261200" y="1330000"/>
+            <a:ext cx="8000000" cy="180000"/>
+          </a:xfrm>
+          <a:prstGeom prst="rect">
+            <a:avLst/>
+          </a:prstGeom>
+          <a:noFill/>
+        </p:spPr>
+        <p:txBody>
+          <a:bodyPr wrap="square" lIns="0" tIns="0" rIns="0" bIns="0" anchor="t">
+            <a:spAutoFit/>
+          </a:bodyPr>
+          <a:lstStyle/>
+          <a:p>
+            <a:pPr algn="l"/>
+            <a:r>
+              <a:rPr sz="1000" b="0">
+                <a:solidFill>
+                  <a:srgbClr val="8A95A3"/>
+                </a:solidFill>
+                <a:latin typeface="Inter"/>
+              </a:rPr>
+              <a:t>4 обязательных этапа для каждой новинки</a:t>
+            </a:r>
+          </a:p>
+        </p:txBody>
+      </p:sp>
+      <p:sp>
+        <p:nvSpPr>
+          <p:cNvPr id="10" name="Rectangle 9"/>
+          <p:cNvSpPr/>
+          <p:nvPr/>
+        </p:nvSpPr>
+        <p:spPr>
+          <a:xfrm>
+            <a:off x="261200" y="1540000"/>
+            <a:ext cx="5666960" cy="20000"/>
+          </a:xfrm>
+          <a:prstGeom prst="rect">
+            <a:avLst/>
+          </a:prstGeom>
+          <a:solidFill>
+            <a:srgbClr val="EFE9DD"/>
+          </a:solidFill>
+          <a:ln>
+            <a:noFill/>
+          </a:ln>
+          <a:effectLst/>
+        </p:spPr>
+        <p:style>
+          <a:lnRef idx="1">
+            <a:schemeClr val="accent1"/>
+          </a:lnRef>
+          <a:fillRef idx="3">
+            <a:schemeClr val="accent1"/>
+          </a:fillRef>
+          <a:effectRef idx="2">
+            <a:schemeClr val="accent1"/>
+          </a:effectRef>
+          <a:fontRef idx="minor">
+            <a:schemeClr val="lt1"/>
+          </a:fontRef>
+        </p:style>
+        <p:txBody>
+          <a:bodyPr rtlCol="0" anchor="ctr"/>
+          <a:lstStyle/>
+          <a:p>
+            <a:pPr algn="ctr"/>
+            <a:endParaRPr/>
+          </a:p>
+        </p:txBody>
+      </p:sp>
+      <p:sp>
+        <p:nvSpPr>
+          <p:cNvPr id="11" name="Rectangle 10"/>
+          <p:cNvSpPr/>
+          <p:nvPr/>
+        </p:nvSpPr>
+        <p:spPr>
+          <a:xfrm>
+            <a:off x="341200" y="1990000"/>
+            <a:ext cx="5506960" cy="12000"/>
+          </a:xfrm>
+          <a:prstGeom prst="rect">
+            <a:avLst/>
+          </a:prstGeom>
+          <a:solidFill>
+            <a:srgbClr val="EFE9DD"/>
+          </a:solidFill>
+          <a:ln>
+            <a:noFill/>
+          </a:ln>
+          <a:effectLst/>
+        </p:spPr>
+        <p:style>
+          <a:lnRef idx="1">
+            <a:schemeClr val="accent1"/>
+          </a:lnRef>
+          <a:fillRef idx="3">
+            <a:schemeClr val="accent1"/>
+          </a:fillRef>
+          <a:effectRef idx="2">
+            <a:schemeClr val="accent1"/>
+          </a:effectRef>
+          <a:fontRef idx="minor">
+            <a:schemeClr val="lt1"/>
+          </a:fontRef>
+        </p:style>
+        <p:txBody>
+          <a:bodyPr rtlCol="0" anchor="ctr"/>
+          <a:lstStyle/>
+          <a:p>
+            <a:pPr algn="ctr"/>
+            <a:endParaRPr/>
+          </a:p>
+        </p:txBody>
+      </p:sp>
+      <p:sp>
+        <p:nvSpPr>
+          <p:cNvPr id="12" name="Rounded Rectangle 11"/>
+          <p:cNvSpPr/>
+          <p:nvPr/>
+        </p:nvSpPr>
+        <p:spPr>
+          <a:xfrm>
+            <a:off x="644570" y="1710000"/>
+            <a:ext cx="560000" cy="560000"/>
+          </a:xfrm>
+          <a:prstGeom prst="roundRect">
+            <a:avLst>
+              <a:gd name="adj" fmla="val 50000"/>
+            </a:avLst>
+          </a:prstGeom>
+          <a:solidFill>
+            <a:srgbClr val="FFFFFF"/>
+          </a:solidFill>
+          <a:ln w="12700">
+            <a:solidFill>
+              <a:srgbClr val="C00000"/>
+            </a:solidFill>
+          </a:ln>
+          <a:effectLst/>
+        </p:spPr>
+        <p:style>
+          <a:lnRef idx="1">
+            <a:schemeClr val="accent1"/>
+          </a:lnRef>
+          <a:fillRef idx="3">
+            <a:schemeClr val="accent1"/>
+          </a:fillRef>
+          <a:effectRef idx="2">
+            <a:schemeClr val="accent1"/>
+          </a:effectRef>
+          <a:fontRef idx="minor">
+            <a:schemeClr val="lt1"/>
+          </a:fontRef>
+        </p:style>
+        <p:txBody>
+          <a:bodyPr rtlCol="0" anchor="ctr"/>
+          <a:lstStyle/>
+          <a:p>
+            <a:pPr algn="ctr"/>
+            <a:endParaRPr/>
+          </a:p>
+        </p:txBody>
+      </p:sp>
+      <p:sp>
+        <p:nvSpPr>
+          <p:cNvPr id="13" name="TextBox 12"/>
+          <p:cNvSpPr txBox="1"/>
+          <p:nvPr/>
+        </p:nvSpPr>
+        <p:spPr>
+          <a:xfrm>
+            <a:off x="644570" y="1820000"/>
+            <a:ext cx="560000" cy="340000"/>
+          </a:xfrm>
+          <a:prstGeom prst="rect">
+            <a:avLst/>
+          </a:prstGeom>
+          <a:noFill/>
+        </p:spPr>
+        <p:txBody>
+          <a:bodyPr wrap="square" lIns="0" tIns="0" rIns="0" bIns="0" anchor="ctr">
+            <a:spAutoFit/>
+          </a:bodyPr>
+          <a:lstStyle/>
+          <a:p>
+            <a:pPr algn="ctr"/>
+            <a:r>
+              <a:rPr sz="1400" b="1">
+                <a:solidFill>
+                  <a:srgbClr val="C00000"/>
+                </a:solidFill>
+                <a:latin typeface="Roboto Mono"/>
+              </a:rPr>
+              <a:t>01</a:t>
+            </a:r>
+          </a:p>
+        </p:txBody>
+      </p:sp>
+      <p:sp>
+        <p:nvSpPr>
+          <p:cNvPr id="14" name="TextBox 13"/>
+          <p:cNvSpPr txBox="1"/>
+          <p:nvPr/>
+        </p:nvSpPr>
+        <p:spPr>
+          <a:xfrm>
+            <a:off x="261200" y="2390000"/>
+            <a:ext cx="1326740" cy="280000"/>
+          </a:xfrm>
+          <a:prstGeom prst="rect">
+            <a:avLst/>
+          </a:prstGeom>
+          <a:noFill/>
+        </p:spPr>
+        <p:txBody>
+          <a:bodyPr wrap="square" lIns="0" tIns="0" rIns="0" bIns="0" anchor="t">
+            <a:spAutoFit/>
+          </a:bodyPr>
+          <a:lstStyle/>
+          <a:p>
+            <a:pPr algn="ctr"/>
+            <a:r>
+              <a:rPr sz="900" b="1">
+                <a:solidFill>
+                  <a:srgbClr val="2F3A48"/>
+                </a:solidFill>
+                <a:latin typeface="Inter"/>
+              </a:rPr>
+              <a:t>ПОДГОТОВКА</a:t>
+            </a:r>
+          </a:p>
+        </p:txBody>
+      </p:sp>
+      <p:sp>
+        <p:nvSpPr>
+          <p:cNvPr id="15" name="TextBox 14"/>
+          <p:cNvSpPr txBox="1"/>
+          <p:nvPr/>
+        </p:nvSpPr>
+        <p:spPr>
+          <a:xfrm>
+            <a:off x="261200" y="2690000"/>
+            <a:ext cx="1326740" cy="220000"/>
+          </a:xfrm>
+          <a:prstGeom prst="rect">
+            <a:avLst/>
+          </a:prstGeom>
+          <a:noFill/>
+        </p:spPr>
+        <p:txBody>
+          <a:bodyPr wrap="square" lIns="0" tIns="0" rIns="0" bIns="0" anchor="t">
+            <a:spAutoFit/>
+          </a:bodyPr>
+          <a:lstStyle/>
+          <a:p>
+            <a:pPr algn="ctr"/>
+            <a:r>
+              <a:rPr sz="900" b="1">
+                <a:solidFill>
+                  <a:srgbClr val="C00000"/>
+                </a:solidFill>
+                <a:latin typeface="Roboto Mono"/>
+              </a:rPr>
+              <a:t>−60 дней</a:t>
+            </a:r>
+          </a:p>
+        </p:txBody>
+      </p:sp>
+      <p:sp>
+        <p:nvSpPr>
+          <p:cNvPr id="16" name="TextBox 15"/>
+          <p:cNvSpPr txBox="1"/>
+          <p:nvPr/>
+        </p:nvSpPr>
+        <p:spPr>
+          <a:xfrm>
+            <a:off x="301200" y="3010000"/>
+            <a:ext cx="1246740" cy="800000"/>
+          </a:xfrm>
+          <a:prstGeom prst="rect">
+            <a:avLst/>
+          </a:prstGeom>
+          <a:noFill/>
+        </p:spPr>
+        <p:txBody>
+          <a:bodyPr wrap="square" lIns="0" tIns="0" rIns="0" bIns="0" anchor="t">
+            <a:spAutoFit/>
+          </a:bodyPr>
+          <a:lstStyle/>
+          <a:p>
+            <a:pPr algn="ctr"/>
+            <a:r>
+              <a:rPr sz="950" b="0">
+                <a:solidFill>
+                  <a:srgbClr val="8A95A3"/>
+                </a:solidFill>
+                <a:latin typeface="Inter"/>
+              </a:rPr>
+              <a:t>Анализ рынка · Ценообразование · MML</a:t>
+            </a:r>
+          </a:p>
+        </p:txBody>
+      </p:sp>
+      <p:sp>
+        <p:nvSpPr>
+          <p:cNvPr id="17" name="Rounded Rectangle 16"/>
+          <p:cNvSpPr/>
+          <p:nvPr/>
+        </p:nvSpPr>
+        <p:spPr>
+          <a:xfrm>
+            <a:off x="2091310" y="1710000"/>
+            <a:ext cx="560000" cy="560000"/>
+          </a:xfrm>
+          <a:prstGeom prst="roundRect">
+            <a:avLst>
+              <a:gd name="adj" fmla="val 50000"/>
+            </a:avLst>
+          </a:prstGeom>
+          <a:solidFill>
+            <a:srgbClr val="FFFFFF"/>
+          </a:solidFill>
+          <a:ln w="12700">
+            <a:solidFill>
+              <a:srgbClr val="C9A77C"/>
+            </a:solidFill>
+          </a:ln>
+          <a:effectLst/>
+        </p:spPr>
+        <p:style>
+          <a:lnRef idx="1">
+            <a:schemeClr val="accent1"/>
+          </a:lnRef>
+          <a:fillRef idx="3">
+            <a:schemeClr val="accent1"/>
+          </a:fillRef>
+          <a:effectRef idx="2">
+            <a:schemeClr val="accent1"/>
+          </a:effectRef>
+          <a:fontRef idx="minor">
+            <a:schemeClr val="lt1"/>
+          </a:fontRef>
+        </p:style>
+        <p:txBody>
+          <a:bodyPr rtlCol="0" anchor="ctr"/>
+          <a:lstStyle/>
+          <a:p>
+            <a:pPr algn="ctr"/>
+            <a:endParaRPr/>
+          </a:p>
+        </p:txBody>
+      </p:sp>
+      <p:sp>
+        <p:nvSpPr>
+          <p:cNvPr id="18" name="TextBox 17"/>
+          <p:cNvSpPr txBox="1"/>
+          <p:nvPr/>
+        </p:nvSpPr>
+        <p:spPr>
+          <a:xfrm>
+            <a:off x="2091310" y="1820000"/>
+            <a:ext cx="560000" cy="340000"/>
+          </a:xfrm>
+          <a:prstGeom prst="rect">
+            <a:avLst/>
+          </a:prstGeom>
+          <a:noFill/>
+        </p:spPr>
+        <p:txBody>
+          <a:bodyPr wrap="square" lIns="0" tIns="0" rIns="0" bIns="0" anchor="ctr">
+            <a:spAutoFit/>
+          </a:bodyPr>
+          <a:lstStyle/>
+          <a:p>
+            <a:pPr algn="ctr"/>
+            <a:r>
+              <a:rPr sz="1400" b="1">
+                <a:solidFill>
+                  <a:srgbClr val="C9A77C"/>
+                </a:solidFill>
+                <a:latin typeface="Roboto Mono"/>
+              </a:rPr>
+              <a:t>02</a:t>
+            </a:r>
+          </a:p>
+        </p:txBody>
+      </p:sp>
+      <p:sp>
+        <p:nvSpPr>
+          <p:cNvPr id="19" name="TextBox 18"/>
+          <p:cNvSpPr txBox="1"/>
+          <p:nvPr/>
+        </p:nvSpPr>
+        <p:spPr>
+          <a:xfrm>
+            <a:off x="1707940" y="2390000"/>
+            <a:ext cx="1326740" cy="280000"/>
+          </a:xfrm>
+          <a:prstGeom prst="rect">
+            <a:avLst/>
+          </a:prstGeom>
+          <a:noFill/>
+        </p:spPr>
+        <p:txBody>
+          <a:bodyPr wrap="square" lIns="0" tIns="0" rIns="0" bIns="0" anchor="t">
+            <a:spAutoFit/>
+          </a:bodyPr>
+          <a:lstStyle/>
+          <a:p>
+            <a:pPr algn="ctr"/>
+            <a:r>
+              <a:rPr sz="900" b="1">
+                <a:solidFill>
+                  <a:srgbClr val="2F3A48"/>
+                </a:solidFill>
+                <a:latin typeface="Inter"/>
+              </a:rPr>
+              <a:t>ЗАПУСК</a:t>
+            </a:r>
+          </a:p>
+        </p:txBody>
+      </p:sp>
+      <p:sp>
+        <p:nvSpPr>
+          <p:cNvPr id="20" name="TextBox 19"/>
+          <p:cNvSpPr txBox="1"/>
+          <p:nvPr/>
+        </p:nvSpPr>
+        <p:spPr>
+          <a:xfrm>
+            <a:off x="1707940" y="2690000"/>
+            <a:ext cx="1326740" cy="220000"/>
+          </a:xfrm>
+          <a:prstGeom prst="rect">
+            <a:avLst/>
+          </a:prstGeom>
+          <a:noFill/>
+        </p:spPr>
+        <p:txBody>
+          <a:bodyPr wrap="square" lIns="0" tIns="0" rIns="0" bIns="0" anchor="t">
+            <a:spAutoFit/>
+          </a:bodyPr>
+          <a:lstStyle/>
+          <a:p>
+            <a:pPr algn="ctr"/>
+            <a:r>
+              <a:rPr sz="900" b="1">
+                <a:solidFill>
+                  <a:srgbClr val="C9A77C"/>
+                </a:solidFill>
+                <a:latin typeface="Roboto Mono"/>
+              </a:rPr>
+              <a:t>0 — 30 дней</a:t>
+            </a:r>
+          </a:p>
+        </p:txBody>
+      </p:sp>
+      <p:sp>
+        <p:nvSpPr>
+          <p:cNvPr id="21" name="TextBox 20"/>
+          <p:cNvSpPr txBox="1"/>
+          <p:nvPr/>
+        </p:nvSpPr>
+        <p:spPr>
+          <a:xfrm>
+            <a:off x="1747940" y="3010000"/>
+            <a:ext cx="1246740" cy="800000"/>
+          </a:xfrm>
+          <a:prstGeom prst="rect">
+            <a:avLst/>
+          </a:prstGeom>
+          <a:noFill/>
+        </p:spPr>
+        <p:txBody>
+          <a:bodyPr wrap="square" lIns="0" tIns="0" rIns="0" bIns="0" anchor="t">
+            <a:spAutoFit/>
+          </a:bodyPr>
+          <a:lstStyle/>
+          <a:p>
+            <a:pPr algn="ctr"/>
+            <a:r>
+              <a:rPr sz="950" b="0">
+                <a:solidFill>
+                  <a:srgbClr val="8A95A3"/>
+                </a:solidFill>
+                <a:latin typeface="Inter"/>
+              </a:rPr>
+              <a:t>POSM · Обучение · Контент</a:t>
+            </a:r>
+          </a:p>
+        </p:txBody>
+      </p:sp>
+      <p:sp>
+        <p:nvSpPr>
+          <p:cNvPr id="22" name="Rounded Rectangle 21"/>
+          <p:cNvSpPr/>
+          <p:nvPr/>
+        </p:nvSpPr>
+        <p:spPr>
+          <a:xfrm>
+            <a:off x="3538050" y="1710000"/>
+            <a:ext cx="560000" cy="560000"/>
+          </a:xfrm>
+          <a:prstGeom prst="roundRect">
+            <a:avLst>
+              <a:gd name="adj" fmla="val 50000"/>
+            </a:avLst>
+          </a:prstGeom>
+          <a:solidFill>
+            <a:srgbClr val="FFFFFF"/>
+          </a:solidFill>
+          <a:ln w="12700">
+            <a:solidFill>
+              <a:srgbClr val="C9A77C"/>
+            </a:solidFill>
+          </a:ln>
+          <a:effectLst/>
+        </p:spPr>
+        <p:style>
+          <a:lnRef idx="1">
+            <a:schemeClr val="accent1"/>
+          </a:lnRef>
+          <a:fillRef idx="3">
+            <a:schemeClr val="accent1"/>
+          </a:fillRef>
+          <a:effectRef idx="2">
+            <a:schemeClr val="accent1"/>
+          </a:effectRef>
+          <a:fontRef idx="minor">
+            <a:schemeClr val="lt1"/>
+          </a:fontRef>
+        </p:style>
+        <p:txBody>
+          <a:bodyPr rtlCol="0" anchor="ctr"/>
+          <a:lstStyle/>
+          <a:p>
+            <a:pPr algn="ctr"/>
+            <a:endParaRPr/>
+          </a:p>
+        </p:txBody>
+      </p:sp>
+      <p:sp>
+        <p:nvSpPr>
+          <p:cNvPr id="23" name="TextBox 22"/>
+          <p:cNvSpPr txBox="1"/>
+          <p:nvPr/>
+        </p:nvSpPr>
+        <p:spPr>
+          <a:xfrm>
+            <a:off x="3538050" y="1820000"/>
+            <a:ext cx="560000" cy="340000"/>
+          </a:xfrm>
+          <a:prstGeom prst="rect">
+            <a:avLst/>
+          </a:prstGeom>
+          <a:noFill/>
+        </p:spPr>
+        <p:txBody>
+          <a:bodyPr wrap="square" lIns="0" tIns="0" rIns="0" bIns="0" anchor="ctr">
+            <a:spAutoFit/>
+          </a:bodyPr>
+          <a:lstStyle/>
+          <a:p>
+            <a:pPr algn="ctr"/>
+            <a:r>
+              <a:rPr sz="1400" b="1">
+                <a:solidFill>
+                  <a:srgbClr val="C9A77C"/>
+                </a:solidFill>
+                <a:latin typeface="Roboto Mono"/>
+              </a:rPr>
+              <a:t>03</a:t>
+            </a:r>
+          </a:p>
+        </p:txBody>
+      </p:sp>
+      <p:sp>
+        <p:nvSpPr>
+          <p:cNvPr id="24" name="TextBox 23"/>
+          <p:cNvSpPr txBox="1"/>
+          <p:nvPr/>
+        </p:nvSpPr>
+        <p:spPr>
+          <a:xfrm>
+            <a:off x="3154680" y="2390000"/>
+            <a:ext cx="1326740" cy="280000"/>
+          </a:xfrm>
+          <a:prstGeom prst="rect">
+            <a:avLst/>
+          </a:prstGeom>
+          <a:noFill/>
+        </p:spPr>
+        <p:txBody>
+          <a:bodyPr wrap="square" lIns="0" tIns="0" rIns="0" bIns="0" anchor="t">
+            <a:spAutoFit/>
+          </a:bodyPr>
+          <a:lstStyle/>
+          <a:p>
+            <a:pPr algn="ctr"/>
+            <a:r>
+              <a:rPr sz="900" b="1">
+                <a:solidFill>
+                  <a:srgbClr val="2F3A48"/>
+                </a:solidFill>
+                <a:latin typeface="Inter"/>
+              </a:rPr>
+              <a:t>СОПРОВОЖДЕНИЕ</a:t>
+            </a:r>
+          </a:p>
+        </p:txBody>
+      </p:sp>
+      <p:sp>
+        <p:nvSpPr>
+          <p:cNvPr id="25" name="TextBox 24"/>
+          <p:cNvSpPr txBox="1"/>
+          <p:nvPr/>
+        </p:nvSpPr>
+        <p:spPr>
+          <a:xfrm>
+            <a:off x="3154680" y="2690000"/>
+            <a:ext cx="1326740" cy="220000"/>
+          </a:xfrm>
+          <a:prstGeom prst="rect">
+            <a:avLst/>
+          </a:prstGeom>
+          <a:noFill/>
+        </p:spPr>
+        <p:txBody>
+          <a:bodyPr wrap="square" lIns="0" tIns="0" rIns="0" bIns="0" anchor="t">
+            <a:spAutoFit/>
+          </a:bodyPr>
+          <a:lstStyle/>
+          <a:p>
+            <a:pPr algn="ctr"/>
+            <a:r>
+              <a:rPr sz="900" b="1">
+                <a:solidFill>
+                  <a:srgbClr val="C9A77C"/>
+                </a:solidFill>
+                <a:latin typeface="Roboto Mono"/>
+              </a:rPr>
+              <a:t>30 — 90 дней</a:t>
+            </a:r>
+          </a:p>
+        </p:txBody>
+      </p:sp>
+      <p:sp>
+        <p:nvSpPr>
+          <p:cNvPr id="26" name="TextBox 25"/>
+          <p:cNvSpPr txBox="1"/>
+          <p:nvPr/>
+        </p:nvSpPr>
+        <p:spPr>
+          <a:xfrm>
+            <a:off x="3194680" y="3010000"/>
+            <a:ext cx="1246740" cy="800000"/>
+          </a:xfrm>
+          <a:prstGeom prst="rect">
+            <a:avLst/>
+          </a:prstGeom>
+          <a:noFill/>
+        </p:spPr>
+        <p:txBody>
+          <a:bodyPr wrap="square" lIns="0" tIns="0" rIns="0" bIns="0" anchor="t">
+            <a:spAutoFit/>
+          </a:bodyPr>
+          <a:lstStyle/>
+          <a:p>
+            <a:pPr algn="ctr"/>
+            <a:r>
+              <a:rPr sz="950" b="0">
+                <a:solidFill>
+                  <a:srgbClr val="8A95A3"/>
+                </a:solidFill>
+                <a:latin typeface="Inter"/>
+              </a:rPr>
+              <a:t>Промо · МК · Куратор · Аналитика</a:t>
+            </a:r>
+          </a:p>
+        </p:txBody>
+      </p:sp>
+      <p:sp>
+        <p:nvSpPr>
+          <p:cNvPr id="27" name="Rounded Rectangle 26"/>
+          <p:cNvSpPr/>
+          <p:nvPr/>
+        </p:nvSpPr>
+        <p:spPr>
+          <a:xfrm>
+            <a:off x="4984790" y="1710000"/>
+            <a:ext cx="560000" cy="560000"/>
+          </a:xfrm>
+          <a:prstGeom prst="roundRect">
+            <a:avLst>
+              <a:gd name="adj" fmla="val 50000"/>
+            </a:avLst>
+          </a:prstGeom>
+          <a:solidFill>
+            <a:srgbClr val="FFFFFF"/>
+          </a:solidFill>
+          <a:ln w="12700">
+            <a:solidFill>
+              <a:srgbClr val="2F3A48"/>
+            </a:solidFill>
+          </a:ln>
+          <a:effectLst/>
+        </p:spPr>
+        <p:style>
+          <a:lnRef idx="1">
+            <a:schemeClr val="accent1"/>
+          </a:lnRef>
+          <a:fillRef idx="3">
+            <a:schemeClr val="accent1"/>
+          </a:fillRef>
+          <a:effectRef idx="2">
+            <a:schemeClr val="accent1"/>
+          </a:effectRef>
+          <a:fontRef idx="minor">
+            <a:schemeClr val="lt1"/>
+          </a:fontRef>
+        </p:style>
+        <p:txBody>
+          <a:bodyPr rtlCol="0" anchor="ctr"/>
+          <a:lstStyle/>
+          <a:p>
+            <a:pPr algn="ctr"/>
+            <a:endParaRPr/>
+          </a:p>
+        </p:txBody>
+      </p:sp>
+      <p:sp>
+        <p:nvSpPr>
+          <p:cNvPr id="28" name="TextBox 27"/>
+          <p:cNvSpPr txBox="1"/>
+          <p:nvPr/>
+        </p:nvSpPr>
+        <p:spPr>
+          <a:xfrm>
+            <a:off x="4984790" y="1820000"/>
+            <a:ext cx="560000" cy="340000"/>
+          </a:xfrm>
+          <a:prstGeom prst="rect">
+            <a:avLst/>
+          </a:prstGeom>
+          <a:noFill/>
+        </p:spPr>
+        <p:txBody>
+          <a:bodyPr wrap="square" lIns="0" tIns="0" rIns="0" bIns="0" anchor="ctr">
+            <a:spAutoFit/>
+          </a:bodyPr>
+          <a:lstStyle/>
+          <a:p>
+            <a:pPr algn="ctr"/>
+            <a:r>
+              <a:rPr sz="1400" b="1">
+                <a:solidFill>
+                  <a:srgbClr val="2F3A48"/>
+                </a:solidFill>
+                <a:latin typeface="Roboto Mono"/>
+              </a:rPr>
+              <a:t>04</a:t>
+            </a:r>
+          </a:p>
+        </p:txBody>
+      </p:sp>
+      <p:sp>
+        <p:nvSpPr>
+          <p:cNvPr id="29" name="TextBox 28"/>
+          <p:cNvSpPr txBox="1"/>
+          <p:nvPr/>
+        </p:nvSpPr>
+        <p:spPr>
+          <a:xfrm>
+            <a:off x="4601420" y="2390000"/>
+            <a:ext cx="1326740" cy="280000"/>
+          </a:xfrm>
+          <a:prstGeom prst="rect">
+            <a:avLst/>
+          </a:prstGeom>
+          <a:noFill/>
+        </p:spPr>
+        <p:txBody>
+          <a:bodyPr wrap="square" lIns="0" tIns="0" rIns="0" bIns="0" anchor="t">
+            <a:spAutoFit/>
+          </a:bodyPr>
+          <a:lstStyle/>
+          <a:p>
+            <a:pPr algn="ctr"/>
+            <a:r>
+              <a:rPr sz="900" b="1">
+                <a:solidFill>
+                  <a:srgbClr val="2F3A48"/>
+                </a:solidFill>
+                <a:latin typeface="Inter"/>
+              </a:rPr>
+              <a:t>ОЦЕНКА</a:t>
+            </a:r>
+          </a:p>
+        </p:txBody>
+      </p:sp>
+      <p:sp>
+        <p:nvSpPr>
+          <p:cNvPr id="30" name="TextBox 29"/>
+          <p:cNvSpPr txBox="1"/>
+          <p:nvPr/>
+        </p:nvSpPr>
+        <p:spPr>
+          <a:xfrm>
+            <a:off x="4601420" y="2690000"/>
+            <a:ext cx="1326740" cy="220000"/>
+          </a:xfrm>
+          <a:prstGeom prst="rect">
+            <a:avLst/>
+          </a:prstGeom>
+          <a:noFill/>
+        </p:spPr>
+        <p:txBody>
+          <a:bodyPr wrap="square" lIns="0" tIns="0" rIns="0" bIns="0" anchor="t">
+            <a:spAutoFit/>
+          </a:bodyPr>
+          <a:lstStyle/>
+          <a:p>
+            <a:pPr algn="ctr"/>
+            <a:r>
+              <a:rPr sz="900" b="1">
+                <a:solidFill>
+                  <a:srgbClr val="2F3A48"/>
+                </a:solidFill>
+                <a:latin typeface="Roboto Mono"/>
+              </a:rPr>
+              <a:t>90 — 180 дней</a:t>
+            </a:r>
+          </a:p>
+        </p:txBody>
+      </p:sp>
+      <p:sp>
+        <p:nvSpPr>
+          <p:cNvPr id="31" name="TextBox 30"/>
+          <p:cNvSpPr txBox="1"/>
+          <p:nvPr/>
+        </p:nvSpPr>
+        <p:spPr>
+          <a:xfrm>
+            <a:off x="4641420" y="3010000"/>
+            <a:ext cx="1246740" cy="800000"/>
+          </a:xfrm>
+          <a:prstGeom prst="rect">
+            <a:avLst/>
+          </a:prstGeom>
+          <a:noFill/>
+        </p:spPr>
+        <p:txBody>
+          <a:bodyPr wrap="square" lIns="0" tIns="0" rIns="0" bIns="0" anchor="t">
+            <a:spAutoFit/>
+          </a:bodyPr>
+          <a:lstStyle/>
+          <a:p>
+            <a:pPr algn="ctr"/>
+            <a:r>
+              <a:rPr sz="950" b="0">
+                <a:solidFill>
+                  <a:srgbClr val="8A95A3"/>
+                </a:solidFill>
+                <a:latin typeface="Inter"/>
+              </a:rPr>
+              <a:t>KPI · Решение по масштабу</a:t>
+            </a:r>
+          </a:p>
+        </p:txBody>
+      </p:sp>
+      <p:sp>
+        <p:nvSpPr>
+          <p:cNvPr id="32" name="Rectangle 31"/>
+          <p:cNvSpPr/>
+          <p:nvPr/>
+        </p:nvSpPr>
+        <p:spPr>
+          <a:xfrm>
+            <a:off x="261200" y="3910000"/>
+            <a:ext cx="5666960" cy="15000"/>
+          </a:xfrm>
+          <a:prstGeom prst="rect">
+            <a:avLst/>
+          </a:prstGeom>
+          <a:solidFill>
+            <a:srgbClr val="EFE9DD"/>
+          </a:solidFill>
+          <a:ln>
+            <a:noFill/>
+          </a:ln>
+          <a:effectLst/>
+        </p:spPr>
+        <p:style>
+          <a:lnRef idx="1">
+            <a:schemeClr val="accent1"/>
+          </a:lnRef>
+          <a:fillRef idx="3">
+            <a:schemeClr val="accent1"/>
+          </a:fillRef>
+          <a:effectRef idx="2">
+            <a:schemeClr val="accent1"/>
+          </a:effectRef>
+          <a:fontRef idx="minor">
+            <a:schemeClr val="lt1"/>
+          </a:fontRef>
+        </p:style>
+        <p:txBody>
+          <a:bodyPr rtlCol="0" anchor="ctr"/>
+          <a:lstStyle/>
+          <a:p>
+            <a:pPr algn="ctr"/>
+            <a:endParaRPr/>
+          </a:p>
+        </p:txBody>
+      </p:sp>
+      <p:sp>
+        <p:nvSpPr>
+          <p:cNvPr id="33" name="TextBox 32"/>
+          <p:cNvSpPr txBox="1"/>
+          <p:nvPr/>
+        </p:nvSpPr>
+        <p:spPr>
+          <a:xfrm>
+            <a:off x="261200" y="3960000"/>
+            <a:ext cx="5666960" cy="380000"/>
+          </a:xfrm>
+          <a:prstGeom prst="rect">
+            <a:avLst/>
+          </a:prstGeom>
+          <a:noFill/>
+        </p:spPr>
+        <p:txBody>
+          <a:bodyPr wrap="square" lIns="0" tIns="0" rIns="0" bIns="0" anchor="t">
+            <a:spAutoFit/>
+          </a:bodyPr>
+          <a:lstStyle/>
+          <a:p>
+            <a:pPr algn="ctr"/>
+            <a:r>
+              <a:rPr sz="900" b="0">
+                <a:solidFill>
+                  <a:srgbClr val="8A95A3"/>
+                </a:solidFill>
+                <a:latin typeface="Inter"/>
+              </a:rPr>
+              <a:t>Стандарт обязателен для всех новинок. Без прохождения 4 этапов новинка не вводится в MML.</a:t>
+            </a:r>
+          </a:p>
+        </p:txBody>
+      </p:sp>
+      <p:sp>
+        <p:nvSpPr>
+          <p:cNvPr id="34" name="Rounded Rectangle 33"/>
+          <p:cNvSpPr/>
+          <p:nvPr/>
+        </p:nvSpPr>
+        <p:spPr>
+          <a:xfrm>
+            <a:off x="6195600" y="960000"/>
+            <a:ext cx="2862000" cy="3500000"/>
+          </a:xfrm>
+          <a:prstGeom prst="roundRect">
+            <a:avLst>
+              <a:gd name="adj" fmla="val 2000"/>
+            </a:avLst>
+          </a:prstGeom>
+          <a:solidFill>
+            <a:srgbClr val="FFFFFF"/>
+          </a:solidFill>
+          <a:ln w="6350">
+            <a:solidFill>
+              <a:srgbClr val="D9D2C2"/>
+            </a:solidFill>
+          </a:ln>
+          <a:effectLst/>
+        </p:spPr>
+        <p:style>
+          <a:lnRef idx="1">
+            <a:schemeClr val="accent1"/>
+          </a:lnRef>
+          <a:fillRef idx="3">
+            <a:schemeClr val="accent1"/>
+          </a:fillRef>
+          <a:effectRef idx="2">
+            <a:schemeClr val="accent1"/>
+          </a:effectRef>
+          <a:fontRef idx="minor">
+            <a:schemeClr val="lt1"/>
+          </a:fontRef>
+        </p:style>
+        <p:txBody>
+          <a:bodyPr rtlCol="0" anchor="ctr"/>
+          <a:lstStyle/>
+          <a:p>
+            <a:pPr algn="ctr"/>
+            <a:endParaRPr/>
+          </a:p>
+        </p:txBody>
+      </p:sp>
+      <p:sp>
+        <p:nvSpPr>
+          <p:cNvPr id="35" name="TextBox 34"/>
+          <p:cNvSpPr txBox="1"/>
+          <p:nvPr/>
+        </p:nvSpPr>
+        <p:spPr>
+          <a:xfrm>
+            <a:off x="6395600" y="1100000"/>
+            <a:ext cx="2462000" cy="220000"/>
+          </a:xfrm>
+          <a:prstGeom prst="rect">
+            <a:avLst/>
+          </a:prstGeom>
+          <a:noFill/>
+        </p:spPr>
+        <p:txBody>
+          <a:bodyPr wrap="square" lIns="0" tIns="0" rIns="0" bIns="0" anchor="t">
+            <a:spAutoFit/>
+          </a:bodyPr>
+          <a:lstStyle/>
+          <a:p>
+            <a:pPr algn="l"/>
+            <a:r>
+              <a:rPr sz="1100" b="1" spc="200">
+                <a:solidFill>
+                  <a:srgbClr val="C00000"/>
+                </a:solidFill>
+                <a:latin typeface="Inter"/>
+              </a:rPr>
+              <a:t>ПОДДЕРЖКА ВЫХОДА</a:t>
+            </a:r>
+          </a:p>
+        </p:txBody>
+      </p:sp>
+      <p:sp>
+        <p:nvSpPr>
+          <p:cNvPr id="36" name="TextBox 35"/>
+          <p:cNvSpPr txBox="1"/>
+          <p:nvPr/>
+        </p:nvSpPr>
+        <p:spPr>
+          <a:xfrm>
+            <a:off x="6395600" y="1330000"/>
+            <a:ext cx="2462000" cy="180000"/>
+          </a:xfrm>
+          <a:prstGeom prst="rect">
+            <a:avLst/>
+          </a:prstGeom>
+          <a:noFill/>
+        </p:spPr>
+        <p:txBody>
+          <a:bodyPr wrap="square" lIns="0" tIns="0" rIns="0" bIns="0" anchor="t">
+            <a:spAutoFit/>
+          </a:bodyPr>
+          <a:lstStyle/>
+          <a:p>
+            <a:pPr algn="l"/>
+            <a:r>
+              <a:rPr sz="1000" b="0">
+                <a:solidFill>
+                  <a:srgbClr val="8A95A3"/>
+                </a:solidFill>
+                <a:latin typeface="Inter"/>
+              </a:rPr>
+              <a:t>Метрики периода вывода (90 дней)</a:t>
+            </a:r>
+          </a:p>
+        </p:txBody>
+      </p:sp>
+      <p:sp>
+        <p:nvSpPr>
+          <p:cNvPr id="37" name="Rectangle 36"/>
+          <p:cNvSpPr/>
+          <p:nvPr/>
+        </p:nvSpPr>
+        <p:spPr>
+          <a:xfrm>
+            <a:off x="6395600" y="1540000"/>
+            <a:ext cx="2462000" cy="20000"/>
+          </a:xfrm>
+          <a:prstGeom prst="rect">
+            <a:avLst/>
+          </a:prstGeom>
+          <a:solidFill>
+            <a:srgbClr val="EFE9DD"/>
+          </a:solidFill>
+          <a:ln>
+            <a:noFill/>
+          </a:ln>
+          <a:effectLst/>
+        </p:spPr>
+        <p:style>
+          <a:lnRef idx="1">
+            <a:schemeClr val="accent1"/>
+          </a:lnRef>
+          <a:fillRef idx="3">
+            <a:schemeClr val="accent1"/>
+          </a:fillRef>
+          <a:effectRef idx="2">
+            <a:schemeClr val="accent1"/>
+          </a:effectRef>
+          <a:fontRef idx="minor">
+            <a:schemeClr val="lt1"/>
+          </a:fontRef>
+        </p:style>
+        <p:txBody>
+          <a:bodyPr rtlCol="0" anchor="ctr"/>
+          <a:lstStyle/>
+          <a:p>
+            <a:pPr algn="ctr"/>
+            <a:endParaRPr/>
+          </a:p>
+        </p:txBody>
+      </p:sp>
+      <p:sp>
+        <p:nvSpPr>
+          <p:cNvPr id="38" name="Rectangle 37"/>
+          <p:cNvSpPr/>
+          <p:nvPr/>
+        </p:nvSpPr>
+        <p:spPr>
+          <a:xfrm>
+            <a:off x="6395600" y="1710000"/>
+            <a:ext cx="40000" cy="520000"/>
+          </a:xfrm>
+          <a:prstGeom prst="rect">
+            <a:avLst/>
+          </a:prstGeom>
+          <a:solidFill>
+            <a:srgbClr val="C00000"/>
+          </a:solidFill>
+          <a:ln>
+            <a:noFill/>
+          </a:ln>
+          <a:effectLst/>
+        </p:spPr>
+        <p:style>
+          <a:lnRef idx="1">
+            <a:schemeClr val="accent1"/>
+          </a:lnRef>
+          <a:fillRef idx="3">
+            <a:schemeClr val="accent1"/>
+          </a:fillRef>
+          <a:effectRef idx="2">
+            <a:schemeClr val="accent1"/>
+          </a:effectRef>
+          <a:fontRef idx="minor">
+            <a:schemeClr val="lt1"/>
+          </a:fontRef>
+        </p:style>
+        <p:txBody>
+          <a:bodyPr rtlCol="0" anchor="ctr"/>
+          <a:lstStyle/>
+          <a:p>
+            <a:pPr algn="ctr"/>
+            <a:endParaRPr/>
+          </a:p>
+        </p:txBody>
+      </p:sp>
+      <p:sp>
+        <p:nvSpPr>
+          <p:cNvPr id="39" name="TextBox 38"/>
+          <p:cNvSpPr txBox="1"/>
+          <p:nvPr/>
+        </p:nvSpPr>
+        <p:spPr>
+          <a:xfrm>
+            <a:off x="6555600" y="1720000"/>
+            <a:ext cx="1600000" cy="300000"/>
+          </a:xfrm>
+          <a:prstGeom prst="rect">
+            <a:avLst/>
+          </a:prstGeom>
+          <a:noFill/>
+        </p:spPr>
+        <p:txBody>
+          <a:bodyPr wrap="square" lIns="0" tIns="0" rIns="0" bIns="0" anchor="t">
+            <a:spAutoFit/>
+          </a:bodyPr>
+          <a:lstStyle/>
+          <a:p>
+            <a:pPr algn="l"/>
+            <a:r>
+              <a:rPr sz="1600" b="1">
+                <a:solidFill>
+                  <a:srgbClr val="C00000"/>
+                </a:solidFill>
+                <a:latin typeface="Roboto Mono"/>
+              </a:rPr>
+              <a:t>60 дней</a:t>
+            </a:r>
+          </a:p>
+        </p:txBody>
+      </p:sp>
+      <p:sp>
+        <p:nvSpPr>
+          <p:cNvPr id="40" name="TextBox 39"/>
+          <p:cNvSpPr txBox="1"/>
+          <p:nvPr/>
+        </p:nvSpPr>
+        <p:spPr>
+          <a:xfrm>
+            <a:off x="6395600" y="2010000"/>
+            <a:ext cx="2462000" cy="200000"/>
+          </a:xfrm>
+          <a:prstGeom prst="rect">
+            <a:avLst/>
+          </a:prstGeom>
+          <a:noFill/>
+        </p:spPr>
+        <p:txBody>
+          <a:bodyPr wrap="square" lIns="0" tIns="0" rIns="0" bIns="0" anchor="t">
+            <a:spAutoFit/>
+          </a:bodyPr>
+          <a:lstStyle/>
+          <a:p>
+            <a:pPr algn="l"/>
+            <a:r>
+              <a:rPr sz="1000" b="0">
+                <a:solidFill>
+                  <a:srgbClr val="8A95A3"/>
+                </a:solidFill>
+                <a:latin typeface="Inter"/>
+              </a:rPr>
+              <a:t>Подготовка до запуска</a:t>
+            </a:r>
+          </a:p>
+        </p:txBody>
+      </p:sp>
+      <p:sp>
+        <p:nvSpPr>
+          <p:cNvPr id="41" name="Rectangle 40"/>
+          <p:cNvSpPr/>
+          <p:nvPr/>
+        </p:nvSpPr>
+        <p:spPr>
+          <a:xfrm>
+            <a:off x="6395600" y="2180000"/>
+            <a:ext cx="2462000" cy="12000"/>
+          </a:xfrm>
+          <a:prstGeom prst="rect">
+            <a:avLst/>
+          </a:prstGeom>
+          <a:solidFill>
+            <a:srgbClr val="EFE9DD"/>
+          </a:solidFill>
+          <a:ln>
+            <a:noFill/>
+          </a:ln>
+          <a:effectLst/>
+        </p:spPr>
+        <p:style>
+          <a:lnRef idx="1">
+            <a:schemeClr val="accent1"/>
+          </a:lnRef>
+          <a:fillRef idx="3">
+            <a:schemeClr val="accent1"/>
+          </a:fillRef>
+          <a:effectRef idx="2">
+            <a:schemeClr val="accent1"/>
+          </a:effectRef>
+          <a:fontRef idx="minor">
+            <a:schemeClr val="lt1"/>
+          </a:fontRef>
+        </p:style>
+        <p:txBody>
+          <a:bodyPr rtlCol="0" anchor="ctr"/>
+          <a:lstStyle/>
+          <a:p>
+            <a:pPr algn="ctr"/>
+            <a:endParaRPr/>
+          </a:p>
+        </p:txBody>
+      </p:sp>
+      <p:sp>
+        <p:nvSpPr>
+          <p:cNvPr id="42" name="Rectangle 41"/>
+          <p:cNvSpPr/>
+          <p:nvPr/>
+        </p:nvSpPr>
+        <p:spPr>
+          <a:xfrm>
+            <a:off x="6395600" y="2290000"/>
+            <a:ext cx="40000" cy="520000"/>
+          </a:xfrm>
+          <a:prstGeom prst="rect">
+            <a:avLst/>
+          </a:prstGeom>
+          <a:solidFill>
+            <a:srgbClr val="C9A77C"/>
+          </a:solidFill>
+          <a:ln>
+            <a:noFill/>
+          </a:ln>
+          <a:effectLst/>
+        </p:spPr>
+        <p:style>
+          <a:lnRef idx="1">
+            <a:schemeClr val="accent1"/>
+          </a:lnRef>
+          <a:fillRef idx="3">
+            <a:schemeClr val="accent1"/>
+          </a:fillRef>
+          <a:effectRef idx="2">
+            <a:schemeClr val="accent1"/>
+          </a:effectRef>
+          <a:fontRef idx="minor">
+            <a:schemeClr val="lt1"/>
+          </a:fontRef>
+        </p:style>
+        <p:txBody>
+          <a:bodyPr rtlCol="0" anchor="ctr"/>
+          <a:lstStyle/>
+          <a:p>
+            <a:pPr algn="ctr"/>
+            <a:endParaRPr/>
+          </a:p>
+        </p:txBody>
+      </p:sp>
+      <p:sp>
+        <p:nvSpPr>
+          <p:cNvPr id="43" name="TextBox 42"/>
+          <p:cNvSpPr txBox="1"/>
+          <p:nvPr/>
+        </p:nvSpPr>
+        <p:spPr>
+          <a:xfrm>
+            <a:off x="6555600" y="2300000"/>
+            <a:ext cx="1600000" cy="300000"/>
+          </a:xfrm>
+          <a:prstGeom prst="rect">
+            <a:avLst/>
+          </a:prstGeom>
+          <a:noFill/>
+        </p:spPr>
+        <p:txBody>
+          <a:bodyPr wrap="square" lIns="0" tIns="0" rIns="0" bIns="0" anchor="t">
+            <a:spAutoFit/>
+          </a:bodyPr>
+          <a:lstStyle/>
+          <a:p>
+            <a:pPr algn="l"/>
+            <a:r>
+              <a:rPr sz="1600" b="1">
+                <a:solidFill>
+                  <a:srgbClr val="C9A77C"/>
+                </a:solidFill>
+                <a:latin typeface="Roboto Mono"/>
+              </a:rPr>
+              <a:t>100%</a:t>
+            </a:r>
+          </a:p>
+        </p:txBody>
+      </p:sp>
+      <p:sp>
+        <p:nvSpPr>
+          <p:cNvPr id="44" name="TextBox 43"/>
+          <p:cNvSpPr txBox="1"/>
+          <p:nvPr/>
+        </p:nvSpPr>
+        <p:spPr>
+          <a:xfrm>
+            <a:off x="6395600" y="2590000"/>
+            <a:ext cx="2462000" cy="200000"/>
+          </a:xfrm>
+          <a:prstGeom prst="rect">
+            <a:avLst/>
+          </a:prstGeom>
+          <a:noFill/>
+        </p:spPr>
+        <p:txBody>
+          <a:bodyPr wrap="square" lIns="0" tIns="0" rIns="0" bIns="0" anchor="t">
+            <a:spAutoFit/>
+          </a:bodyPr>
+          <a:lstStyle/>
+          <a:p>
+            <a:pPr algn="l"/>
+            <a:r>
+              <a:rPr sz="1000" b="0">
+                <a:solidFill>
+                  <a:srgbClr val="8A95A3"/>
+                </a:solidFill>
+                <a:latin typeface="Inter"/>
+              </a:rPr>
+              <a:t>Наличие POSM к старту</a:t>
+            </a:r>
+          </a:p>
+        </p:txBody>
+      </p:sp>
+      <p:sp>
+        <p:nvSpPr>
+          <p:cNvPr id="45" name="Rectangle 44"/>
+          <p:cNvSpPr/>
+          <p:nvPr/>
+        </p:nvSpPr>
+        <p:spPr>
+          <a:xfrm>
+            <a:off x="6395600" y="2760000"/>
+            <a:ext cx="2462000" cy="12000"/>
+          </a:xfrm>
+          <a:prstGeom prst="rect">
+            <a:avLst/>
+          </a:prstGeom>
+          <a:solidFill>
+            <a:srgbClr val="EFE9DD"/>
+          </a:solidFill>
+          <a:ln>
+            <a:noFill/>
+          </a:ln>
+          <a:effectLst/>
+        </p:spPr>
+        <p:style>
+          <a:lnRef idx="1">
+            <a:schemeClr val="accent1"/>
+          </a:lnRef>
+          <a:fillRef idx="3">
+            <a:schemeClr val="accent1"/>
+          </a:fillRef>
+          <a:effectRef idx="2">
+            <a:schemeClr val="accent1"/>
+          </a:effectRef>
+          <a:fontRef idx="minor">
+            <a:schemeClr val="lt1"/>
+          </a:fontRef>
+        </p:style>
+        <p:txBody>
+          <a:bodyPr rtlCol="0" anchor="ctr"/>
+          <a:lstStyle/>
+          <a:p>
+            <a:pPr algn="ctr"/>
+            <a:endParaRPr/>
+          </a:p>
+        </p:txBody>
+      </p:sp>
+      <p:sp>
+        <p:nvSpPr>
+          <p:cNvPr id="46" name="Rectangle 45"/>
+          <p:cNvSpPr/>
+          <p:nvPr/>
+        </p:nvSpPr>
+        <p:spPr>
+          <a:xfrm>
+            <a:off x="6395600" y="2870000"/>
+            <a:ext cx="40000" cy="520000"/>
+          </a:xfrm>
+          <a:prstGeom prst="rect">
+            <a:avLst/>
+          </a:prstGeom>
+          <a:solidFill>
+            <a:srgbClr val="C9A77C"/>
+          </a:solidFill>
+          <a:ln>
+            <a:noFill/>
+          </a:ln>
+          <a:effectLst/>
+        </p:spPr>
+        <p:style>
+          <a:lnRef idx="1">
+            <a:schemeClr val="accent1"/>
+          </a:lnRef>
+          <a:fillRef idx="3">
+            <a:schemeClr val="accent1"/>
+          </a:fillRef>
+          <a:effectRef idx="2">
+            <a:schemeClr val="accent1"/>
+          </a:effectRef>
+          <a:fontRef idx="minor">
+            <a:schemeClr val="lt1"/>
+          </a:fontRef>
+        </p:style>
+        <p:txBody>
+          <a:bodyPr rtlCol="0" anchor="ctr"/>
+          <a:lstStyle/>
+          <a:p>
+            <a:pPr algn="ctr"/>
+            <a:endParaRPr/>
+          </a:p>
+        </p:txBody>
+      </p:sp>
+      <p:sp>
+        <p:nvSpPr>
+          <p:cNvPr id="47" name="TextBox 46"/>
+          <p:cNvSpPr txBox="1"/>
+          <p:nvPr/>
+        </p:nvSpPr>
+        <p:spPr>
+          <a:xfrm>
+            <a:off x="6555600" y="2880000"/>
+            <a:ext cx="1600000" cy="300000"/>
+          </a:xfrm>
+          <a:prstGeom prst="rect">
+            <a:avLst/>
+          </a:prstGeom>
+          <a:noFill/>
+        </p:spPr>
+        <p:txBody>
+          <a:bodyPr wrap="square" lIns="0" tIns="0" rIns="0" bIns="0" anchor="t">
+            <a:spAutoFit/>
+          </a:bodyPr>
+          <a:lstStyle/>
+          <a:p>
+            <a:pPr algn="l"/>
+            <a:r>
+              <a:rPr sz="1600" b="1">
+                <a:solidFill>
+                  <a:srgbClr val="C9A77C"/>
+                </a:solidFill>
+                <a:latin typeface="Roboto Mono"/>
+              </a:rPr>
+              <a:t>350 ТП</a:t>
+            </a:r>
+          </a:p>
+        </p:txBody>
+      </p:sp>
+      <p:sp>
+        <p:nvSpPr>
+          <p:cNvPr id="48" name="TextBox 47"/>
+          <p:cNvSpPr txBox="1"/>
+          <p:nvPr/>
+        </p:nvSpPr>
+        <p:spPr>
+          <a:xfrm>
+            <a:off x="6395600" y="3170000"/>
+            <a:ext cx="2462000" cy="200000"/>
+          </a:xfrm>
+          <a:prstGeom prst="rect">
+            <a:avLst/>
+          </a:prstGeom>
+          <a:noFill/>
+        </p:spPr>
+        <p:txBody>
+          <a:bodyPr wrap="square" lIns="0" tIns="0" rIns="0" bIns="0" anchor="t">
+            <a:spAutoFit/>
+          </a:bodyPr>
+          <a:lstStyle/>
+          <a:p>
+            <a:pPr algn="l"/>
+            <a:r>
+              <a:rPr sz="1000" b="0">
+                <a:solidFill>
+                  <a:srgbClr val="8A95A3"/>
+                </a:solidFill>
+                <a:latin typeface="Inter"/>
+              </a:rPr>
+              <a:t>Обучено в первый месяц</a:t>
+            </a:r>
+          </a:p>
+        </p:txBody>
+      </p:sp>
+      <p:sp>
+        <p:nvSpPr>
+          <p:cNvPr id="49" name="Rectangle 48"/>
+          <p:cNvSpPr/>
+          <p:nvPr/>
+        </p:nvSpPr>
+        <p:spPr>
+          <a:xfrm>
+            <a:off x="6395600" y="3340000"/>
+            <a:ext cx="2462000" cy="12000"/>
+          </a:xfrm>
+          <a:prstGeom prst="rect">
+            <a:avLst/>
+          </a:prstGeom>
+          <a:solidFill>
+            <a:srgbClr val="EFE9DD"/>
+          </a:solidFill>
+          <a:ln>
+            <a:noFill/>
+          </a:ln>
+          <a:effectLst/>
+        </p:spPr>
+        <p:style>
+          <a:lnRef idx="1">
+            <a:schemeClr val="accent1"/>
+          </a:lnRef>
+          <a:fillRef idx="3">
+            <a:schemeClr val="accent1"/>
+          </a:fillRef>
+          <a:effectRef idx="2">
+            <a:schemeClr val="accent1"/>
+          </a:effectRef>
+          <a:fontRef idx="minor">
+            <a:schemeClr val="lt1"/>
+          </a:fontRef>
+        </p:style>
+        <p:txBody>
+          <a:bodyPr rtlCol="0" anchor="ctr"/>
+          <a:lstStyle/>
+          <a:p>
+            <a:pPr algn="ctr"/>
+            <a:endParaRPr/>
+          </a:p>
+        </p:txBody>
+      </p:sp>
+      <p:sp>
+        <p:nvSpPr>
+          <p:cNvPr id="50" name="Rectangle 49"/>
+          <p:cNvSpPr/>
+          <p:nvPr/>
+        </p:nvSpPr>
+        <p:spPr>
+          <a:xfrm>
+            <a:off x="6395600" y="3450000"/>
+            <a:ext cx="40000" cy="520000"/>
+          </a:xfrm>
+          <a:prstGeom prst="rect">
+            <a:avLst/>
+          </a:prstGeom>
+          <a:solidFill>
+            <a:srgbClr val="2F3A48"/>
+          </a:solidFill>
+          <a:ln>
+            <a:noFill/>
+          </a:ln>
+          <a:effectLst/>
+        </p:spPr>
+        <p:style>
+          <a:lnRef idx="1">
+            <a:schemeClr val="accent1"/>
+          </a:lnRef>
+          <a:fillRef idx="3">
+            <a:schemeClr val="accent1"/>
+          </a:fillRef>
+          <a:effectRef idx="2">
+            <a:schemeClr val="accent1"/>
+          </a:effectRef>
+          <a:fontRef idx="minor">
+            <a:schemeClr val="lt1"/>
+          </a:fontRef>
+        </p:style>
+        <p:txBody>
+          <a:bodyPr rtlCol="0" anchor="ctr"/>
+          <a:lstStyle/>
+          <a:p>
+            <a:pPr algn="ctr"/>
+            <a:endParaRPr/>
+          </a:p>
+        </p:txBody>
+      </p:sp>
+      <p:sp>
+        <p:nvSpPr>
+          <p:cNvPr id="51" name="TextBox 50"/>
+          <p:cNvSpPr txBox="1"/>
+          <p:nvPr/>
+        </p:nvSpPr>
+        <p:spPr>
+          <a:xfrm>
+            <a:off x="6555600" y="3460000"/>
+            <a:ext cx="1600000" cy="300000"/>
+          </a:xfrm>
+          <a:prstGeom prst="rect">
+            <a:avLst/>
+          </a:prstGeom>
+          <a:noFill/>
+        </p:spPr>
+        <p:txBody>
+          <a:bodyPr wrap="square" lIns="0" tIns="0" rIns="0" bIns="0" anchor="t">
+            <a:spAutoFit/>
+          </a:bodyPr>
+          <a:lstStyle/>
+          <a:p>
+            <a:pPr algn="l"/>
+            <a:r>
+              <a:rPr sz="1600" b="1">
+                <a:solidFill>
+                  <a:srgbClr val="2F3A48"/>
+                </a:solidFill>
+                <a:latin typeface="Roboto Mono"/>
+              </a:rPr>
+              <a:t>90 дней</a:t>
+            </a:r>
+          </a:p>
+        </p:txBody>
+      </p:sp>
+      <p:sp>
+        <p:nvSpPr>
+          <p:cNvPr id="52" name="TextBox 51"/>
+          <p:cNvSpPr txBox="1"/>
+          <p:nvPr/>
+        </p:nvSpPr>
+        <p:spPr>
+          <a:xfrm>
+            <a:off x="6395600" y="3750000"/>
+            <a:ext cx="2462000" cy="200000"/>
+          </a:xfrm>
+          <a:prstGeom prst="rect">
+            <a:avLst/>
+          </a:prstGeom>
+          <a:noFill/>
+        </p:spPr>
+        <p:txBody>
+          <a:bodyPr wrap="square" lIns="0" tIns="0" rIns="0" bIns="0" anchor="t">
+            <a:spAutoFit/>
+          </a:bodyPr>
+          <a:lstStyle/>
+          <a:p>
+            <a:pPr algn="l"/>
+            <a:r>
+              <a:rPr sz="1000" b="0">
+                <a:solidFill>
+                  <a:srgbClr val="8A95A3"/>
+                </a:solidFill>
+                <a:latin typeface="Inter"/>
+              </a:rPr>
+              <a:t>Период активной поддержки</a:t>
+            </a:r>
+          </a:p>
+        </p:txBody>
+      </p:sp>
+      <p:sp>
+        <p:nvSpPr>
+          <p:cNvPr id="53" name="Rectangle 52"/>
+          <p:cNvSpPr/>
+          <p:nvPr/>
+        </p:nvSpPr>
+        <p:spPr>
+          <a:xfrm>
+            <a:off x="6395600" y="4010000"/>
+            <a:ext cx="2462000" cy="15000"/>
+          </a:xfrm>
+          <a:prstGeom prst="rect">
+            <a:avLst/>
+          </a:prstGeom>
+          <a:solidFill>
+            <a:srgbClr val="EFE9DD"/>
+          </a:solidFill>
+          <a:ln>
+            <a:noFill/>
+          </a:ln>
+          <a:effectLst/>
+        </p:spPr>
+        <p:style>
+          <a:lnRef idx="1">
+            <a:schemeClr val="accent1"/>
+          </a:lnRef>
+          <a:fillRef idx="3">
+            <a:schemeClr val="accent1"/>
+          </a:fillRef>
+          <a:effectRef idx="2">
+            <a:schemeClr val="accent1"/>
+          </a:effectRef>
+          <a:fontRef idx="minor">
+            <a:schemeClr val="lt1"/>
+          </a:fontRef>
+        </p:style>
+        <p:txBody>
+          <a:bodyPr rtlCol="0" anchor="ctr"/>
+          <a:lstStyle/>
+          <a:p>
+            <a:pPr algn="ctr"/>
+            <a:endParaRPr/>
+          </a:p>
+        </p:txBody>
+      </p:sp>
+      <p:sp>
+        <p:nvSpPr>
+          <p:cNvPr id="54" name="TextBox 53"/>
+          <p:cNvSpPr txBox="1"/>
+          <p:nvPr/>
+        </p:nvSpPr>
+        <p:spPr>
+          <a:xfrm>
+            <a:off x="6395600" y="4060000"/>
+            <a:ext cx="2462000" cy="280000"/>
+          </a:xfrm>
+          <a:prstGeom prst="rect">
+            <a:avLst/>
+          </a:prstGeom>
+          <a:noFill/>
+        </p:spPr>
+        <p:txBody>
+          <a:bodyPr wrap="square" lIns="0" tIns="0" rIns="0" bIns="0" anchor="t">
+            <a:spAutoFit/>
+          </a:bodyPr>
+          <a:lstStyle/>
+          <a:p>
+            <a:pPr algn="ctr"/>
+            <a:r>
+              <a:rPr sz="900" b="0">
+                <a:solidFill>
+                  <a:srgbClr val="8A95A3"/>
+                </a:solidFill>
+                <a:latin typeface="Inter"/>
+              </a:rPr>
+              <a:t>Без выполнения KPI поддержка не продлевается</a:t>
+            </a:r>
+          </a:p>
+        </p:txBody>
+      </p:sp>
+    </p:spTree>
+  </p:cSld>
+  <p:clrMapOvr>
+    <a:masterClrMapping/>
+  </p:clrMapOvr>
+</p:sld>
+</file>
+
+<file path=ppt/slides/slide6.xml><?xml version="1.0" encoding="utf-8"?>
+<p:sld xmlns:a="http://schemas.openxmlformats.org/drawingml/2006/main" xmlns:r="http://schemas.openxmlformats.org/officeDocument/2006/relationships" xmlns:p="http://schemas.openxmlformats.org/presentationml/2006/main">
+  <p:cSld>
+    <p:bg>
+      <p:bgPr>
+        <a:solidFill>
+          <a:srgbClr val="F5F2EC"/>
+        </a:solidFill>
+        <a:effectLst/>
+      </p:bgPr>
+    </p:bg>
+    <p:spTree>
+      <p:nvGrpSpPr>
+        <p:cNvPr id="1" name=""/>
+        <p:cNvGrpSpPr/>
+        <p:nvPr/>
+      </p:nvGrpSpPr>
+      <p:grpSpPr>
+        <a:xfrm>
+          <a:off x="0" y="0"/>
+          <a:ext cx="0" cy="0"/>
+          <a:chOff x="0" y="0"/>
+          <a:chExt cx="0" cy="0"/>
+        </a:xfrm>
+      </p:grpSpPr>
+      <p:sp>
+        <p:nvSpPr>
+          <p:cNvPr id="5" name="TextBox 4"/>
+          <p:cNvSpPr txBox="1"/>
+          <p:nvPr/>
+        </p:nvSpPr>
+        <p:spPr>
+          <a:xfrm>
+            <a:off x="120650" y="520700"/>
+            <a:ext cx="7226300" cy="338554"/>
+          </a:xfrm>
+          <a:prstGeom prst="rect">
+            <a:avLst/>
+          </a:prstGeom>
+          <a:noFill/>
+        </p:spPr>
+        <p:txBody>
+          <a:bodyPr wrap="square" lIns="0" tIns="0" rIns="0" bIns="0" anchor="t">
+            <a:spAutoFit/>
+          </a:bodyPr>
+          <a:lstStyle/>
+          <a:p>
+            <a:pPr algn="l"/>
+            <a:r>
+              <a:rPr lang="ru-RU" sz="2200" b="1" dirty="0" smtClean="0">
+                <a:solidFill>
+                  <a:srgbClr val="2F3A48"/>
+                </a:solidFill>
+                <a:latin typeface="Inter"/>
+              </a:rPr>
+              <a:t>Выход в сегмент </a:t>
+            </a:r>
+            <a:r>
+              <a:rPr sz="2200" b="1" dirty="0" err="1" smtClean="0">
+                <a:solidFill>
+                  <a:srgbClr val="2F3A48"/>
+                </a:solidFill>
+                <a:latin typeface="Inter"/>
+              </a:rPr>
+              <a:t>жилищного</a:t>
+            </a:r>
+            <a:r>
+              <a:rPr sz="2200" b="1" dirty="0" smtClean="0">
+                <a:solidFill>
+                  <a:srgbClr val="2F3A48"/>
+                </a:solidFill>
+                <a:latin typeface="Inter"/>
+              </a:rPr>
+              <a:t> </a:t>
+            </a:r>
+            <a:r>
+              <a:rPr sz="2200" b="1" dirty="0" err="1">
+                <a:solidFill>
+                  <a:srgbClr val="2F3A48"/>
+                </a:solidFill>
+                <a:latin typeface="Inter"/>
+              </a:rPr>
+              <a:t>строительства</a:t>
+            </a:r>
+            <a:endParaRPr sz="2200" b="1" dirty="0">
+              <a:solidFill>
+                <a:srgbClr val="2F3A48"/>
+              </a:solidFill>
+              <a:latin typeface="Inter"/>
+            </a:endParaRPr>
+          </a:p>
+        </p:txBody>
+      </p:sp>
+      <p:sp>
+        <p:nvSpPr>
+          <p:cNvPr id="6" name="Rounded Rectangle 5"/>
+          <p:cNvSpPr/>
+          <p:nvPr/>
+        </p:nvSpPr>
+        <p:spPr>
+          <a:xfrm>
+            <a:off x="7270750" y="139065"/>
+            <a:ext cx="1601590" cy="268605"/>
+          </a:xfrm>
+          <a:prstGeom prst="roundRect">
+            <a:avLst>
+              <a:gd name="adj" fmla="val 50000"/>
+            </a:avLst>
+          </a:prstGeom>
+          <a:solidFill>
+            <a:srgbClr val="FFFFFF"/>
+          </a:solidFill>
+          <a:ln w="9525">
+            <a:solidFill>
+              <a:srgbClr val="C9A77C"/>
+            </a:solidFill>
+          </a:ln>
+          <a:effectLst/>
+        </p:spPr>
+        <p:style>
+          <a:lnRef idx="1">
+            <a:schemeClr val="accent1"/>
+          </a:lnRef>
+          <a:fillRef idx="3">
+            <a:schemeClr val="accent1"/>
+          </a:fillRef>
+          <a:effectRef idx="2">
+            <a:schemeClr val="accent1"/>
+          </a:effectRef>
+          <a:fontRef idx="minor">
+            <a:schemeClr val="lt1"/>
+          </a:fontRef>
+        </p:style>
+        <p:txBody>
+          <a:bodyPr rtlCol="0" anchor="ctr"/>
+          <a:lstStyle/>
+          <a:p>
+            <a:pPr algn="ctr"/>
+            <a:endParaRPr/>
+          </a:p>
+        </p:txBody>
+      </p:sp>
+      <p:sp>
+        <p:nvSpPr>
+          <p:cNvPr id="7" name="TextBox 6"/>
+          <p:cNvSpPr txBox="1"/>
+          <p:nvPr/>
+        </p:nvSpPr>
+        <p:spPr>
+          <a:xfrm>
+            <a:off x="7397750" y="190649"/>
+            <a:ext cx="1368950" cy="153888"/>
+          </a:xfrm>
+          <a:prstGeom prst="rect">
+            <a:avLst/>
+          </a:prstGeom>
+          <a:noFill/>
+        </p:spPr>
+        <p:txBody>
+          <a:bodyPr wrap="square" lIns="0" tIns="0" rIns="0" bIns="0" anchor="t">
+            <a:spAutoFit/>
+          </a:bodyPr>
+          <a:lstStyle/>
+          <a:p>
+            <a:pPr algn="ctr"/>
+            <a:r>
+              <a:rPr sz="1000" b="1" spc="150" dirty="0" smtClean="0">
+                <a:solidFill>
+                  <a:srgbClr val="C9A77C"/>
+                </a:solidFill>
+                <a:latin typeface="Inter"/>
+              </a:rPr>
+              <a:t>В </a:t>
+            </a:r>
+            <a:r>
+              <a:rPr sz="1000" b="1" spc="150" dirty="0">
+                <a:solidFill>
+                  <a:srgbClr val="C9A77C"/>
+                </a:solidFill>
+                <a:latin typeface="Inter"/>
+              </a:rPr>
+              <a:t>РАБОТЕ</a:t>
+            </a:r>
+          </a:p>
+        </p:txBody>
+      </p:sp>
+      <p:sp>
+        <p:nvSpPr>
+          <p:cNvPr id="8" name="Rectangle 7"/>
+          <p:cNvSpPr/>
+          <p:nvPr/>
+        </p:nvSpPr>
+        <p:spPr>
+          <a:xfrm>
+            <a:off x="143256" y="453390"/>
+            <a:ext cx="8855724" cy="28575"/>
+          </a:xfrm>
+          <a:prstGeom prst="rect">
+            <a:avLst/>
+          </a:prstGeom>
+          <a:solidFill>
+            <a:srgbClr val="D9D2C2"/>
+          </a:solidFill>
+          <a:ln>
+            <a:noFill/>
+          </a:ln>
+          <a:effectLst/>
+        </p:spPr>
+        <p:style>
+          <a:lnRef idx="1">
+            <a:schemeClr val="accent1"/>
+          </a:lnRef>
+          <a:fillRef idx="3">
+            <a:schemeClr val="accent1"/>
+          </a:fillRef>
+          <a:effectRef idx="2">
+            <a:schemeClr val="accent1"/>
+          </a:effectRef>
+          <a:fontRef idx="minor">
+            <a:schemeClr val="lt1"/>
+          </a:fontRef>
+        </p:style>
+        <p:txBody>
+          <a:bodyPr rtlCol="0" anchor="ctr"/>
+          <a:lstStyle/>
+          <a:p>
+            <a:pPr algn="ctr"/>
+            <a:endParaRPr/>
+          </a:p>
+        </p:txBody>
+      </p:sp>
+      <p:sp>
+        <p:nvSpPr>
+          <p:cNvPr id="9" name="Rounded Rectangle 8"/>
+          <p:cNvSpPr/>
+          <p:nvPr/>
+        </p:nvSpPr>
+        <p:spPr>
+          <a:xfrm>
+            <a:off x="61200" y="962590"/>
+            <a:ext cx="6066960" cy="3975450"/>
+          </a:xfrm>
+          <a:prstGeom prst="roundRect">
+            <a:avLst>
+              <a:gd name="adj" fmla="val 2000"/>
+            </a:avLst>
+          </a:prstGeom>
+          <a:solidFill>
+            <a:srgbClr val="FFFFFF"/>
+          </a:solidFill>
+          <a:ln w="6350">
+            <a:solidFill>
+              <a:srgbClr val="D9D2C2"/>
+            </a:solidFill>
+          </a:ln>
+          <a:effectLst/>
+        </p:spPr>
+        <p:style>
+          <a:lnRef idx="1">
+            <a:schemeClr val="accent1"/>
+          </a:lnRef>
+          <a:fillRef idx="3">
+            <a:schemeClr val="accent1"/>
+          </a:fillRef>
+          <a:effectRef idx="2">
+            <a:schemeClr val="accent1"/>
+          </a:effectRef>
+          <a:fontRef idx="minor">
+            <a:schemeClr val="lt1"/>
+          </a:fontRef>
+        </p:style>
+        <p:txBody>
+          <a:bodyPr rtlCol="0" anchor="ctr"/>
+          <a:lstStyle/>
+          <a:p>
+            <a:pPr algn="ctr"/>
+            <a:endParaRPr/>
+          </a:p>
+        </p:txBody>
+      </p:sp>
+      <p:sp>
+        <p:nvSpPr>
           <p:cNvPr id="10" name="TextBox 9"/>
           <p:cNvSpPr txBox="1"/>
           <p:nvPr/>
@@ -15330,7 +17937,7 @@
 </p:sld>
 </file>
 
-<file path=ppt/slides/slide6.xml><?xml version="1.0" encoding="utf-8"?>
+<file path=ppt/slides/slide7.xml><?xml version="1.0" encoding="utf-8"?>
 <p:sld xmlns:a="http://schemas.openxmlformats.org/drawingml/2006/main" xmlns:r="http://schemas.openxmlformats.org/officeDocument/2006/relationships" xmlns:p="http://schemas.openxmlformats.org/presentationml/2006/main">
   <p:cSld>
     <p:spTree>
@@ -21028,6 +23635,36 @@
     <p:extLst>
       <p:ext uri="{BB962C8B-B14F-4D97-AF65-F5344CB8AC3E}">
         <p14:creationId xmlns:p14="http://schemas.microsoft.com/office/powerpoint/2010/main" val="1769665827"/>
+      </p:ext>
+    </p:extLst>
+  </p:cSld>
+  <p:clrMapOvr>
+    <a:masterClrMapping/>
+  </p:clrMapOvr>
+</p:sld>
+</file>
+
+<file path=ppt/slides/slide8.xml><?xml version="1.0" encoding="utf-8"?>
+<p:sld xmlns:a="http://schemas.openxmlformats.org/drawingml/2006/main" xmlns:r="http://schemas.openxmlformats.org/officeDocument/2006/relationships" xmlns:p="http://schemas.openxmlformats.org/presentationml/2006/main">
+  <p:cSld>
+    <p:spTree>
+      <p:nvGrpSpPr>
+        <p:cNvPr id="1" name=""/>
+        <p:cNvGrpSpPr/>
+        <p:nvPr/>
+      </p:nvGrpSpPr>
+      <p:grpSpPr>
+        <a:xfrm>
+          <a:off x="0" y="0"/>
+          <a:ext cx="0" cy="0"/>
+          <a:chOff x="0" y="0"/>
+          <a:chExt cx="0" cy="0"/>
+        </a:xfrm>
+      </p:grpSpPr>
+    </p:spTree>
+    <p:extLst>
+      <p:ext uri="{BB962C8B-B14F-4D97-AF65-F5344CB8AC3E}">
+        <p14:creationId xmlns:p14="http://schemas.microsoft.com/office/powerpoint/2010/main" val="1612797523"/>
       </p:ext>
     </p:extLst>
   </p:cSld>
